--- a/docs/assets/Wrexlyn-Pitch-Deck.pptx
+++ b/docs/assets/Wrexlyn-Pitch-Deck.pptx
@@ -3586,8 +3586,8 @@
         </p:blipFill>
         <p:spPr>
           <a:xfrm>
-            <a:off x="2514600" y="1417320"/>
-            <a:ext cx="4114800" cy="8904849"/>
+            <a:off x="3858979" y="1417320"/>
+            <a:ext cx="1426041" cy="3086100"/>
           </a:xfrm>
           <a:prstGeom prst="rect">
             <a:avLst/>
@@ -3602,7 +3602,7 @@
         </p:nvSpPr>
         <p:spPr>
           <a:xfrm>
-            <a:off x="457200" y="4754880"/>
+            <a:off x="457200" y="4640580"/>
             <a:ext cx="8229600" cy="365760"/>
           </a:xfrm>
           <a:prstGeom prst="rect">
@@ -3935,7 +3935,7 @@
         <p:spPr>
           <a:xfrm>
             <a:off x="457200" y="1417320"/>
-            <a:ext cx="8229600" cy="4572000"/>
+            <a:ext cx="8229600" cy="3566160"/>
           </a:xfrm>
           <a:prstGeom prst="rect">
             <a:avLst/>
@@ -4100,7 +4100,7 @@
         <p:spPr>
           <a:xfrm>
             <a:off x="457200" y="1417320"/>
-            <a:ext cx="8229600" cy="4572000"/>
+            <a:ext cx="8229600" cy="3566160"/>
           </a:xfrm>
           <a:prstGeom prst="rect">
             <a:avLst/>
@@ -4417,7 +4417,7 @@
         <p:spPr>
           <a:xfrm>
             <a:off x="457200" y="1417320"/>
-            <a:ext cx="3931920" cy="4572000"/>
+            <a:ext cx="3931920" cy="3566160"/>
           </a:xfrm>
           <a:prstGeom prst="rect">
             <a:avLst/>
@@ -4547,7 +4547,7 @@
         <p:spPr>
           <a:xfrm>
             <a:off x="4754880" y="1417320"/>
-            <a:ext cx="3931920" cy="4572000"/>
+            <a:ext cx="3931920" cy="3566160"/>
           </a:xfrm>
           <a:prstGeom prst="rect">
             <a:avLst/>
@@ -6716,7 +6716,7 @@
         <p:spPr>
           <a:xfrm>
             <a:off x="457200" y="1417320"/>
-            <a:ext cx="8229600" cy="4572000"/>
+            <a:ext cx="8229600" cy="3566160"/>
           </a:xfrm>
           <a:prstGeom prst="rect">
             <a:avLst/>

--- a/docs/assets/Wrexlyn-Pitch-Deck.pptx
+++ b/docs/assets/Wrexlyn-Pitch-Deck.pptx
@@ -17,6 +17,7 @@
     <p:sldId id="265" r:id="rId11"/>
     <p:sldId id="266" r:id="rId12"/>
     <p:sldId id="267" r:id="rId13"/>
+    <p:sldId id="269" r:id="rId20"/>
     <p:sldId id="268" r:id="rId14"/>
   </p:sldIdLst>
   <p:notesMasterIdLst>
@@ -3863,6 +3864,1890 @@
 </p:sld>
 </file>
 
+<file path=ppt/slides/slide14.xml><?xml version="1.0" encoding="utf-8"?>
+<p:sld xmlns:a="http://schemas.openxmlformats.org/drawingml/2006/main" xmlns:r="http://schemas.openxmlformats.org/officeDocument/2006/relationships" xmlns:p="http://schemas.openxmlformats.org/presentationml/2006/main">
+  <p:cSld name="Slide 10">
+    <p:bg>
+      <p:bgPr>
+        <a:solidFill>
+          <a:srgbClr val="FFFFFF"/>
+        </a:solidFill>
+      </p:bgPr>
+    </p:bg>
+    <p:spTree>
+      <p:nvGrpSpPr>
+        <p:cNvPr id="1" name=""/>
+        <p:cNvGrpSpPr/>
+        <p:nvPr/>
+      </p:nvGrpSpPr>
+      <p:grpSpPr>
+        <a:xfrm>
+          <a:off x="0" y="0"/>
+          <a:ext cx="0" cy="0"/>
+          <a:chOff x="0" y="0"/>
+          <a:chExt cx="0" cy="0"/>
+        </a:xfrm>
+      </p:grpSpPr>
+      <p:sp>
+        <p:nvSpPr>
+          <p:cNvPr id="2" name="Text 0"/>
+          <p:cNvSpPr/>
+          <p:nvPr/>
+        </p:nvSpPr>
+        <p:spPr>
+          <a:xfrm>
+            <a:off x="457200" y="320040"/>
+            <a:ext cx="8229600" cy="822960"/>
+          </a:xfrm>
+          <a:prstGeom prst="rect">
+            <a:avLst/>
+          </a:prstGeom>
+          <a:noFill/>
+          <a:ln/>
+        </p:spPr>
+        <p:txBody>
+          <a:bodyPr wrap="square" rtlCol="0" anchor="ctr"/>
+          <a:lstStyle/>
+          <a:p>
+            <a:pPr indent="0" marL="0">
+              <a:buNone/>
+            </a:pPr>
+            <a:r>
+              <a:rPr lang="en-US" sz="3600" b="1" dirty="0">
+                <a:solidFill>
+                  <a:srgbClr val="1F2937"/>
+                </a:solidFill>
+                <a:latin typeface="Calibri" pitchFamily="34" charset="0"/>
+                <a:ea typeface="Calibri" pitchFamily="34" charset="-122"/>
+                <a:cs typeface="Calibri" pitchFamily="34" charset="-120"/>
+              </a:rPr>
+              <a:t>Also in this repo: a private library of scoring algorithms</a:t>
+            </a:r>
+            <a:endParaRPr lang="en-US" sz="3600" dirty="0"/>
+          </a:p>
+        </p:txBody>
+      </p:sp>
+      <p:graphicFrame>
+        <p:nvGraphicFramePr>
+          <p:cNvPr id="11" name="Table 0"/>
+          <p:cNvGraphicFramePr>
+            <a:graphicFrameLocks noGrp="1"/>
+          </p:cNvGraphicFramePr>
+          <p:nvPr>
+            <p:extLst>
+              <p:ext uri="{D42A27DB-BD31-4B8C-83A1-F6EECF244321}">
+                <p14:modId xmlns:p14="http://schemas.microsoft.com/office/powerpoint/2010/main" val="1579011935"/>
+              </p:ext>
+            </p:extLst>
+          </p:nvPr>
+        </p:nvGraphicFramePr>
+        <p:xfrm>
+          <a:off x="457200" y="1417320"/>
+          <a:ext cx="8229600" cy="914400"/>
+        </p:xfrm>
+        <a:graphic>
+          <a:graphicData uri="http://schemas.openxmlformats.org/drawingml/2006/table">
+            <a:tbl>
+              <a:tblPr/>
+              <a:tblGrid>
+                <a:gridCol w="2743200"/>
+                <a:gridCol w="2743200"/>
+                <a:gridCol w="2743200"/>
+              </a:tblGrid>
+              <a:tr h="0">
+                <a:tc>
+                  <a:txBody>
+                    <a:bodyPr/>
+                    <a:lstStyle/>
+                    <a:p>
+                      <a:pPr algn="l" indent="0" marL="0">
+                        <a:buNone/>
+                      </a:pPr>
+                      <a:r>
+                        <a:rPr lang="en-US" sz="1400" b="1" dirty="0">
+                          <a:solidFill>
+                            <a:srgbClr val="FFFFFF"/>
+                          </a:solidFill>
+                          <a:latin typeface="Calibri" pitchFamily="34" charset="0"/>
+                          <a:ea typeface="Calibri" pitchFamily="34" charset="-122"/>
+                          <a:cs typeface="Calibri" pitchFamily="34" charset="-120"/>
+                        </a:rPr>
+                        <a:t>Algorithm</a:t>
+                      </a:r>
+                      <a:endParaRPr lang="en-US" sz="1400" dirty="0">
+                        <a:latin typeface="Calibri" charset="0"/>
+                        <a:ea typeface="Calibri" charset="0"/>
+                        <a:cs typeface="Calibri" charset="0"/>
+                      </a:endParaRPr>
+                    </a:p>
+                  </a:txBody>
+                  <a:tcPr marL="91440" marR="91440" marT="45720" marB="45720">
+                    <a:lnL w="6350" cap="flat" cmpd="sng" algn="ctr">
+                      <a:solidFill>
+                        <a:srgbClr val="D1D5DB"/>
+                      </a:solidFill>
+                      <a:prstDash val="solid"/>
+                      <a:round/>
+                      <a:headEnd type="none" w="med" len="med"/>
+                      <a:tailEnd type="none" w="med" len="med"/>
+                    </a:lnL>
+                    <a:lnR w="6350" cap="flat" cmpd="sng" algn="ctr">
+                      <a:solidFill>
+                        <a:srgbClr val="D1D5DB"/>
+                      </a:solidFill>
+                      <a:prstDash val="solid"/>
+                      <a:round/>
+                      <a:headEnd type="none" w="med" len="med"/>
+                      <a:tailEnd type="none" w="med" len="med"/>
+                    </a:lnR>
+                    <a:lnT w="6350" cap="flat" cmpd="sng" algn="ctr">
+                      <a:solidFill>
+                        <a:srgbClr val="D1D5DB"/>
+                      </a:solidFill>
+                      <a:prstDash val="solid"/>
+                      <a:round/>
+                      <a:headEnd type="none" w="med" len="med"/>
+                      <a:tailEnd type="none" w="med" len="med"/>
+                    </a:lnT>
+                    <a:lnB w="6350" cap="flat" cmpd="sng" algn="ctr">
+                      <a:solidFill>
+                        <a:srgbClr val="D1D5DB"/>
+                      </a:solidFill>
+                      <a:prstDash val="solid"/>
+                      <a:round/>
+                      <a:headEnd type="none" w="med" len="med"/>
+                      <a:tailEnd type="none" w="med" len="med"/>
+                    </a:lnB>
+                    <a:solidFill>
+                      <a:srgbClr val="33E0A8"/>
+                    </a:solidFill>
+                  </a:tcPr>
+                </a:tc>
+                <a:tc>
+                  <a:txBody>
+                    <a:bodyPr/>
+                    <a:lstStyle/>
+                    <a:p>
+                      <a:pPr algn="l" indent="0" marL="0">
+                        <a:buNone/>
+                      </a:pPr>
+                      <a:r>
+                        <a:rPr lang="en-US" sz="1400" b="1" dirty="0">
+                          <a:solidFill>
+                            <a:srgbClr val="FFFFFF"/>
+                          </a:solidFill>
+                          <a:latin typeface="Calibri" pitchFamily="34" charset="0"/>
+                          <a:ea typeface="Calibri" pitchFamily="34" charset="-122"/>
+                          <a:cs typeface="Calibri" pitchFamily="34" charset="-120"/>
+                        </a:rPr>
+                        <a:t>Domain</a:t>
+                      </a:r>
+                      <a:endParaRPr lang="en-US" sz="1400" dirty="0">
+                        <a:latin typeface="Calibri" charset="0"/>
+                        <a:ea typeface="Calibri" charset="0"/>
+                        <a:cs typeface="Calibri" charset="0"/>
+                      </a:endParaRPr>
+                    </a:p>
+                  </a:txBody>
+                  <a:tcPr marL="91440" marR="91440" marT="45720" marB="45720">
+                    <a:lnL w="6350" cap="flat" cmpd="sng" algn="ctr">
+                      <a:solidFill>
+                        <a:srgbClr val="D1D5DB"/>
+                      </a:solidFill>
+                      <a:prstDash val="solid"/>
+                      <a:round/>
+                      <a:headEnd type="none" w="med" len="med"/>
+                      <a:tailEnd type="none" w="med" len="med"/>
+                    </a:lnL>
+                    <a:lnR w="6350" cap="flat" cmpd="sng" algn="ctr">
+                      <a:solidFill>
+                        <a:srgbClr val="D1D5DB"/>
+                      </a:solidFill>
+                      <a:prstDash val="solid"/>
+                      <a:round/>
+                      <a:headEnd type="none" w="med" len="med"/>
+                      <a:tailEnd type="none" w="med" len="med"/>
+                    </a:lnR>
+                    <a:lnT w="6350" cap="flat" cmpd="sng" algn="ctr">
+                      <a:solidFill>
+                        <a:srgbClr val="D1D5DB"/>
+                      </a:solidFill>
+                      <a:prstDash val="solid"/>
+                      <a:round/>
+                      <a:headEnd type="none" w="med" len="med"/>
+                      <a:tailEnd type="none" w="med" len="med"/>
+                    </a:lnT>
+                    <a:lnB w="6350" cap="flat" cmpd="sng" algn="ctr">
+                      <a:solidFill>
+                        <a:srgbClr val="D1D5DB"/>
+                      </a:solidFill>
+                      <a:prstDash val="solid"/>
+                      <a:round/>
+                      <a:headEnd type="none" w="med" len="med"/>
+                      <a:tailEnd type="none" w="med" len="med"/>
+                    </a:lnB>
+                    <a:solidFill>
+                      <a:srgbClr val="33E0A8"/>
+                    </a:solidFill>
+                  </a:tcPr>
+                </a:tc>
+                <a:tc>
+                  <a:txBody>
+                    <a:bodyPr/>
+                    <a:lstStyle/>
+                    <a:p>
+                      <a:pPr algn="l" indent="0" marL="0">
+                        <a:buNone/>
+                      </a:pPr>
+                      <a:r>
+                        <a:rPr lang="en-US" sz="1400" b="1" dirty="0">
+                          <a:solidFill>
+                            <a:srgbClr val="FFFFFF"/>
+                          </a:solidFill>
+                          <a:latin typeface="Calibri" pitchFamily="34" charset="0"/>
+                          <a:ea typeface="Calibri" pitchFamily="34" charset="-122"/>
+                          <a:cs typeface="Calibri" pitchFamily="34" charset="-120"/>
+                        </a:rPr>
+                        <a:t>Verified score</a:t>
+                      </a:r>
+                      <a:endParaRPr lang="en-US" sz="1400" dirty="0">
+                        <a:latin typeface="Calibri" charset="0"/>
+                        <a:ea typeface="Calibri" charset="0"/>
+                        <a:cs typeface="Calibri" charset="0"/>
+                      </a:endParaRPr>
+                    </a:p>
+                  </a:txBody>
+                  <a:tcPr marL="91440" marR="91440" marT="45720" marB="45720">
+                    <a:lnL w="6350" cap="flat" cmpd="sng" algn="ctr">
+                      <a:solidFill>
+                        <a:srgbClr val="D1D5DB"/>
+                      </a:solidFill>
+                      <a:prstDash val="solid"/>
+                      <a:round/>
+                      <a:headEnd type="none" w="med" len="med"/>
+                      <a:tailEnd type="none" w="med" len="med"/>
+                    </a:lnL>
+                    <a:lnR w="6350" cap="flat" cmpd="sng" algn="ctr">
+                      <a:solidFill>
+                        <a:srgbClr val="D1D5DB"/>
+                      </a:solidFill>
+                      <a:prstDash val="solid"/>
+                      <a:round/>
+                      <a:headEnd type="none" w="med" len="med"/>
+                      <a:tailEnd type="none" w="med" len="med"/>
+                    </a:lnR>
+                    <a:lnT w="6350" cap="flat" cmpd="sng" algn="ctr">
+                      <a:solidFill>
+                        <a:srgbClr val="D1D5DB"/>
+                      </a:solidFill>
+                      <a:prstDash val="solid"/>
+                      <a:round/>
+                      <a:headEnd type="none" w="med" len="med"/>
+                      <a:tailEnd type="none" w="med" len="med"/>
+                    </a:lnT>
+                    <a:lnB w="6350" cap="flat" cmpd="sng" algn="ctr">
+                      <a:solidFill>
+                        <a:srgbClr val="D1D5DB"/>
+                      </a:solidFill>
+                      <a:prstDash val="solid"/>
+                      <a:round/>
+                      <a:headEnd type="none" w="med" len="med"/>
+                      <a:tailEnd type="none" w="med" len="med"/>
+                    </a:lnB>
+                    <a:solidFill>
+                      <a:srgbClr val="33E0A8"/>
+                    </a:solidFill>
+                  </a:tcPr>
+                </a:tc>
+              </a:tr>
+              <a:tr h="0">
+                <a:tc>
+                  <a:txBody>
+                    <a:bodyPr/>
+                    <a:lstStyle/>
+                    <a:p>
+                      <a:pPr algn="l" indent="0" marL="0">
+                        <a:buNone/>
+                      </a:pPr>
+                      <a:r>
+                        <a:rPr lang="en-US" sz="1400" dirty="0">
+                          <a:solidFill>
+                            <a:srgbClr val="000000"/>
+                          </a:solidFill>
+                          <a:latin typeface="Calibri" pitchFamily="34" charset="0"/>
+                          <a:ea typeface="Calibri" pitchFamily="34" charset="-122"/>
+                          <a:cs typeface="Calibri" pitchFamily="34" charset="-120"/>
+                        </a:rPr>
+                        <a:t>PDQI</a:t>
+                      </a:r>
+                      <a:endParaRPr lang="en-US" sz="1400" dirty="0">
+                        <a:latin typeface="Calibri" charset="0"/>
+                        <a:ea typeface="Calibri" charset="0"/>
+                        <a:cs typeface="Calibri" charset="0"/>
+                      </a:endParaRPr>
+                    </a:p>
+                  </a:txBody>
+                  <a:tcPr marL="91440" marR="91440" marT="45720" marB="45720">
+                    <a:lnL w="6350" cap="flat" cmpd="sng" algn="ctr">
+                      <a:solidFill>
+                        <a:srgbClr val="D1D5DB"/>
+                      </a:solidFill>
+                      <a:prstDash val="solid"/>
+                      <a:round/>
+                      <a:headEnd type="none" w="med" len="med"/>
+                      <a:tailEnd type="none" w="med" len="med"/>
+                    </a:lnL>
+                    <a:lnR w="6350" cap="flat" cmpd="sng" algn="ctr">
+                      <a:solidFill>
+                        <a:srgbClr val="D1D5DB"/>
+                      </a:solidFill>
+                      <a:prstDash val="solid"/>
+                      <a:round/>
+                      <a:headEnd type="none" w="med" len="med"/>
+                      <a:tailEnd type="none" w="med" len="med"/>
+                    </a:lnR>
+                    <a:lnT w="6350" cap="flat" cmpd="sng" algn="ctr">
+                      <a:solidFill>
+                        <a:srgbClr val="D1D5DB"/>
+                      </a:solidFill>
+                      <a:prstDash val="solid"/>
+                      <a:round/>
+                      <a:headEnd type="none" w="med" len="med"/>
+                      <a:tailEnd type="none" w="med" len="med"/>
+                    </a:lnT>
+                    <a:lnB w="6350" cap="flat" cmpd="sng" algn="ctr">
+                      <a:solidFill>
+                        <a:srgbClr val="D1D5DB"/>
+                      </a:solidFill>
+                      <a:prstDash val="solid"/>
+                      <a:round/>
+                      <a:headEnd type="none" w="med" len="med"/>
+                      <a:tailEnd type="none" w="med" len="med"/>
+                    </a:lnB>
+                  </a:tcPr>
+                </a:tc>
+                <a:tc>
+                  <a:txBody>
+                    <a:bodyPr/>
+                    <a:lstStyle/>
+                    <a:p>
+                      <a:pPr algn="l" indent="0" marL="0">
+                        <a:buNone/>
+                      </a:pPr>
+                      <a:r>
+                        <a:rPr lang="en-US" sz="1400" dirty="0">
+                          <a:solidFill>
+                            <a:srgbClr val="000000"/>
+                          </a:solidFill>
+                          <a:latin typeface="Calibri" pitchFamily="34" charset="0"/>
+                          <a:ea typeface="Calibri" pitchFamily="34" charset="-122"/>
+                          <a:cs typeface="Calibri" pitchFamily="34" charset="-120"/>
+                        </a:rPr>
+                        <a:t>Private equity</a:t>
+                      </a:r>
+                      <a:endParaRPr lang="en-US" sz="1400" dirty="0">
+                        <a:latin typeface="Calibri" charset="0"/>
+                        <a:ea typeface="Calibri" charset="0"/>
+                        <a:cs typeface="Calibri" charset="0"/>
+                      </a:endParaRPr>
+                    </a:p>
+                  </a:txBody>
+                  <a:tcPr marL="91440" marR="91440" marT="45720" marB="45720">
+                    <a:lnL w="6350" cap="flat" cmpd="sng" algn="ctr">
+                      <a:solidFill>
+                        <a:srgbClr val="D1D5DB"/>
+                      </a:solidFill>
+                      <a:prstDash val="solid"/>
+                      <a:round/>
+                      <a:headEnd type="none" w="med" len="med"/>
+                      <a:tailEnd type="none" w="med" len="med"/>
+                    </a:lnL>
+                    <a:lnR w="6350" cap="flat" cmpd="sng" algn="ctr">
+                      <a:solidFill>
+                        <a:srgbClr val="D1D5DB"/>
+                      </a:solidFill>
+                      <a:prstDash val="solid"/>
+                      <a:round/>
+                      <a:headEnd type="none" w="med" len="med"/>
+                      <a:tailEnd type="none" w="med" len="med"/>
+                    </a:lnR>
+                    <a:lnT w="6350" cap="flat" cmpd="sng" algn="ctr">
+                      <a:solidFill>
+                        <a:srgbClr val="D1D5DB"/>
+                      </a:solidFill>
+                      <a:prstDash val="solid"/>
+                      <a:round/>
+                      <a:headEnd type="none" w="med" len="med"/>
+                      <a:tailEnd type="none" w="med" len="med"/>
+                    </a:lnT>
+                    <a:lnB w="6350" cap="flat" cmpd="sng" algn="ctr">
+                      <a:solidFill>
+                        <a:srgbClr val="D1D5DB"/>
+                      </a:solidFill>
+                      <a:prstDash val="solid"/>
+                      <a:round/>
+                      <a:headEnd type="none" w="med" len="med"/>
+                      <a:tailEnd type="none" w="med" len="med"/>
+                    </a:lnB>
+                  </a:tcPr>
+                </a:tc>
+                <a:tc>
+                  <a:txBody>
+                    <a:bodyPr/>
+                    <a:lstStyle/>
+                    <a:p>
+                      <a:pPr algn="l" indent="0" marL="0">
+                        <a:buNone/>
+                      </a:pPr>
+                      <a:r>
+                        <a:rPr lang="en-US" sz="1400" dirty="0">
+                          <a:solidFill>
+                            <a:srgbClr val="000000"/>
+                          </a:solidFill>
+                          <a:latin typeface="Calibri" pitchFamily="34" charset="0"/>
+                          <a:ea typeface="Calibri" pitchFamily="34" charset="-122"/>
+                          <a:cs typeface="Calibri" pitchFamily="34" charset="-120"/>
+                        </a:rPr>
+                        <a:t>74.1 — Attractive</a:t>
+                      </a:r>
+                      <a:endParaRPr lang="en-US" sz="1400" dirty="0">
+                        <a:latin typeface="Calibri" charset="0"/>
+                        <a:ea typeface="Calibri" charset="0"/>
+                        <a:cs typeface="Calibri" charset="0"/>
+                      </a:endParaRPr>
+                    </a:p>
+                  </a:txBody>
+                  <a:tcPr marL="91440" marR="91440" marT="45720" marB="45720">
+                    <a:lnL w="6350" cap="flat" cmpd="sng" algn="ctr">
+                      <a:solidFill>
+                        <a:srgbClr val="D1D5DB"/>
+                      </a:solidFill>
+                      <a:prstDash val="solid"/>
+                      <a:round/>
+                      <a:headEnd type="none" w="med" len="med"/>
+                      <a:tailEnd type="none" w="med" len="med"/>
+                    </a:lnL>
+                    <a:lnR w="6350" cap="flat" cmpd="sng" algn="ctr">
+                      <a:solidFill>
+                        <a:srgbClr val="D1D5DB"/>
+                      </a:solidFill>
+                      <a:prstDash val="solid"/>
+                      <a:round/>
+                      <a:headEnd type="none" w="med" len="med"/>
+                      <a:tailEnd type="none" w="med" len="med"/>
+                    </a:lnR>
+                    <a:lnT w="6350" cap="flat" cmpd="sng" algn="ctr">
+                      <a:solidFill>
+                        <a:srgbClr val="D1D5DB"/>
+                      </a:solidFill>
+                      <a:prstDash val="solid"/>
+                      <a:round/>
+                      <a:headEnd type="none" w="med" len="med"/>
+                      <a:tailEnd type="none" w="med" len="med"/>
+                    </a:lnT>
+                    <a:lnB w="6350" cap="flat" cmpd="sng" algn="ctr">
+                      <a:solidFill>
+                        <a:srgbClr val="D1D5DB"/>
+                      </a:solidFill>
+                      <a:prstDash val="solid"/>
+                      <a:round/>
+                      <a:headEnd type="none" w="med" len="med"/>
+                      <a:tailEnd type="none" w="med" len="med"/>
+                    </a:lnB>
+                  </a:tcPr>
+                </a:tc>
+              </a:tr>
+              <a:tr h="0">
+                <a:tc>
+                  <a:txBody>
+                    <a:bodyPr/>
+                    <a:lstStyle/>
+                    <a:p>
+                      <a:pPr algn="l" indent="0" marL="0">
+                        <a:buNone/>
+                      </a:pPr>
+                      <a:r>
+                        <a:rPr lang="en-US" sz="1400" dirty="0">
+                          <a:solidFill>
+                            <a:srgbClr val="000000"/>
+                          </a:solidFill>
+                          <a:latin typeface="Calibri" pitchFamily="34" charset="0"/>
+                          <a:ea typeface="Calibri" pitchFamily="34" charset="-122"/>
+                          <a:cs typeface="Calibri" pitchFamily="34" charset="-120"/>
+                        </a:rPr>
+                        <a:t>PSTS</a:t>
+                      </a:r>
+                      <a:endParaRPr lang="en-US" sz="1400" dirty="0">
+                        <a:latin typeface="Calibri" charset="0"/>
+                        <a:ea typeface="Calibri" charset="0"/>
+                        <a:cs typeface="Calibri" charset="0"/>
+                      </a:endParaRPr>
+                    </a:p>
+                  </a:txBody>
+                  <a:tcPr marL="91440" marR="91440" marT="45720" marB="45720">
+                    <a:lnL w="6350" cap="flat" cmpd="sng" algn="ctr">
+                      <a:solidFill>
+                        <a:srgbClr val="D1D5DB"/>
+                      </a:solidFill>
+                      <a:prstDash val="solid"/>
+                      <a:round/>
+                      <a:headEnd type="none" w="med" len="med"/>
+                      <a:tailEnd type="none" w="med" len="med"/>
+                    </a:lnL>
+                    <a:lnR w="6350" cap="flat" cmpd="sng" algn="ctr">
+                      <a:solidFill>
+                        <a:srgbClr val="D1D5DB"/>
+                      </a:solidFill>
+                      <a:prstDash val="solid"/>
+                      <a:round/>
+                      <a:headEnd type="none" w="med" len="med"/>
+                      <a:tailEnd type="none" w="med" len="med"/>
+                    </a:lnR>
+                    <a:lnT w="6350" cap="flat" cmpd="sng" algn="ctr">
+                      <a:solidFill>
+                        <a:srgbClr val="D1D5DB"/>
+                      </a:solidFill>
+                      <a:prstDash val="solid"/>
+                      <a:round/>
+                      <a:headEnd type="none" w="med" len="med"/>
+                      <a:tailEnd type="none" w="med" len="med"/>
+                    </a:lnT>
+                    <a:lnB w="6350" cap="flat" cmpd="sng" algn="ctr">
+                      <a:solidFill>
+                        <a:srgbClr val="D1D5DB"/>
+                      </a:solidFill>
+                      <a:prstDash val="solid"/>
+                      <a:round/>
+                      <a:headEnd type="none" w="med" len="med"/>
+                      <a:tailEnd type="none" w="med" len="med"/>
+                    </a:lnB>
+                  </a:tcPr>
+                </a:tc>
+                <a:tc>
+                  <a:txBody>
+                    <a:bodyPr/>
+                    <a:lstStyle/>
+                    <a:p>
+                      <a:pPr algn="l" indent="0" marL="0">
+                        <a:buNone/>
+                      </a:pPr>
+                      <a:r>
+                        <a:rPr lang="en-US" sz="1400" dirty="0">
+                          <a:solidFill>
+                            <a:srgbClr val="000000"/>
+                          </a:solidFill>
+                          <a:latin typeface="Calibri" pitchFamily="34" charset="0"/>
+                          <a:ea typeface="Calibri" pitchFamily="34" charset="-122"/>
+                          <a:cs typeface="Calibri" pitchFamily="34" charset="-120"/>
+                        </a:rPr>
+                        <a:t>Venture capital</a:t>
+                      </a:r>
+                      <a:endParaRPr lang="en-US" sz="1400" dirty="0">
+                        <a:latin typeface="Calibri" charset="0"/>
+                        <a:ea typeface="Calibri" charset="0"/>
+                        <a:cs typeface="Calibri" charset="0"/>
+                      </a:endParaRPr>
+                    </a:p>
+                  </a:txBody>
+                  <a:tcPr marL="91440" marR="91440" marT="45720" marB="45720">
+                    <a:lnL w="6350" cap="flat" cmpd="sng" algn="ctr">
+                      <a:solidFill>
+                        <a:srgbClr val="D1D5DB"/>
+                      </a:solidFill>
+                      <a:prstDash val="solid"/>
+                      <a:round/>
+                      <a:headEnd type="none" w="med" len="med"/>
+                      <a:tailEnd type="none" w="med" len="med"/>
+                    </a:lnL>
+                    <a:lnR w="6350" cap="flat" cmpd="sng" algn="ctr">
+                      <a:solidFill>
+                        <a:srgbClr val="D1D5DB"/>
+                      </a:solidFill>
+                      <a:prstDash val="solid"/>
+                      <a:round/>
+                      <a:headEnd type="none" w="med" len="med"/>
+                      <a:tailEnd type="none" w="med" len="med"/>
+                    </a:lnR>
+                    <a:lnT w="6350" cap="flat" cmpd="sng" algn="ctr">
+                      <a:solidFill>
+                        <a:srgbClr val="D1D5DB"/>
+                      </a:solidFill>
+                      <a:prstDash val="solid"/>
+                      <a:round/>
+                      <a:headEnd type="none" w="med" len="med"/>
+                      <a:tailEnd type="none" w="med" len="med"/>
+                    </a:lnT>
+                    <a:lnB w="6350" cap="flat" cmpd="sng" algn="ctr">
+                      <a:solidFill>
+                        <a:srgbClr val="D1D5DB"/>
+                      </a:solidFill>
+                      <a:prstDash val="solid"/>
+                      <a:round/>
+                      <a:headEnd type="none" w="med" len="med"/>
+                      <a:tailEnd type="none" w="med" len="med"/>
+                    </a:lnB>
+                  </a:tcPr>
+                </a:tc>
+                <a:tc>
+                  <a:txBody>
+                    <a:bodyPr/>
+                    <a:lstStyle/>
+                    <a:p>
+                      <a:pPr algn="l" indent="0" marL="0">
+                        <a:buNone/>
+                      </a:pPr>
+                      <a:r>
+                        <a:rPr lang="en-US" sz="1400" dirty="0">
+                          <a:solidFill>
+                            <a:srgbClr val="000000"/>
+                          </a:solidFill>
+                          <a:latin typeface="Calibri" pitchFamily="34" charset="0"/>
+                          <a:ea typeface="Calibri" pitchFamily="34" charset="-122"/>
+                          <a:cs typeface="Calibri" pitchFamily="34" charset="-120"/>
+                        </a:rPr>
+                        <a:t>75.3 — Strong</a:t>
+                      </a:r>
+                      <a:endParaRPr lang="en-US" sz="1400" dirty="0">
+                        <a:latin typeface="Calibri" charset="0"/>
+                        <a:ea typeface="Calibri" charset="0"/>
+                        <a:cs typeface="Calibri" charset="0"/>
+                      </a:endParaRPr>
+                    </a:p>
+                  </a:txBody>
+                  <a:tcPr marL="91440" marR="91440" marT="45720" marB="45720">
+                    <a:lnL w="6350" cap="flat" cmpd="sng" algn="ctr">
+                      <a:solidFill>
+                        <a:srgbClr val="D1D5DB"/>
+                      </a:solidFill>
+                      <a:prstDash val="solid"/>
+                      <a:round/>
+                      <a:headEnd type="none" w="med" len="med"/>
+                      <a:tailEnd type="none" w="med" len="med"/>
+                    </a:lnL>
+                    <a:lnR w="6350" cap="flat" cmpd="sng" algn="ctr">
+                      <a:solidFill>
+                        <a:srgbClr val="D1D5DB"/>
+                      </a:solidFill>
+                      <a:prstDash val="solid"/>
+                      <a:round/>
+                      <a:headEnd type="none" w="med" len="med"/>
+                      <a:tailEnd type="none" w="med" len="med"/>
+                    </a:lnR>
+                    <a:lnT w="6350" cap="flat" cmpd="sng" algn="ctr">
+                      <a:solidFill>
+                        <a:srgbClr val="D1D5DB"/>
+                      </a:solidFill>
+                      <a:prstDash val="solid"/>
+                      <a:round/>
+                      <a:headEnd type="none" w="med" len="med"/>
+                      <a:tailEnd type="none" w="med" len="med"/>
+                    </a:lnT>
+                    <a:lnB w="6350" cap="flat" cmpd="sng" algn="ctr">
+                      <a:solidFill>
+                        <a:srgbClr val="D1D5DB"/>
+                      </a:solidFill>
+                      <a:prstDash val="solid"/>
+                      <a:round/>
+                      <a:headEnd type="none" w="med" len="med"/>
+                      <a:tailEnd type="none" w="med" len="med"/>
+                    </a:lnB>
+                  </a:tcPr>
+                </a:tc>
+              </a:tr>
+              <a:tr h="0">
+                <a:tc>
+                  <a:txBody>
+                    <a:bodyPr/>
+                    <a:lstStyle/>
+                    <a:p>
+                      <a:pPr algn="l" indent="0" marL="0">
+                        <a:buNone/>
+                      </a:pPr>
+                      <a:r>
+                        <a:rPr lang="en-US" sz="1400" dirty="0">
+                          <a:solidFill>
+                            <a:srgbClr val="000000"/>
+                          </a:solidFill>
+                          <a:latin typeface="Calibri" pitchFamily="34" charset="0"/>
+                          <a:ea typeface="Calibri" pitchFamily="34" charset="-122"/>
+                          <a:cs typeface="Calibri" pitchFamily="34" charset="-120"/>
+                        </a:rPr>
+                        <a:t>PESS</a:t>
+                      </a:r>
+                      <a:endParaRPr lang="en-US" sz="1400" dirty="0">
+                        <a:latin typeface="Calibri" charset="0"/>
+                        <a:ea typeface="Calibri" charset="0"/>
+                        <a:cs typeface="Calibri" charset="0"/>
+                      </a:endParaRPr>
+                    </a:p>
+                  </a:txBody>
+                  <a:tcPr marL="91440" marR="91440" marT="45720" marB="45720">
+                    <a:lnL w="6350" cap="flat" cmpd="sng" algn="ctr">
+                      <a:solidFill>
+                        <a:srgbClr val="D1D5DB"/>
+                      </a:solidFill>
+                      <a:prstDash val="solid"/>
+                      <a:round/>
+                      <a:headEnd type="none" w="med" len="med"/>
+                      <a:tailEnd type="none" w="med" len="med"/>
+                    </a:lnL>
+                    <a:lnR w="6350" cap="flat" cmpd="sng" algn="ctr">
+                      <a:solidFill>
+                        <a:srgbClr val="D1D5DB"/>
+                      </a:solidFill>
+                      <a:prstDash val="solid"/>
+                      <a:round/>
+                      <a:headEnd type="none" w="med" len="med"/>
+                      <a:tailEnd type="none" w="med" len="med"/>
+                    </a:lnR>
+                    <a:lnT w="6350" cap="flat" cmpd="sng" algn="ctr">
+                      <a:solidFill>
+                        <a:srgbClr val="D1D5DB"/>
+                      </a:solidFill>
+                      <a:prstDash val="solid"/>
+                      <a:round/>
+                      <a:headEnd type="none" w="med" len="med"/>
+                      <a:tailEnd type="none" w="med" len="med"/>
+                    </a:lnT>
+                    <a:lnB w="6350" cap="flat" cmpd="sng" algn="ctr">
+                      <a:solidFill>
+                        <a:srgbClr val="D1D5DB"/>
+                      </a:solidFill>
+                      <a:prstDash val="solid"/>
+                      <a:round/>
+                      <a:headEnd type="none" w="med" len="med"/>
+                      <a:tailEnd type="none" w="med" len="med"/>
+                    </a:lnB>
+                  </a:tcPr>
+                </a:tc>
+                <a:tc>
+                  <a:txBody>
+                    <a:bodyPr/>
+                    <a:lstStyle/>
+                    <a:p>
+                      <a:pPr algn="l" indent="0" marL="0">
+                        <a:buNone/>
+                      </a:pPr>
+                      <a:r>
+                        <a:rPr lang="en-US" sz="1400" dirty="0">
+                          <a:solidFill>
+                            <a:srgbClr val="000000"/>
+                          </a:solidFill>
+                          <a:latin typeface="Calibri" pitchFamily="34" charset="0"/>
+                          <a:ea typeface="Calibri" pitchFamily="34" charset="-122"/>
+                          <a:cs typeface="Calibri" pitchFamily="34" charset="-120"/>
+                        </a:rPr>
+                        <a:t>Public equities</a:t>
+                      </a:r>
+                      <a:endParaRPr lang="en-US" sz="1400" dirty="0">
+                        <a:latin typeface="Calibri" charset="0"/>
+                        <a:ea typeface="Calibri" charset="0"/>
+                        <a:cs typeface="Calibri" charset="0"/>
+                      </a:endParaRPr>
+                    </a:p>
+                  </a:txBody>
+                  <a:tcPr marL="91440" marR="91440" marT="45720" marB="45720">
+                    <a:lnL w="6350" cap="flat" cmpd="sng" algn="ctr">
+                      <a:solidFill>
+                        <a:srgbClr val="D1D5DB"/>
+                      </a:solidFill>
+                      <a:prstDash val="solid"/>
+                      <a:round/>
+                      <a:headEnd type="none" w="med" len="med"/>
+                      <a:tailEnd type="none" w="med" len="med"/>
+                    </a:lnL>
+                    <a:lnR w="6350" cap="flat" cmpd="sng" algn="ctr">
+                      <a:solidFill>
+                        <a:srgbClr val="D1D5DB"/>
+                      </a:solidFill>
+                      <a:prstDash val="solid"/>
+                      <a:round/>
+                      <a:headEnd type="none" w="med" len="med"/>
+                      <a:tailEnd type="none" w="med" len="med"/>
+                    </a:lnR>
+                    <a:lnT w="6350" cap="flat" cmpd="sng" algn="ctr">
+                      <a:solidFill>
+                        <a:srgbClr val="D1D5DB"/>
+                      </a:solidFill>
+                      <a:prstDash val="solid"/>
+                      <a:round/>
+                      <a:headEnd type="none" w="med" len="med"/>
+                      <a:tailEnd type="none" w="med" len="med"/>
+                    </a:lnT>
+                    <a:lnB w="6350" cap="flat" cmpd="sng" algn="ctr">
+                      <a:solidFill>
+                        <a:srgbClr val="D1D5DB"/>
+                      </a:solidFill>
+                      <a:prstDash val="solid"/>
+                      <a:round/>
+                      <a:headEnd type="none" w="med" len="med"/>
+                      <a:tailEnd type="none" w="med" len="med"/>
+                    </a:lnB>
+                  </a:tcPr>
+                </a:tc>
+                <a:tc>
+                  <a:txBody>
+                    <a:bodyPr/>
+                    <a:lstStyle/>
+                    <a:p>
+                      <a:pPr algn="l" indent="0" marL="0">
+                        <a:buNone/>
+                      </a:pPr>
+                      <a:r>
+                        <a:rPr lang="en-US" sz="1400" dirty="0">
+                          <a:solidFill>
+                            <a:srgbClr val="000000"/>
+                          </a:solidFill>
+                          <a:latin typeface="Calibri" pitchFamily="34" charset="0"/>
+                          <a:ea typeface="Calibri" pitchFamily="34" charset="-122"/>
+                          <a:cs typeface="Calibri" pitchFamily="34" charset="-120"/>
+                        </a:rPr>
+                        <a:t>72.3 — Attractive</a:t>
+                      </a:r>
+                      <a:endParaRPr lang="en-US" sz="1400" dirty="0">
+                        <a:latin typeface="Calibri" charset="0"/>
+                        <a:ea typeface="Calibri" charset="0"/>
+                        <a:cs typeface="Calibri" charset="0"/>
+                      </a:endParaRPr>
+                    </a:p>
+                  </a:txBody>
+                  <a:tcPr marL="91440" marR="91440" marT="45720" marB="45720">
+                    <a:lnL w="6350" cap="flat" cmpd="sng" algn="ctr">
+                      <a:solidFill>
+                        <a:srgbClr val="D1D5DB"/>
+                      </a:solidFill>
+                      <a:prstDash val="solid"/>
+                      <a:round/>
+                      <a:headEnd type="none" w="med" len="med"/>
+                      <a:tailEnd type="none" w="med" len="med"/>
+                    </a:lnL>
+                    <a:lnR w="6350" cap="flat" cmpd="sng" algn="ctr">
+                      <a:solidFill>
+                        <a:srgbClr val="D1D5DB"/>
+                      </a:solidFill>
+                      <a:prstDash val="solid"/>
+                      <a:round/>
+                      <a:headEnd type="none" w="med" len="med"/>
+                      <a:tailEnd type="none" w="med" len="med"/>
+                    </a:lnR>
+                    <a:lnT w="6350" cap="flat" cmpd="sng" algn="ctr">
+                      <a:solidFill>
+                        <a:srgbClr val="D1D5DB"/>
+                      </a:solidFill>
+                      <a:prstDash val="solid"/>
+                      <a:round/>
+                      <a:headEnd type="none" w="med" len="med"/>
+                      <a:tailEnd type="none" w="med" len="med"/>
+                    </a:lnT>
+                    <a:lnB w="6350" cap="flat" cmpd="sng" algn="ctr">
+                      <a:solidFill>
+                        <a:srgbClr val="D1D5DB"/>
+                      </a:solidFill>
+                      <a:prstDash val="solid"/>
+                      <a:round/>
+                      <a:headEnd type="none" w="med" len="med"/>
+                      <a:tailEnd type="none" w="med" len="med"/>
+                    </a:lnB>
+                  </a:tcPr>
+                </a:tc>
+              </a:tr>
+              <a:tr h="0">
+                <a:tc>
+                  <a:txBody>
+                    <a:bodyPr/>
+                    <a:lstStyle/>
+                    <a:p>
+                      <a:pPr algn="l" indent="0" marL="0">
+                        <a:buNone/>
+                      </a:pPr>
+                      <a:r>
+                        <a:rPr lang="en-US" sz="1400" dirty="0">
+                          <a:solidFill>
+                            <a:srgbClr val="000000"/>
+                          </a:solidFill>
+                          <a:latin typeface="Calibri" pitchFamily="34" charset="0"/>
+                          <a:ea typeface="Calibri" pitchFamily="34" charset="-122"/>
+                          <a:cs typeface="Calibri" pitchFamily="34" charset="-120"/>
+                        </a:rPr>
+                        <a:t>PCRS</a:t>
+                      </a:r>
+                      <a:endParaRPr lang="en-US" sz="1400" dirty="0">
+                        <a:latin typeface="Calibri" charset="0"/>
+                        <a:ea typeface="Calibri" charset="0"/>
+                        <a:cs typeface="Calibri" charset="0"/>
+                      </a:endParaRPr>
+                    </a:p>
+                  </a:txBody>
+                  <a:tcPr marL="91440" marR="91440" marT="45720" marB="45720">
+                    <a:lnL w="6350" cap="flat" cmpd="sng" algn="ctr">
+                      <a:solidFill>
+                        <a:srgbClr val="D1D5DB"/>
+                      </a:solidFill>
+                      <a:prstDash val="solid"/>
+                      <a:round/>
+                      <a:headEnd type="none" w="med" len="med"/>
+                      <a:tailEnd type="none" w="med" len="med"/>
+                    </a:lnL>
+                    <a:lnR w="6350" cap="flat" cmpd="sng" algn="ctr">
+                      <a:solidFill>
+                        <a:srgbClr val="D1D5DB"/>
+                      </a:solidFill>
+                      <a:prstDash val="solid"/>
+                      <a:round/>
+                      <a:headEnd type="none" w="med" len="med"/>
+                      <a:tailEnd type="none" w="med" len="med"/>
+                    </a:lnR>
+                    <a:lnT w="6350" cap="flat" cmpd="sng" algn="ctr">
+                      <a:solidFill>
+                        <a:srgbClr val="D1D5DB"/>
+                      </a:solidFill>
+                      <a:prstDash val="solid"/>
+                      <a:round/>
+                      <a:headEnd type="none" w="med" len="med"/>
+                      <a:tailEnd type="none" w="med" len="med"/>
+                    </a:lnT>
+                    <a:lnB w="6350" cap="flat" cmpd="sng" algn="ctr">
+                      <a:solidFill>
+                        <a:srgbClr val="D1D5DB"/>
+                      </a:solidFill>
+                      <a:prstDash val="solid"/>
+                      <a:round/>
+                      <a:headEnd type="none" w="med" len="med"/>
+                      <a:tailEnd type="none" w="med" len="med"/>
+                    </a:lnB>
+                  </a:tcPr>
+                </a:tc>
+                <a:tc>
+                  <a:txBody>
+                    <a:bodyPr/>
+                    <a:lstStyle/>
+                    <a:p>
+                      <a:pPr algn="l" indent="0" marL="0">
+                        <a:buNone/>
+                      </a:pPr>
+                      <a:r>
+                        <a:rPr lang="en-US" sz="1400" dirty="0">
+                          <a:solidFill>
+                            <a:srgbClr val="000000"/>
+                          </a:solidFill>
+                          <a:latin typeface="Calibri" pitchFamily="34" charset="0"/>
+                          <a:ea typeface="Calibri" pitchFamily="34" charset="-122"/>
+                          <a:cs typeface="Calibri" pitchFamily="34" charset="-120"/>
+                        </a:rPr>
+                        <a:t>Corporate credit</a:t>
+                      </a:r>
+                      <a:endParaRPr lang="en-US" sz="1400" dirty="0">
+                        <a:latin typeface="Calibri" charset="0"/>
+                        <a:ea typeface="Calibri" charset="0"/>
+                        <a:cs typeface="Calibri" charset="0"/>
+                      </a:endParaRPr>
+                    </a:p>
+                  </a:txBody>
+                  <a:tcPr marL="91440" marR="91440" marT="45720" marB="45720">
+                    <a:lnL w="6350" cap="flat" cmpd="sng" algn="ctr">
+                      <a:solidFill>
+                        <a:srgbClr val="D1D5DB"/>
+                      </a:solidFill>
+                      <a:prstDash val="solid"/>
+                      <a:round/>
+                      <a:headEnd type="none" w="med" len="med"/>
+                      <a:tailEnd type="none" w="med" len="med"/>
+                    </a:lnL>
+                    <a:lnR w="6350" cap="flat" cmpd="sng" algn="ctr">
+                      <a:solidFill>
+                        <a:srgbClr val="D1D5DB"/>
+                      </a:solidFill>
+                      <a:prstDash val="solid"/>
+                      <a:round/>
+                      <a:headEnd type="none" w="med" len="med"/>
+                      <a:tailEnd type="none" w="med" len="med"/>
+                    </a:lnR>
+                    <a:lnT w="6350" cap="flat" cmpd="sng" algn="ctr">
+                      <a:solidFill>
+                        <a:srgbClr val="D1D5DB"/>
+                      </a:solidFill>
+                      <a:prstDash val="solid"/>
+                      <a:round/>
+                      <a:headEnd type="none" w="med" len="med"/>
+                      <a:tailEnd type="none" w="med" len="med"/>
+                    </a:lnT>
+                    <a:lnB w="6350" cap="flat" cmpd="sng" algn="ctr">
+                      <a:solidFill>
+                        <a:srgbClr val="D1D5DB"/>
+                      </a:solidFill>
+                      <a:prstDash val="solid"/>
+                      <a:round/>
+                      <a:headEnd type="none" w="med" len="med"/>
+                      <a:tailEnd type="none" w="med" len="med"/>
+                    </a:lnB>
+                  </a:tcPr>
+                </a:tc>
+                <a:tc>
+                  <a:txBody>
+                    <a:bodyPr/>
+                    <a:lstStyle/>
+                    <a:p>
+                      <a:pPr algn="l" indent="0" marL="0">
+                        <a:buNone/>
+                      </a:pPr>
+                      <a:r>
+                        <a:rPr lang="en-US" sz="1400" dirty="0">
+                          <a:solidFill>
+                            <a:srgbClr val="000000"/>
+                          </a:solidFill>
+                          <a:latin typeface="Calibri" pitchFamily="34" charset="0"/>
+                          <a:ea typeface="Calibri" pitchFamily="34" charset="-122"/>
+                          <a:cs typeface="Calibri" pitchFamily="34" charset="-120"/>
+                        </a:rPr>
+                        <a:t>70.0 — BB/B High Yield</a:t>
+                      </a:r>
+                      <a:endParaRPr lang="en-US" sz="1400" dirty="0">
+                        <a:latin typeface="Calibri" charset="0"/>
+                        <a:ea typeface="Calibri" charset="0"/>
+                        <a:cs typeface="Calibri" charset="0"/>
+                      </a:endParaRPr>
+                    </a:p>
+                  </a:txBody>
+                  <a:tcPr marL="91440" marR="91440" marT="45720" marB="45720">
+                    <a:lnL w="6350" cap="flat" cmpd="sng" algn="ctr">
+                      <a:solidFill>
+                        <a:srgbClr val="D1D5DB"/>
+                      </a:solidFill>
+                      <a:prstDash val="solid"/>
+                      <a:round/>
+                      <a:headEnd type="none" w="med" len="med"/>
+                      <a:tailEnd type="none" w="med" len="med"/>
+                    </a:lnL>
+                    <a:lnR w="6350" cap="flat" cmpd="sng" algn="ctr">
+                      <a:solidFill>
+                        <a:srgbClr val="D1D5DB"/>
+                      </a:solidFill>
+                      <a:prstDash val="solid"/>
+                      <a:round/>
+                      <a:headEnd type="none" w="med" len="med"/>
+                      <a:tailEnd type="none" w="med" len="med"/>
+                    </a:lnR>
+                    <a:lnT w="6350" cap="flat" cmpd="sng" algn="ctr">
+                      <a:solidFill>
+                        <a:srgbClr val="D1D5DB"/>
+                      </a:solidFill>
+                      <a:prstDash val="solid"/>
+                      <a:round/>
+                      <a:headEnd type="none" w="med" len="med"/>
+                      <a:tailEnd type="none" w="med" len="med"/>
+                    </a:lnT>
+                    <a:lnB w="6350" cap="flat" cmpd="sng" algn="ctr">
+                      <a:solidFill>
+                        <a:srgbClr val="D1D5DB"/>
+                      </a:solidFill>
+                      <a:prstDash val="solid"/>
+                      <a:round/>
+                      <a:headEnd type="none" w="med" len="med"/>
+                      <a:tailEnd type="none" w="med" len="med"/>
+                    </a:lnB>
+                  </a:tcPr>
+                </a:tc>
+              </a:tr>
+              <a:tr h="0">
+                <a:tc>
+                  <a:txBody>
+                    <a:bodyPr/>
+                    <a:lstStyle/>
+                    <a:p>
+                      <a:pPr algn="l" indent="0" marL="0">
+                        <a:buNone/>
+                      </a:pPr>
+                      <a:r>
+                        <a:rPr lang="en-US" sz="1400" dirty="0">
+                          <a:solidFill>
+                            <a:srgbClr val="000000"/>
+                          </a:solidFill>
+                          <a:latin typeface="Calibri" pitchFamily="34" charset="0"/>
+                          <a:ea typeface="Calibri" pitchFamily="34" charset="-122"/>
+                          <a:cs typeface="Calibri" pitchFamily="34" charset="-120"/>
+                        </a:rPr>
+                        <a:t>PREIS</a:t>
+                      </a:r>
+                      <a:endParaRPr lang="en-US" sz="1400" dirty="0">
+                        <a:latin typeface="Calibri" charset="0"/>
+                        <a:ea typeface="Calibri" charset="0"/>
+                        <a:cs typeface="Calibri" charset="0"/>
+                      </a:endParaRPr>
+                    </a:p>
+                  </a:txBody>
+                  <a:tcPr marL="91440" marR="91440" marT="45720" marB="45720">
+                    <a:lnL w="6350" cap="flat" cmpd="sng" algn="ctr">
+                      <a:solidFill>
+                        <a:srgbClr val="D1D5DB"/>
+                      </a:solidFill>
+                      <a:prstDash val="solid"/>
+                      <a:round/>
+                      <a:headEnd type="none" w="med" len="med"/>
+                      <a:tailEnd type="none" w="med" len="med"/>
+                    </a:lnL>
+                    <a:lnR w="6350" cap="flat" cmpd="sng" algn="ctr">
+                      <a:solidFill>
+                        <a:srgbClr val="D1D5DB"/>
+                      </a:solidFill>
+                      <a:prstDash val="solid"/>
+                      <a:round/>
+                      <a:headEnd type="none" w="med" len="med"/>
+                      <a:tailEnd type="none" w="med" len="med"/>
+                    </a:lnR>
+                    <a:lnT w="6350" cap="flat" cmpd="sng" algn="ctr">
+                      <a:solidFill>
+                        <a:srgbClr val="D1D5DB"/>
+                      </a:solidFill>
+                      <a:prstDash val="solid"/>
+                      <a:round/>
+                      <a:headEnd type="none" w="med" len="med"/>
+                      <a:tailEnd type="none" w="med" len="med"/>
+                    </a:lnT>
+                    <a:lnB w="6350" cap="flat" cmpd="sng" algn="ctr">
+                      <a:solidFill>
+                        <a:srgbClr val="D1D5DB"/>
+                      </a:solidFill>
+                      <a:prstDash val="solid"/>
+                      <a:round/>
+                      <a:headEnd type="none" w="med" len="med"/>
+                      <a:tailEnd type="none" w="med" len="med"/>
+                    </a:lnB>
+                  </a:tcPr>
+                </a:tc>
+                <a:tc>
+                  <a:txBody>
+                    <a:bodyPr/>
+                    <a:lstStyle/>
+                    <a:p>
+                      <a:pPr algn="l" indent="0" marL="0">
+                        <a:buNone/>
+                      </a:pPr>
+                      <a:r>
+                        <a:rPr lang="en-US" sz="1400" dirty="0">
+                          <a:solidFill>
+                            <a:srgbClr val="000000"/>
+                          </a:solidFill>
+                          <a:latin typeface="Calibri" pitchFamily="34" charset="0"/>
+                          <a:ea typeface="Calibri" pitchFamily="34" charset="-122"/>
+                          <a:cs typeface="Calibri" pitchFamily="34" charset="-120"/>
+                        </a:rPr>
+                        <a:t>Real estate</a:t>
+                      </a:r>
+                      <a:endParaRPr lang="en-US" sz="1400" dirty="0">
+                        <a:latin typeface="Calibri" charset="0"/>
+                        <a:ea typeface="Calibri" charset="0"/>
+                        <a:cs typeface="Calibri" charset="0"/>
+                      </a:endParaRPr>
+                    </a:p>
+                  </a:txBody>
+                  <a:tcPr marL="91440" marR="91440" marT="45720" marB="45720">
+                    <a:lnL w="6350" cap="flat" cmpd="sng" algn="ctr">
+                      <a:solidFill>
+                        <a:srgbClr val="D1D5DB"/>
+                      </a:solidFill>
+                      <a:prstDash val="solid"/>
+                      <a:round/>
+                      <a:headEnd type="none" w="med" len="med"/>
+                      <a:tailEnd type="none" w="med" len="med"/>
+                    </a:lnL>
+                    <a:lnR w="6350" cap="flat" cmpd="sng" algn="ctr">
+                      <a:solidFill>
+                        <a:srgbClr val="D1D5DB"/>
+                      </a:solidFill>
+                      <a:prstDash val="solid"/>
+                      <a:round/>
+                      <a:headEnd type="none" w="med" len="med"/>
+                      <a:tailEnd type="none" w="med" len="med"/>
+                    </a:lnR>
+                    <a:lnT w="6350" cap="flat" cmpd="sng" algn="ctr">
+                      <a:solidFill>
+                        <a:srgbClr val="D1D5DB"/>
+                      </a:solidFill>
+                      <a:prstDash val="solid"/>
+                      <a:round/>
+                      <a:headEnd type="none" w="med" len="med"/>
+                      <a:tailEnd type="none" w="med" len="med"/>
+                    </a:lnT>
+                    <a:lnB w="6350" cap="flat" cmpd="sng" algn="ctr">
+                      <a:solidFill>
+                        <a:srgbClr val="D1D5DB"/>
+                      </a:solidFill>
+                      <a:prstDash val="solid"/>
+                      <a:round/>
+                      <a:headEnd type="none" w="med" len="med"/>
+                      <a:tailEnd type="none" w="med" len="med"/>
+                    </a:lnB>
+                  </a:tcPr>
+                </a:tc>
+                <a:tc>
+                  <a:txBody>
+                    <a:bodyPr/>
+                    <a:lstStyle/>
+                    <a:p>
+                      <a:pPr algn="l" indent="0" marL="0">
+                        <a:buNone/>
+                      </a:pPr>
+                      <a:r>
+                        <a:rPr lang="en-US" sz="1400" dirty="0">
+                          <a:solidFill>
+                            <a:srgbClr val="000000"/>
+                          </a:solidFill>
+                          <a:latin typeface="Calibri" pitchFamily="34" charset="0"/>
+                          <a:ea typeface="Calibri" pitchFamily="34" charset="-122"/>
+                          <a:cs typeface="Calibri" pitchFamily="34" charset="-120"/>
+                        </a:rPr>
+                        <a:t>77.4 — Core-plus</a:t>
+                      </a:r>
+                      <a:endParaRPr lang="en-US" sz="1400" dirty="0">
+                        <a:latin typeface="Calibri" charset="0"/>
+                        <a:ea typeface="Calibri" charset="0"/>
+                        <a:cs typeface="Calibri" charset="0"/>
+                      </a:endParaRPr>
+                    </a:p>
+                  </a:txBody>
+                  <a:tcPr marL="91440" marR="91440" marT="45720" marB="45720">
+                    <a:lnL w="6350" cap="flat" cmpd="sng" algn="ctr">
+                      <a:solidFill>
+                        <a:srgbClr val="D1D5DB"/>
+                      </a:solidFill>
+                      <a:prstDash val="solid"/>
+                      <a:round/>
+                      <a:headEnd type="none" w="med" len="med"/>
+                      <a:tailEnd type="none" w="med" len="med"/>
+                    </a:lnL>
+                    <a:lnR w="6350" cap="flat" cmpd="sng" algn="ctr">
+                      <a:solidFill>
+                        <a:srgbClr val="D1D5DB"/>
+                      </a:solidFill>
+                      <a:prstDash val="solid"/>
+                      <a:round/>
+                      <a:headEnd type="none" w="med" len="med"/>
+                      <a:tailEnd type="none" w="med" len="med"/>
+                    </a:lnR>
+                    <a:lnT w="6350" cap="flat" cmpd="sng" algn="ctr">
+                      <a:solidFill>
+                        <a:srgbClr val="D1D5DB"/>
+                      </a:solidFill>
+                      <a:prstDash val="solid"/>
+                      <a:round/>
+                      <a:headEnd type="none" w="med" len="med"/>
+                      <a:tailEnd type="none" w="med" len="med"/>
+                    </a:lnT>
+                    <a:lnB w="6350" cap="flat" cmpd="sng" algn="ctr">
+                      <a:solidFill>
+                        <a:srgbClr val="D1D5DB"/>
+                      </a:solidFill>
+                      <a:prstDash val="solid"/>
+                      <a:round/>
+                      <a:headEnd type="none" w="med" len="med"/>
+                      <a:tailEnd type="none" w="med" len="med"/>
+                    </a:lnB>
+                  </a:tcPr>
+                </a:tc>
+              </a:tr>
+              <a:tr h="0">
+                <a:tc>
+                  <a:txBody>
+                    <a:bodyPr/>
+                    <a:lstStyle/>
+                    <a:p>
+                      <a:pPr algn="l" indent="0" marL="0">
+                        <a:buNone/>
+                      </a:pPr>
+                      <a:r>
+                        <a:rPr lang="en-US" sz="1400" dirty="0">
+                          <a:solidFill>
+                            <a:srgbClr val="000000"/>
+                          </a:solidFill>
+                          <a:latin typeface="Calibri" pitchFamily="34" charset="0"/>
+                          <a:ea typeface="Calibri" pitchFamily="34" charset="-122"/>
+                          <a:cs typeface="Calibri" pitchFamily="34" charset="-120"/>
+                        </a:rPr>
+                        <a:t>PAVS</a:t>
+                      </a:r>
+                      <a:endParaRPr lang="en-US" sz="1400" dirty="0">
+                        <a:latin typeface="Calibri" charset="0"/>
+                        <a:ea typeface="Calibri" charset="0"/>
+                        <a:cs typeface="Calibri" charset="0"/>
+                      </a:endParaRPr>
+                    </a:p>
+                  </a:txBody>
+                  <a:tcPr marL="91440" marR="91440" marT="45720" marB="45720">
+                    <a:lnL w="6350" cap="flat" cmpd="sng" algn="ctr">
+                      <a:solidFill>
+                        <a:srgbClr val="D1D5DB"/>
+                      </a:solidFill>
+                      <a:prstDash val="solid"/>
+                      <a:round/>
+                      <a:headEnd type="none" w="med" len="med"/>
+                      <a:tailEnd type="none" w="med" len="med"/>
+                    </a:lnL>
+                    <a:lnR w="6350" cap="flat" cmpd="sng" algn="ctr">
+                      <a:solidFill>
+                        <a:srgbClr val="D1D5DB"/>
+                      </a:solidFill>
+                      <a:prstDash val="solid"/>
+                      <a:round/>
+                      <a:headEnd type="none" w="med" len="med"/>
+                      <a:tailEnd type="none" w="med" len="med"/>
+                    </a:lnR>
+                    <a:lnT w="6350" cap="flat" cmpd="sng" algn="ctr">
+                      <a:solidFill>
+                        <a:srgbClr val="D1D5DB"/>
+                      </a:solidFill>
+                      <a:prstDash val="solid"/>
+                      <a:round/>
+                      <a:headEnd type="none" w="med" len="med"/>
+                      <a:tailEnd type="none" w="med" len="med"/>
+                    </a:lnT>
+                    <a:lnB w="6350" cap="flat" cmpd="sng" algn="ctr">
+                      <a:solidFill>
+                        <a:srgbClr val="D1D5DB"/>
+                      </a:solidFill>
+                      <a:prstDash val="solid"/>
+                      <a:round/>
+                      <a:headEnd type="none" w="med" len="med"/>
+                      <a:tailEnd type="none" w="med" len="med"/>
+                    </a:lnB>
+                  </a:tcPr>
+                </a:tc>
+                <a:tc>
+                  <a:txBody>
+                    <a:bodyPr/>
+                    <a:lstStyle/>
+                    <a:p>
+                      <a:pPr algn="l" indent="0" marL="0">
+                        <a:buNone/>
+                      </a:pPr>
+                      <a:r>
+                        <a:rPr lang="en-US" sz="1400" dirty="0">
+                          <a:solidFill>
+                            <a:srgbClr val="000000"/>
+                          </a:solidFill>
+                          <a:latin typeface="Calibri" pitchFamily="34" charset="0"/>
+                          <a:ea typeface="Calibri" pitchFamily="34" charset="-122"/>
+                          <a:cs typeface="Calibri" pitchFamily="34" charset="-120"/>
+                        </a:rPr>
+                        <a:t>Drug discovery</a:t>
+                      </a:r>
+                      <a:endParaRPr lang="en-US" sz="1400" dirty="0">
+                        <a:latin typeface="Calibri" charset="0"/>
+                        <a:ea typeface="Calibri" charset="0"/>
+                        <a:cs typeface="Calibri" charset="0"/>
+                      </a:endParaRPr>
+                    </a:p>
+                  </a:txBody>
+                  <a:tcPr marL="91440" marR="91440" marT="45720" marB="45720">
+                    <a:lnL w="6350" cap="flat" cmpd="sng" algn="ctr">
+                      <a:solidFill>
+                        <a:srgbClr val="D1D5DB"/>
+                      </a:solidFill>
+                      <a:prstDash val="solid"/>
+                      <a:round/>
+                      <a:headEnd type="none" w="med" len="med"/>
+                      <a:tailEnd type="none" w="med" len="med"/>
+                    </a:lnL>
+                    <a:lnR w="6350" cap="flat" cmpd="sng" algn="ctr">
+                      <a:solidFill>
+                        <a:srgbClr val="D1D5DB"/>
+                      </a:solidFill>
+                      <a:prstDash val="solid"/>
+                      <a:round/>
+                      <a:headEnd type="none" w="med" len="med"/>
+                      <a:tailEnd type="none" w="med" len="med"/>
+                    </a:lnR>
+                    <a:lnT w="6350" cap="flat" cmpd="sng" algn="ctr">
+                      <a:solidFill>
+                        <a:srgbClr val="D1D5DB"/>
+                      </a:solidFill>
+                      <a:prstDash val="solid"/>
+                      <a:round/>
+                      <a:headEnd type="none" w="med" len="med"/>
+                      <a:tailEnd type="none" w="med" len="med"/>
+                    </a:lnT>
+                    <a:lnB w="6350" cap="flat" cmpd="sng" algn="ctr">
+                      <a:solidFill>
+                        <a:srgbClr val="D1D5DB"/>
+                      </a:solidFill>
+                      <a:prstDash val="solid"/>
+                      <a:round/>
+                      <a:headEnd type="none" w="med" len="med"/>
+                      <a:tailEnd type="none" w="med" len="med"/>
+                    </a:lnB>
+                  </a:tcPr>
+                </a:tc>
+                <a:tc>
+                  <a:txBody>
+                    <a:bodyPr/>
+                    <a:lstStyle/>
+                    <a:p>
+                      <a:pPr algn="l" indent="0" marL="0">
+                        <a:buNone/>
+                      </a:pPr>
+                      <a:r>
+                        <a:rPr lang="en-US" sz="1400" dirty="0">
+                          <a:solidFill>
+                            <a:srgbClr val="000000"/>
+                          </a:solidFill>
+                          <a:latin typeface="Calibri" pitchFamily="34" charset="0"/>
+                          <a:ea typeface="Calibri" pitchFamily="34" charset="-122"/>
+                          <a:cs typeface="Calibri" pitchFamily="34" charset="-120"/>
+                        </a:rPr>
+                        <a:t>64.2 — Monitor</a:t>
+                      </a:r>
+                      <a:endParaRPr lang="en-US" sz="1400" dirty="0">
+                        <a:latin typeface="Calibri" charset="0"/>
+                        <a:ea typeface="Calibri" charset="0"/>
+                        <a:cs typeface="Calibri" charset="0"/>
+                      </a:endParaRPr>
+                    </a:p>
+                  </a:txBody>
+                  <a:tcPr marL="91440" marR="91440" marT="45720" marB="45720">
+                    <a:lnL w="6350" cap="flat" cmpd="sng" algn="ctr">
+                      <a:solidFill>
+                        <a:srgbClr val="D1D5DB"/>
+                      </a:solidFill>
+                      <a:prstDash val="solid"/>
+                      <a:round/>
+                      <a:headEnd type="none" w="med" len="med"/>
+                      <a:tailEnd type="none" w="med" len="med"/>
+                    </a:lnL>
+                    <a:lnR w="6350" cap="flat" cmpd="sng" algn="ctr">
+                      <a:solidFill>
+                        <a:srgbClr val="D1D5DB"/>
+                      </a:solidFill>
+                      <a:prstDash val="solid"/>
+                      <a:round/>
+                      <a:headEnd type="none" w="med" len="med"/>
+                      <a:tailEnd type="none" w="med" len="med"/>
+                    </a:lnR>
+                    <a:lnT w="6350" cap="flat" cmpd="sng" algn="ctr">
+                      <a:solidFill>
+                        <a:srgbClr val="D1D5DB"/>
+                      </a:solidFill>
+                      <a:prstDash val="solid"/>
+                      <a:round/>
+                      <a:headEnd type="none" w="med" len="med"/>
+                      <a:tailEnd type="none" w="med" len="med"/>
+                    </a:lnT>
+                    <a:lnB w="6350" cap="flat" cmpd="sng" algn="ctr">
+                      <a:solidFill>
+                        <a:srgbClr val="D1D5DB"/>
+                      </a:solidFill>
+                      <a:prstDash val="solid"/>
+                      <a:round/>
+                      <a:headEnd type="none" w="med" len="med"/>
+                      <a:tailEnd type="none" w="med" len="med"/>
+                    </a:lnB>
+                  </a:tcPr>
+                </a:tc>
+              </a:tr>
+              <a:tr h="0">
+                <a:tc>
+                  <a:txBody>
+                    <a:bodyPr/>
+                    <a:lstStyle/>
+                    <a:p>
+                      <a:pPr algn="l" indent="0" marL="0">
+                        <a:buNone/>
+                      </a:pPr>
+                      <a:r>
+                        <a:rPr lang="en-US" sz="1400" dirty="0">
+                          <a:solidFill>
+                            <a:srgbClr val="000000"/>
+                          </a:solidFill>
+                          <a:latin typeface="Calibri" pitchFamily="34" charset="0"/>
+                          <a:ea typeface="Calibri" pitchFamily="34" charset="-122"/>
+                          <a:cs typeface="Calibri" pitchFamily="34" charset="-120"/>
+                        </a:rPr>
+                        <a:t>PIMRI</a:t>
+                      </a:r>
+                      <a:endParaRPr lang="en-US" sz="1400" dirty="0">
+                        <a:latin typeface="Calibri" charset="0"/>
+                        <a:ea typeface="Calibri" charset="0"/>
+                        <a:cs typeface="Calibri" charset="0"/>
+                      </a:endParaRPr>
+                    </a:p>
+                  </a:txBody>
+                  <a:tcPr marL="91440" marR="91440" marT="45720" marB="45720">
+                    <a:lnL w="6350" cap="flat" cmpd="sng" algn="ctr">
+                      <a:solidFill>
+                        <a:srgbClr val="D1D5DB"/>
+                      </a:solidFill>
+                      <a:prstDash val="solid"/>
+                      <a:round/>
+                      <a:headEnd type="none" w="med" len="med"/>
+                      <a:tailEnd type="none" w="med" len="med"/>
+                    </a:lnL>
+                    <a:lnR w="6350" cap="flat" cmpd="sng" algn="ctr">
+                      <a:solidFill>
+                        <a:srgbClr val="D1D5DB"/>
+                      </a:solidFill>
+                      <a:prstDash val="solid"/>
+                      <a:round/>
+                      <a:headEnd type="none" w="med" len="med"/>
+                      <a:tailEnd type="none" w="med" len="med"/>
+                    </a:lnR>
+                    <a:lnT w="6350" cap="flat" cmpd="sng" algn="ctr">
+                      <a:solidFill>
+                        <a:srgbClr val="D1D5DB"/>
+                      </a:solidFill>
+                      <a:prstDash val="solid"/>
+                      <a:round/>
+                      <a:headEnd type="none" w="med" len="med"/>
+                      <a:tailEnd type="none" w="med" len="med"/>
+                    </a:lnT>
+                    <a:lnB w="6350" cap="flat" cmpd="sng" algn="ctr">
+                      <a:solidFill>
+                        <a:srgbClr val="D1D5DB"/>
+                      </a:solidFill>
+                      <a:prstDash val="solid"/>
+                      <a:round/>
+                      <a:headEnd type="none" w="med" len="med"/>
+                      <a:tailEnd type="none" w="med" len="med"/>
+                    </a:lnB>
+                  </a:tcPr>
+                </a:tc>
+                <a:tc>
+                  <a:txBody>
+                    <a:bodyPr/>
+                    <a:lstStyle/>
+                    <a:p>
+                      <a:pPr algn="l" indent="0" marL="0">
+                        <a:buNone/>
+                      </a:pPr>
+                      <a:r>
+                        <a:rPr lang="en-US" sz="1400" dirty="0">
+                          <a:solidFill>
+                            <a:srgbClr val="000000"/>
+                          </a:solidFill>
+                          <a:latin typeface="Calibri" pitchFamily="34" charset="0"/>
+                          <a:ea typeface="Calibri" pitchFamily="34" charset="-122"/>
+                          <a:cs typeface="Calibri" pitchFamily="34" charset="-120"/>
+                        </a:rPr>
+                        <a:t>India macro</a:t>
+                      </a:r>
+                      <a:endParaRPr lang="en-US" sz="1400" dirty="0">
+                        <a:latin typeface="Calibri" charset="0"/>
+                        <a:ea typeface="Calibri" charset="0"/>
+                        <a:cs typeface="Calibri" charset="0"/>
+                      </a:endParaRPr>
+                    </a:p>
+                  </a:txBody>
+                  <a:tcPr marL="91440" marR="91440" marT="45720" marB="45720">
+                    <a:lnL w="6350" cap="flat" cmpd="sng" algn="ctr">
+                      <a:solidFill>
+                        <a:srgbClr val="D1D5DB"/>
+                      </a:solidFill>
+                      <a:prstDash val="solid"/>
+                      <a:round/>
+                      <a:headEnd type="none" w="med" len="med"/>
+                      <a:tailEnd type="none" w="med" len="med"/>
+                    </a:lnL>
+                    <a:lnR w="6350" cap="flat" cmpd="sng" algn="ctr">
+                      <a:solidFill>
+                        <a:srgbClr val="D1D5DB"/>
+                      </a:solidFill>
+                      <a:prstDash val="solid"/>
+                      <a:round/>
+                      <a:headEnd type="none" w="med" len="med"/>
+                      <a:tailEnd type="none" w="med" len="med"/>
+                    </a:lnR>
+                    <a:lnT w="6350" cap="flat" cmpd="sng" algn="ctr">
+                      <a:solidFill>
+                        <a:srgbClr val="D1D5DB"/>
+                      </a:solidFill>
+                      <a:prstDash val="solid"/>
+                      <a:round/>
+                      <a:headEnd type="none" w="med" len="med"/>
+                      <a:tailEnd type="none" w="med" len="med"/>
+                    </a:lnT>
+                    <a:lnB w="6350" cap="flat" cmpd="sng" algn="ctr">
+                      <a:solidFill>
+                        <a:srgbClr val="D1D5DB"/>
+                      </a:solidFill>
+                      <a:prstDash val="solid"/>
+                      <a:round/>
+                      <a:headEnd type="none" w="med" len="med"/>
+                      <a:tailEnd type="none" w="med" len="med"/>
+                    </a:lnB>
+                  </a:tcPr>
+                </a:tc>
+                <a:tc>
+                  <a:txBody>
+                    <a:bodyPr/>
+                    <a:lstStyle/>
+                    <a:p>
+                      <a:pPr algn="l" indent="0" marL="0">
+                        <a:buNone/>
+                      </a:pPr>
+                      <a:r>
+                        <a:rPr lang="en-US" sz="1400" dirty="0">
+                          <a:solidFill>
+                            <a:srgbClr val="000000"/>
+                          </a:solidFill>
+                          <a:latin typeface="Calibri" pitchFamily="34" charset="0"/>
+                          <a:ea typeface="Calibri" pitchFamily="34" charset="-122"/>
+                          <a:cs typeface="Calibri" pitchFamily="34" charset="-120"/>
+                        </a:rPr>
+                        <a:t>84.4 — Expansion</a:t>
+                      </a:r>
+                      <a:endParaRPr lang="en-US" sz="1400" dirty="0">
+                        <a:latin typeface="Calibri" charset="0"/>
+                        <a:ea typeface="Calibri" charset="0"/>
+                        <a:cs typeface="Calibri" charset="0"/>
+                      </a:endParaRPr>
+                    </a:p>
+                  </a:txBody>
+                  <a:tcPr marL="91440" marR="91440" marT="45720" marB="45720">
+                    <a:lnL w="6350" cap="flat" cmpd="sng" algn="ctr">
+                      <a:solidFill>
+                        <a:srgbClr val="D1D5DB"/>
+                      </a:solidFill>
+                      <a:prstDash val="solid"/>
+                      <a:round/>
+                      <a:headEnd type="none" w="med" len="med"/>
+                      <a:tailEnd type="none" w="med" len="med"/>
+                    </a:lnL>
+                    <a:lnR w="6350" cap="flat" cmpd="sng" algn="ctr">
+                      <a:solidFill>
+                        <a:srgbClr val="D1D5DB"/>
+                      </a:solidFill>
+                      <a:prstDash val="solid"/>
+                      <a:round/>
+                      <a:headEnd type="none" w="med" len="med"/>
+                      <a:tailEnd type="none" w="med" len="med"/>
+                    </a:lnR>
+                    <a:lnT w="6350" cap="flat" cmpd="sng" algn="ctr">
+                      <a:solidFill>
+                        <a:srgbClr val="D1D5DB"/>
+                      </a:solidFill>
+                      <a:prstDash val="solid"/>
+                      <a:round/>
+                      <a:headEnd type="none" w="med" len="med"/>
+                      <a:tailEnd type="none" w="med" len="med"/>
+                    </a:lnT>
+                    <a:lnB w="6350" cap="flat" cmpd="sng" algn="ctr">
+                      <a:solidFill>
+                        <a:srgbClr val="D1D5DB"/>
+                      </a:solidFill>
+                      <a:prstDash val="solid"/>
+                      <a:round/>
+                      <a:headEnd type="none" w="med" len="med"/>
+                      <a:tailEnd type="none" w="med" len="med"/>
+                    </a:lnB>
+                  </a:tcPr>
+                </a:tc>
+              </a:tr>
+              <a:tr h="0">
+                <a:tc>
+                  <a:txBody>
+                    <a:bodyPr/>
+                    <a:lstStyle/>
+                    <a:p>
+                      <a:pPr algn="l" indent="0" marL="0">
+                        <a:buNone/>
+                      </a:pPr>
+                      <a:r>
+                        <a:rPr lang="en-US" sz="1400" dirty="0">
+                          <a:solidFill>
+                            <a:srgbClr val="000000"/>
+                          </a:solidFill>
+                          <a:latin typeface="Calibri" pitchFamily="34" charset="0"/>
+                          <a:ea typeface="Calibri" pitchFamily="34" charset="-122"/>
+                          <a:cs typeface="Calibri" pitchFamily="34" charset="-120"/>
+                        </a:rPr>
+                        <a:t>PLNES / PCH</a:t>
+                      </a:r>
+                      <a:endParaRPr lang="en-US" sz="1400" dirty="0">
+                        <a:latin typeface="Calibri" charset="0"/>
+                        <a:ea typeface="Calibri" charset="0"/>
+                        <a:cs typeface="Calibri" charset="0"/>
+                      </a:endParaRPr>
+                    </a:p>
+                  </a:txBody>
+                  <a:tcPr marL="91440" marR="91440" marT="45720" marB="45720">
+                    <a:lnL w="6350" cap="flat" cmpd="sng" algn="ctr">
+                      <a:solidFill>
+                        <a:srgbClr val="D1D5DB"/>
+                      </a:solidFill>
+                      <a:prstDash val="solid"/>
+                      <a:round/>
+                      <a:headEnd type="none" w="med" len="med"/>
+                      <a:tailEnd type="none" w="med" len="med"/>
+                    </a:lnL>
+                    <a:lnR w="6350" cap="flat" cmpd="sng" algn="ctr">
+                      <a:solidFill>
+                        <a:srgbClr val="D1D5DB"/>
+                      </a:solidFill>
+                      <a:prstDash val="solid"/>
+                      <a:round/>
+                      <a:headEnd type="none" w="med" len="med"/>
+                      <a:tailEnd type="none" w="med" len="med"/>
+                    </a:lnR>
+                    <a:lnT w="6350" cap="flat" cmpd="sng" algn="ctr">
+                      <a:solidFill>
+                        <a:srgbClr val="D1D5DB"/>
+                      </a:solidFill>
+                      <a:prstDash val="solid"/>
+                      <a:round/>
+                      <a:headEnd type="none" w="med" len="med"/>
+                      <a:tailEnd type="none" w="med" len="med"/>
+                    </a:lnT>
+                    <a:lnB w="6350" cap="flat" cmpd="sng" algn="ctr">
+                      <a:solidFill>
+                        <a:srgbClr val="D1D5DB"/>
+                      </a:solidFill>
+                      <a:prstDash val="solid"/>
+                      <a:round/>
+                      <a:headEnd type="none" w="med" len="med"/>
+                      <a:tailEnd type="none" w="med" len="med"/>
+                    </a:lnB>
+                  </a:tcPr>
+                </a:tc>
+                <a:tc>
+                  <a:txBody>
+                    <a:bodyPr/>
+                    <a:lstStyle/>
+                    <a:p>
+                      <a:pPr algn="l" indent="0" marL="0">
+                        <a:buNone/>
+                      </a:pPr>
+                      <a:r>
+                        <a:rPr lang="en-US" sz="1400" dirty="0">
+                          <a:solidFill>
+                            <a:srgbClr val="000000"/>
+                          </a:solidFill>
+                          <a:latin typeface="Calibri" pitchFamily="34" charset="0"/>
+                          <a:ea typeface="Calibri" pitchFamily="34" charset="-122"/>
+                          <a:cs typeface="Calibri" pitchFamily="34" charset="-120"/>
+                        </a:rPr>
+                        <a:t>Logistics</a:t>
+                      </a:r>
+                      <a:endParaRPr lang="en-US" sz="1400" dirty="0">
+                        <a:latin typeface="Calibri" charset="0"/>
+                        <a:ea typeface="Calibri" charset="0"/>
+                        <a:cs typeface="Calibri" charset="0"/>
+                      </a:endParaRPr>
+                    </a:p>
+                  </a:txBody>
+                  <a:tcPr marL="91440" marR="91440" marT="45720" marB="45720">
+                    <a:lnL w="6350" cap="flat" cmpd="sng" algn="ctr">
+                      <a:solidFill>
+                        <a:srgbClr val="D1D5DB"/>
+                      </a:solidFill>
+                      <a:prstDash val="solid"/>
+                      <a:round/>
+                      <a:headEnd type="none" w="med" len="med"/>
+                      <a:tailEnd type="none" w="med" len="med"/>
+                    </a:lnL>
+                    <a:lnR w="6350" cap="flat" cmpd="sng" algn="ctr">
+                      <a:solidFill>
+                        <a:srgbClr val="D1D5DB"/>
+                      </a:solidFill>
+                      <a:prstDash val="solid"/>
+                      <a:round/>
+                      <a:headEnd type="none" w="med" len="med"/>
+                      <a:tailEnd type="none" w="med" len="med"/>
+                    </a:lnR>
+                    <a:lnT w="6350" cap="flat" cmpd="sng" algn="ctr">
+                      <a:solidFill>
+                        <a:srgbClr val="D1D5DB"/>
+                      </a:solidFill>
+                      <a:prstDash val="solid"/>
+                      <a:round/>
+                      <a:headEnd type="none" w="med" len="med"/>
+                      <a:tailEnd type="none" w="med" len="med"/>
+                    </a:lnT>
+                    <a:lnB w="6350" cap="flat" cmpd="sng" algn="ctr">
+                      <a:solidFill>
+                        <a:srgbClr val="D1D5DB"/>
+                      </a:solidFill>
+                      <a:prstDash val="solid"/>
+                      <a:round/>
+                      <a:headEnd type="none" w="med" len="med"/>
+                      <a:tailEnd type="none" w="med" len="med"/>
+                    </a:lnB>
+                  </a:tcPr>
+                </a:tc>
+                <a:tc>
+                  <a:txBody>
+                    <a:bodyPr/>
+                    <a:lstStyle/>
+                    <a:p>
+                      <a:pPr algn="l" indent="0" marL="0">
+                        <a:buNone/>
+                      </a:pPr>
+                      <a:r>
+                        <a:rPr lang="en-US" sz="1400" dirty="0">
+                          <a:solidFill>
+                            <a:srgbClr val="000000"/>
+                          </a:solidFill>
+                          <a:latin typeface="Calibri" pitchFamily="34" charset="0"/>
+                          <a:ea typeface="Calibri" pitchFamily="34" charset="-122"/>
+                          <a:cs typeface="Calibri" pitchFamily="34" charset="-120"/>
+                        </a:rPr>
+                        <a:t>64.8 — Adequate</a:t>
+                      </a:r>
+                      <a:endParaRPr lang="en-US" sz="1400" dirty="0">
+                        <a:latin typeface="Calibri" charset="0"/>
+                        <a:ea typeface="Calibri" charset="0"/>
+                        <a:cs typeface="Calibri" charset="0"/>
+                      </a:endParaRPr>
+                    </a:p>
+                  </a:txBody>
+                  <a:tcPr marL="91440" marR="91440" marT="45720" marB="45720">
+                    <a:lnL w="6350" cap="flat" cmpd="sng" algn="ctr">
+                      <a:solidFill>
+                        <a:srgbClr val="D1D5DB"/>
+                      </a:solidFill>
+                      <a:prstDash val="solid"/>
+                      <a:round/>
+                      <a:headEnd type="none" w="med" len="med"/>
+                      <a:tailEnd type="none" w="med" len="med"/>
+                    </a:lnL>
+                    <a:lnR w="6350" cap="flat" cmpd="sng" algn="ctr">
+                      <a:solidFill>
+                        <a:srgbClr val="D1D5DB"/>
+                      </a:solidFill>
+                      <a:prstDash val="solid"/>
+                      <a:round/>
+                      <a:headEnd type="none" w="med" len="med"/>
+                      <a:tailEnd type="none" w="med" len="med"/>
+                    </a:lnR>
+                    <a:lnT w="6350" cap="flat" cmpd="sng" algn="ctr">
+                      <a:solidFill>
+                        <a:srgbClr val="D1D5DB"/>
+                      </a:solidFill>
+                      <a:prstDash val="solid"/>
+                      <a:round/>
+                      <a:headEnd type="none" w="med" len="med"/>
+                      <a:tailEnd type="none" w="med" len="med"/>
+                    </a:lnT>
+                    <a:lnB w="6350" cap="flat" cmpd="sng" algn="ctr">
+                      <a:solidFill>
+                        <a:srgbClr val="D1D5DB"/>
+                      </a:solidFill>
+                      <a:prstDash val="solid"/>
+                      <a:round/>
+                      <a:headEnd type="none" w="med" len="med"/>
+                      <a:tailEnd type="none" w="med" len="med"/>
+                    </a:lnB>
+                  </a:tcPr>
+                </a:tc>
+              </a:tr>
+            </a:tbl>
+          </a:graphicData>
+        </a:graphic>
+      </p:graphicFrame>
+    </p:spTree>
+  </p:cSld>
+  <p:clrMapOvr>
+    <a:masterClrMapping/>
+  </p:clrMapOvr>
+</p:sld>
+</file>
+
 <file path=ppt/slides/slide2.xml><?xml version="1.0" encoding="utf-8"?>
 <p:sld xmlns:a="http://schemas.openxmlformats.org/drawingml/2006/main" xmlns:r="http://schemas.openxmlformats.org/officeDocument/2006/relationships" xmlns:p="http://schemas.openxmlformats.org/presentationml/2006/main">
   <p:cSld name="Slide 2">

--- a/docs/assets/Wrexlyn-Pitch-Deck.pptx
+++ b/docs/assets/Wrexlyn-Pitch-Deck.pptx
@@ -4178,7 +4178,7 @@
                           <a:ea typeface="Calibri" pitchFamily="34" charset="-122"/>
                           <a:cs typeface="Calibri" pitchFamily="34" charset="-120"/>
                         </a:rPr>
-                        <a:t>PDQI</a:t>
+                        <a:t>NDQI</a:t>
                       </a:r>
                       <a:endParaRPr lang="en-US" sz="1400" dirty="0">
                         <a:latin typeface="Calibri" charset="0"/>
@@ -4375,7 +4375,7 @@
                           <a:ea typeface="Calibri" pitchFamily="34" charset="-122"/>
                           <a:cs typeface="Calibri" pitchFamily="34" charset="-120"/>
                         </a:rPr>
-                        <a:t>PSTS</a:t>
+                        <a:t>NSTS</a:t>
                       </a:r>
                       <a:endParaRPr lang="en-US" sz="1400" dirty="0">
                         <a:latin typeface="Calibri" charset="0"/>
@@ -4572,7 +4572,7 @@
                           <a:ea typeface="Calibri" pitchFamily="34" charset="-122"/>
                           <a:cs typeface="Calibri" pitchFamily="34" charset="-120"/>
                         </a:rPr>
-                        <a:t>PESS</a:t>
+                        <a:t>NESS</a:t>
                       </a:r>
                       <a:endParaRPr lang="en-US" sz="1400" dirty="0">
                         <a:latin typeface="Calibri" charset="0"/>
@@ -4769,7 +4769,7 @@
                           <a:ea typeface="Calibri" pitchFamily="34" charset="-122"/>
                           <a:cs typeface="Calibri" pitchFamily="34" charset="-120"/>
                         </a:rPr>
-                        <a:t>PCRS</a:t>
+                        <a:t>NCRS</a:t>
                       </a:r>
                       <a:endParaRPr lang="en-US" sz="1400" dirty="0">
                         <a:latin typeface="Calibri" charset="0"/>
@@ -4966,7 +4966,7 @@
                           <a:ea typeface="Calibri" pitchFamily="34" charset="-122"/>
                           <a:cs typeface="Calibri" pitchFamily="34" charset="-120"/>
                         </a:rPr>
-                        <a:t>PREIS</a:t>
+                        <a:t>NREIS</a:t>
                       </a:r>
                       <a:endParaRPr lang="en-US" sz="1400" dirty="0">
                         <a:latin typeface="Calibri" charset="0"/>
@@ -5163,7 +5163,7 @@
                           <a:ea typeface="Calibri" pitchFamily="34" charset="-122"/>
                           <a:cs typeface="Calibri" pitchFamily="34" charset="-120"/>
                         </a:rPr>
-                        <a:t>PAVS</a:t>
+                        <a:t>NAVS</a:t>
                       </a:r>
                       <a:endParaRPr lang="en-US" sz="1400" dirty="0">
                         <a:latin typeface="Calibri" charset="0"/>
@@ -5360,7 +5360,7 @@
                           <a:ea typeface="Calibri" pitchFamily="34" charset="-122"/>
                           <a:cs typeface="Calibri" pitchFamily="34" charset="-120"/>
                         </a:rPr>
-                        <a:t>PIMRI</a:t>
+                        <a:t>NIMRI</a:t>
                       </a:r>
                       <a:endParaRPr lang="en-US" sz="1400" dirty="0">
                         <a:latin typeface="Calibri" charset="0"/>
@@ -5557,7 +5557,7 @@
                           <a:ea typeface="Calibri" pitchFamily="34" charset="-122"/>
                           <a:cs typeface="Calibri" pitchFamily="34" charset="-120"/>
                         </a:rPr>
-                        <a:t>PLNES / PCH</a:t>
+                        <a:t>NLNES / NCH</a:t>
                       </a:r>
                       <a:endParaRPr lang="en-US" sz="1400" dirty="0">
                         <a:latin typeface="Calibri" charset="0"/>

--- a/docs/assets/Wrexlyn-Pitch-Deck.pptx
+++ b/docs/assets/Wrexlyn-Pitch-Deck.pptx
@@ -14,6 +14,7 @@
     <p:sldId id="262" r:id="rId8"/>
     <p:sldId id="263" r:id="rId9"/>
     <p:sldId id="264" r:id="rId10"/>
+    <p:sldId id="270" r:id="rId21"/>
     <p:sldId id="265" r:id="rId11"/>
     <p:sldId id="266" r:id="rId12"/>
     <p:sldId id="267" r:id="rId13"/>
@@ -5748,6 +5749,903 @@
 </p:sld>
 </file>
 
+<file path=ppt/slides/slide15.xml><?xml version="1.0" encoding="utf-8"?>
+<p:sld xmlns:a="http://schemas.openxmlformats.org/drawingml/2006/main" xmlns:r="http://schemas.openxmlformats.org/officeDocument/2006/relationships" xmlns:p="http://schemas.openxmlformats.org/presentationml/2006/main">
+  <p:cSld name="Slide 15">
+    <p:bg>
+      <p:bgPr>
+        <a:solidFill>
+          <a:srgbClr val="FFFFFF"/>
+        </a:solidFill>
+      </p:bgPr>
+    </p:bg>
+    <p:spTree>
+      <p:nvGrpSpPr>
+        <p:cNvPr id="1" name=""/>
+        <p:cNvGrpSpPr/>
+        <p:nvPr/>
+      </p:nvGrpSpPr>
+      <p:grpSpPr>
+        <a:xfrm>
+          <a:off x="0" y="0"/>
+          <a:ext cx="0" cy="0"/>
+          <a:chOff x="0" y="0"/>
+          <a:chExt cx="0" cy="0"/>
+        </a:xfrm>
+      </p:grpSpPr>
+      <p:sp>
+        <p:nvSpPr>
+          <p:cNvPr id="2" name="Text 0"/>
+          <p:cNvSpPr/>
+          <p:nvPr/>
+        </p:nvSpPr>
+        <p:spPr>
+          <a:xfrm>
+            <a:off x="457200" y="320040"/>
+            <a:ext cx="8229600" cy="822960"/>
+          </a:xfrm>
+          <a:prstGeom prst="rect">
+            <a:avLst/>
+          </a:prstGeom>
+          <a:noFill/>
+          <a:ln/>
+        </p:spPr>
+        <p:txBody>
+          <a:bodyPr wrap="square" rtlCol="0" anchor="ctr"/>
+          <a:lstStyle/>
+          <a:p>
+            <a:pPr indent="0" marL="0">
+              <a:buNone/>
+            </a:pPr>
+            <a:r>
+              <a:rPr lang="en-US" sz="3600" b="1" dirty="0">
+                <a:solidFill>
+                  <a:srgbClr val="1F2937"/>
+                </a:solidFill>
+                <a:latin typeface="Calibri" pitchFamily="34" charset="0"/>
+                <a:ea typeface="Calibri" pitchFamily="34" charset="-122"/>
+                <a:cs typeface="Calibri" pitchFamily="34" charset="-120"/>
+              </a:rPr>
+              <a:t>It remembers what you tell it — and what it got wrong</a:t>
+            </a:r>
+            <a:endParaRPr lang="en-US" sz="3600" dirty="0"/>
+          </a:p>
+        </p:txBody>
+      </p:sp>
+      <p:graphicFrame>
+        <p:nvGraphicFramePr>
+          <p:cNvPr id="9" name="Table 0"/>
+          <p:cNvGraphicFramePr>
+            <a:graphicFrameLocks noGrp="1"/>
+          </p:cNvGraphicFramePr>
+          <p:nvPr>
+            <p:extLst>
+              <p:ext uri="{D42A27DB-BD31-4B8C-83A1-F6EECF244321}">
+                <p14:modId xmlns:p14="http://schemas.microsoft.com/office/powerpoint/2010/main" val="1579011935"/>
+              </p:ext>
+            </p:extLst>
+          </p:nvPr>
+        </p:nvGraphicFramePr>
+        <p:xfrm>
+          <a:off x="457200" y="1417320"/>
+          <a:ext cx="8229600" cy="914400"/>
+        </p:xfrm>
+        <a:graphic>
+          <a:graphicData uri="http://schemas.openxmlformats.org/drawingml/2006/table">
+            <a:tbl>
+              <a:tblPr/>
+              <a:tblGrid>
+                <a:gridCol w="2286000"/>
+                <a:gridCol w="2971800"/>
+                <a:gridCol w="2971800"/>
+              </a:tblGrid>
+              <a:tr h="0">
+                <a:tc>
+                  <a:txBody>
+                    <a:bodyPr/>
+                    <a:lstStyle/>
+                    <a:p>
+                      <a:pPr algn="l" indent="0" marL="0">
+                        <a:buNone/>
+                      </a:pPr>
+                      <a:endParaRPr lang="en-US" sz="1400" dirty="0">
+                        <a:latin typeface="Calibri" charset="0"/>
+                        <a:ea typeface="Calibri" charset="0"/>
+                        <a:cs typeface="Calibri" charset="0"/>
+                      </a:endParaRPr>
+                    </a:p>
+                  </a:txBody>
+                  <a:tcPr marL="91440" marR="91440" marT="45720" marB="45720">
+                    <a:lnL w="6350" cap="flat" cmpd="sng" algn="ctr">
+                      <a:solidFill>
+                        <a:srgbClr val="D1D5DB"/>
+                      </a:solidFill>
+                      <a:prstDash val="solid"/>
+                      <a:round/>
+                      <a:headEnd type="none" w="med" len="med"/>
+                      <a:tailEnd type="none" w="med" len="med"/>
+                    </a:lnL>
+                    <a:lnR w="6350" cap="flat" cmpd="sng" algn="ctr">
+                      <a:solidFill>
+                        <a:srgbClr val="D1D5DB"/>
+                      </a:solidFill>
+                      <a:prstDash val="solid"/>
+                      <a:round/>
+                      <a:headEnd type="none" w="med" len="med"/>
+                      <a:tailEnd type="none" w="med" len="med"/>
+                    </a:lnR>
+                    <a:lnT w="6350" cap="flat" cmpd="sng" algn="ctr">
+                      <a:solidFill>
+                        <a:srgbClr val="D1D5DB"/>
+                      </a:solidFill>
+                      <a:prstDash val="solid"/>
+                      <a:round/>
+                      <a:headEnd type="none" w="med" len="med"/>
+                      <a:tailEnd type="none" w="med" len="med"/>
+                    </a:lnT>
+                    <a:lnB w="6350" cap="flat" cmpd="sng" algn="ctr">
+                      <a:solidFill>
+                        <a:srgbClr val="D1D5DB"/>
+                      </a:solidFill>
+                      <a:prstDash val="solid"/>
+                      <a:round/>
+                      <a:headEnd type="none" w="med" len="med"/>
+                      <a:tailEnd type="none" w="med" len="med"/>
+                    </a:lnB>
+                    <a:solidFill>
+                      <a:srgbClr val="33E0A8"/>
+                    </a:solidFill>
+                  </a:tcPr>
+                </a:tc>
+                <a:tc>
+                  <a:txBody>
+                    <a:bodyPr/>
+                    <a:lstStyle/>
+                    <a:p>
+                      <a:pPr algn="l" indent="0" marL="0">
+                        <a:buNone/>
+                      </a:pPr>
+                      <a:r>
+                        <a:rPr lang="en-US" sz="1400" b="1" dirty="0">
+                          <a:solidFill>
+                            <a:srgbClr val="FFFFFF"/>
+                          </a:solidFill>
+                          <a:latin typeface="Calibri" pitchFamily="34" charset="0"/>
+                          <a:ea typeface="Calibri" pitchFamily="34" charset="-122"/>
+                          <a:cs typeface="Calibri" pitchFamily="34" charset="-120"/>
+                        </a:rPr>
+                        <a:t>Typical AI coding assistant</a:t>
+                      </a:r>
+                      <a:endParaRPr lang="en-US" sz="1400" dirty="0">
+                        <a:latin typeface="Calibri" charset="0"/>
+                        <a:ea typeface="Calibri" charset="0"/>
+                        <a:cs typeface="Calibri" charset="0"/>
+                      </a:endParaRPr>
+                    </a:p>
+                  </a:txBody>
+                  <a:tcPr marL="91440" marR="91440" marT="45720" marB="45720">
+                    <a:lnL w="6350" cap="flat" cmpd="sng" algn="ctr">
+                      <a:solidFill>
+                        <a:srgbClr val="D1D5DB"/>
+                      </a:solidFill>
+                      <a:prstDash val="solid"/>
+                      <a:round/>
+                      <a:headEnd type="none" w="med" len="med"/>
+                      <a:tailEnd type="none" w="med" len="med"/>
+                    </a:lnL>
+                    <a:lnR w="6350" cap="flat" cmpd="sng" algn="ctr">
+                      <a:solidFill>
+                        <a:srgbClr val="D1D5DB"/>
+                      </a:solidFill>
+                      <a:prstDash val="solid"/>
+                      <a:round/>
+                      <a:headEnd type="none" w="med" len="med"/>
+                      <a:tailEnd type="none" w="med" len="med"/>
+                    </a:lnR>
+                    <a:lnT w="6350" cap="flat" cmpd="sng" algn="ctr">
+                      <a:solidFill>
+                        <a:srgbClr val="D1D5DB"/>
+                      </a:solidFill>
+                      <a:prstDash val="solid"/>
+                      <a:round/>
+                      <a:headEnd type="none" w="med" len="med"/>
+                      <a:tailEnd type="none" w="med" len="med"/>
+                    </a:lnT>
+                    <a:lnB w="6350" cap="flat" cmpd="sng" algn="ctr">
+                      <a:solidFill>
+                        <a:srgbClr val="D1D5DB"/>
+                      </a:solidFill>
+                      <a:prstDash val="solid"/>
+                      <a:round/>
+                      <a:headEnd type="none" w="med" len="med"/>
+                      <a:tailEnd type="none" w="med" len="med"/>
+                    </a:lnB>
+                    <a:solidFill>
+                      <a:srgbClr val="33E0A8"/>
+                    </a:solidFill>
+                  </a:tcPr>
+                </a:tc>
+                <a:tc>
+                  <a:txBody>
+                    <a:bodyPr/>
+                    <a:lstStyle/>
+                    <a:p>
+                      <a:pPr algn="l" indent="0" marL="0">
+                        <a:buNone/>
+                      </a:pPr>
+                      <a:r>
+                        <a:rPr lang="en-US" sz="1400" b="1" dirty="0">
+                          <a:solidFill>
+                            <a:srgbClr val="FFFFFF"/>
+                          </a:solidFill>
+                          <a:latin typeface="Calibri" pitchFamily="34" charset="0"/>
+                          <a:ea typeface="Calibri" pitchFamily="34" charset="-122"/>
+                          <a:cs typeface="Calibri" pitchFamily="34" charset="-120"/>
+                        </a:rPr>
+                        <a:t>Wrexlyn</a:t>
+                      </a:r>
+                      <a:endParaRPr lang="en-US" sz="1400" dirty="0">
+                        <a:latin typeface="Calibri" charset="0"/>
+                        <a:ea typeface="Calibri" charset="0"/>
+                        <a:cs typeface="Calibri" charset="0"/>
+                      </a:endParaRPr>
+                    </a:p>
+                  </a:txBody>
+                  <a:tcPr marL="91440" marR="91440" marT="45720" marB="45720">
+                    <a:lnL w="6350" cap="flat" cmpd="sng" algn="ctr">
+                      <a:solidFill>
+                        <a:srgbClr val="D1D5DB"/>
+                      </a:solidFill>
+                      <a:prstDash val="solid"/>
+                      <a:round/>
+                      <a:headEnd type="none" w="med" len="med"/>
+                      <a:tailEnd type="none" w="med" len="med"/>
+                    </a:lnL>
+                    <a:lnR w="6350" cap="flat" cmpd="sng" algn="ctr">
+                      <a:solidFill>
+                        <a:srgbClr val="D1D5DB"/>
+                      </a:solidFill>
+                      <a:prstDash val="solid"/>
+                      <a:round/>
+                      <a:headEnd type="none" w="med" len="med"/>
+                      <a:tailEnd type="none" w="med" len="med"/>
+                    </a:lnR>
+                    <a:lnT w="6350" cap="flat" cmpd="sng" algn="ctr">
+                      <a:solidFill>
+                        <a:srgbClr val="D1D5DB"/>
+                      </a:solidFill>
+                      <a:prstDash val="solid"/>
+                      <a:round/>
+                      <a:headEnd type="none" w="med" len="med"/>
+                      <a:tailEnd type="none" w="med" len="med"/>
+                    </a:lnT>
+                    <a:lnB w="6350" cap="flat" cmpd="sng" algn="ctr">
+                      <a:solidFill>
+                        <a:srgbClr val="D1D5DB"/>
+                      </a:solidFill>
+                      <a:prstDash val="solid"/>
+                      <a:round/>
+                      <a:headEnd type="none" w="med" len="med"/>
+                      <a:tailEnd type="none" w="med" len="med"/>
+                    </a:lnB>
+                    <a:solidFill>
+                      <a:srgbClr val="33E0A8"/>
+                    </a:solidFill>
+                  </a:tcPr>
+                </a:tc>
+              </a:tr>
+              <a:tr h="0">
+                <a:tc>
+                  <a:txBody>
+                    <a:bodyPr/>
+                    <a:lstStyle/>
+                    <a:p>
+                      <a:pPr algn="l" indent="0" marL="0">
+                        <a:buNone/>
+                      </a:pPr>
+                      <a:r>
+                        <a:rPr lang="en-US" sz="1400" dirty="0">
+                          <a:solidFill>
+                            <a:srgbClr val="000000"/>
+                          </a:solidFill>
+                          <a:latin typeface="Calibri" pitchFamily="34" charset="0"/>
+                          <a:ea typeface="Calibri" pitchFamily="34" charset="-122"/>
+                          <a:cs typeface="Calibri" pitchFamily="34" charset="-120"/>
+                        </a:rPr>
+                        <a:t>You state a preference</a:t>
+                      </a:r>
+                      <a:endParaRPr lang="en-US" sz="1400" dirty="0">
+                        <a:latin typeface="Calibri" charset="0"/>
+                        <a:ea typeface="Calibri" charset="0"/>
+                        <a:cs typeface="Calibri" charset="0"/>
+                      </a:endParaRPr>
+                    </a:p>
+                  </a:txBody>
+                  <a:tcPr marL="91440" marR="91440" marT="45720" marB="45720">
+                    <a:lnL w="6350" cap="flat" cmpd="sng" algn="ctr">
+                      <a:solidFill>
+                        <a:srgbClr val="D1D5DB"/>
+                      </a:solidFill>
+                      <a:prstDash val="solid"/>
+                      <a:round/>
+                      <a:headEnd type="none" w="med" len="med"/>
+                      <a:tailEnd type="none" w="med" len="med"/>
+                    </a:lnL>
+                    <a:lnR w="6350" cap="flat" cmpd="sng" algn="ctr">
+                      <a:solidFill>
+                        <a:srgbClr val="D1D5DB"/>
+                      </a:solidFill>
+                      <a:prstDash val="solid"/>
+                      <a:round/>
+                      <a:headEnd type="none" w="med" len="med"/>
+                      <a:tailEnd type="none" w="med" len="med"/>
+                    </a:lnR>
+                    <a:lnT w="6350" cap="flat" cmpd="sng" algn="ctr">
+                      <a:solidFill>
+                        <a:srgbClr val="D1D5DB"/>
+                      </a:solidFill>
+                      <a:prstDash val="solid"/>
+                      <a:round/>
+                      <a:headEnd type="none" w="med" len="med"/>
+                      <a:tailEnd type="none" w="med" len="med"/>
+                    </a:lnT>
+                    <a:lnB w="6350" cap="flat" cmpd="sng" algn="ctr">
+                      <a:solidFill>
+                        <a:srgbClr val="D1D5DB"/>
+                      </a:solidFill>
+                      <a:prstDash val="solid"/>
+                      <a:round/>
+                      <a:headEnd type="none" w="med" len="med"/>
+                      <a:tailEnd type="none" w="med" len="med"/>
+                    </a:lnB>
+                  </a:tcPr>
+                </a:tc>
+                <a:tc>
+                  <a:txBody>
+                    <a:bodyPr/>
+                    <a:lstStyle/>
+                    <a:p>
+                      <a:pPr algn="l" indent="0" marL="0">
+                        <a:buNone/>
+                      </a:pPr>
+                      <a:r>
+                        <a:rPr lang="en-US" sz="1400" dirty="0">
+                          <a:solidFill>
+                            <a:srgbClr val="000000"/>
+                          </a:solidFill>
+                          <a:latin typeface="Calibri" pitchFamily="34" charset="0"/>
+                          <a:ea typeface="Calibri" pitchFamily="34" charset="-122"/>
+                          <a:cs typeface="Calibri" pitchFamily="34" charset="-120"/>
+                        </a:rPr>
+                        <a:t>Applies this turn, forgotten next session</a:t>
+                      </a:r>
+                      <a:endParaRPr lang="en-US" sz="1400" dirty="0">
+                        <a:latin typeface="Calibri" charset="0"/>
+                        <a:ea typeface="Calibri" charset="0"/>
+                        <a:cs typeface="Calibri" charset="0"/>
+                      </a:endParaRPr>
+                    </a:p>
+                  </a:txBody>
+                  <a:tcPr marL="91440" marR="91440" marT="45720" marB="45720">
+                    <a:lnL w="6350" cap="flat" cmpd="sng" algn="ctr">
+                      <a:solidFill>
+                        <a:srgbClr val="D1D5DB"/>
+                      </a:solidFill>
+                      <a:prstDash val="solid"/>
+                      <a:round/>
+                      <a:headEnd type="none" w="med" len="med"/>
+                      <a:tailEnd type="none" w="med" len="med"/>
+                    </a:lnL>
+                    <a:lnR w="6350" cap="flat" cmpd="sng" algn="ctr">
+                      <a:solidFill>
+                        <a:srgbClr val="D1D5DB"/>
+                      </a:solidFill>
+                      <a:prstDash val="solid"/>
+                      <a:round/>
+                      <a:headEnd type="none" w="med" len="med"/>
+                      <a:tailEnd type="none" w="med" len="med"/>
+                    </a:lnR>
+                    <a:lnT w="6350" cap="flat" cmpd="sng" algn="ctr">
+                      <a:solidFill>
+                        <a:srgbClr val="D1D5DB"/>
+                      </a:solidFill>
+                      <a:prstDash val="solid"/>
+                      <a:round/>
+                      <a:headEnd type="none" w="med" len="med"/>
+                      <a:tailEnd type="none" w="med" len="med"/>
+                    </a:lnT>
+                    <a:lnB w="6350" cap="flat" cmpd="sng" algn="ctr">
+                      <a:solidFill>
+                        <a:srgbClr val="D1D5DB"/>
+                      </a:solidFill>
+                      <a:prstDash val="solid"/>
+                      <a:round/>
+                      <a:headEnd type="none" w="med" len="med"/>
+                      <a:tailEnd type="none" w="med" len="med"/>
+                    </a:lnB>
+                  </a:tcPr>
+                </a:tc>
+                <a:tc>
+                  <a:txBody>
+                    <a:bodyPr/>
+                    <a:lstStyle/>
+                    <a:p>
+                      <a:pPr algn="l" indent="0" marL="0">
+                        <a:buNone/>
+                      </a:pPr>
+                      <a:r>
+                        <a:rPr lang="en-US" sz="1400" dirty="0">
+                          <a:solidFill>
+                            <a:srgbClr val="000000"/>
+                          </a:solidFill>
+                          <a:latin typeface="Calibri" pitchFamily="34" charset="0"/>
+                          <a:ea typeface="Calibri" pitchFamily="34" charset="-122"/>
+                          <a:cs typeface="Calibri" pitchFamily="34" charset="-120"/>
+                        </a:rPr>
+                        <a:t>Saved via remember_preference — applies from now on</a:t>
+                      </a:r>
+                      <a:endParaRPr lang="en-US" sz="1400" dirty="0">
+                        <a:latin typeface="Calibri" charset="0"/>
+                        <a:ea typeface="Calibri" charset="0"/>
+                        <a:cs typeface="Calibri" charset="0"/>
+                      </a:endParaRPr>
+                    </a:p>
+                  </a:txBody>
+                  <a:tcPr marL="91440" marR="91440" marT="45720" marB="45720">
+                    <a:lnL w="6350" cap="flat" cmpd="sng" algn="ctr">
+                      <a:solidFill>
+                        <a:srgbClr val="D1D5DB"/>
+                      </a:solidFill>
+                      <a:prstDash val="solid"/>
+                      <a:round/>
+                      <a:headEnd type="none" w="med" len="med"/>
+                      <a:tailEnd type="none" w="med" len="med"/>
+                    </a:lnL>
+                    <a:lnR w="6350" cap="flat" cmpd="sng" algn="ctr">
+                      <a:solidFill>
+                        <a:srgbClr val="D1D5DB"/>
+                      </a:solidFill>
+                      <a:prstDash val="solid"/>
+                      <a:round/>
+                      <a:headEnd type="none" w="med" len="med"/>
+                      <a:tailEnd type="none" w="med" len="med"/>
+                    </a:lnR>
+                    <a:lnT w="6350" cap="flat" cmpd="sng" algn="ctr">
+                      <a:solidFill>
+                        <a:srgbClr val="D1D5DB"/>
+                      </a:solidFill>
+                      <a:prstDash val="solid"/>
+                      <a:round/>
+                      <a:headEnd type="none" w="med" len="med"/>
+                      <a:tailEnd type="none" w="med" len="med"/>
+                    </a:lnT>
+                    <a:lnB w="6350" cap="flat" cmpd="sng" algn="ctr">
+                      <a:solidFill>
+                        <a:srgbClr val="D1D5DB"/>
+                      </a:solidFill>
+                      <a:prstDash val="solid"/>
+                      <a:round/>
+                      <a:headEnd type="none" w="med" len="med"/>
+                      <a:tailEnd type="none" w="med" len="med"/>
+                    </a:lnB>
+                  </a:tcPr>
+                </a:tc>
+              </a:tr>
+              <a:tr h="0">
+                <a:tc>
+                  <a:txBody>
+                    <a:bodyPr/>
+                    <a:lstStyle/>
+                    <a:p>
+                      <a:pPr algn="l" indent="0" marL="0">
+                        <a:buNone/>
+                      </a:pPr>
+                      <a:r>
+                        <a:rPr lang="en-US" sz="1400" dirty="0">
+                          <a:solidFill>
+                            <a:srgbClr val="000000"/>
+                          </a:solidFill>
+                          <a:latin typeface="Calibri" pitchFamily="34" charset="0"/>
+                          <a:ea typeface="Calibri" pitchFamily="34" charset="-122"/>
+                          <a:cs typeface="Calibri" pitchFamily="34" charset="-120"/>
+                        </a:rPr>
+                        <a:t>It finishes a multi-step task</a:t>
+                      </a:r>
+                      <a:endParaRPr lang="en-US" sz="1400" dirty="0">
+                        <a:latin typeface="Calibri" charset="0"/>
+                        <a:ea typeface="Calibri" charset="0"/>
+                        <a:cs typeface="Calibri" charset="0"/>
+                      </a:endParaRPr>
+                    </a:p>
+                  </a:txBody>
+                  <a:tcPr marL="91440" marR="91440" marT="45720" marB="45720">
+                    <a:lnL w="6350" cap="flat" cmpd="sng" algn="ctr">
+                      <a:solidFill>
+                        <a:srgbClr val="D1D5DB"/>
+                      </a:solidFill>
+                      <a:prstDash val="solid"/>
+                      <a:round/>
+                      <a:headEnd type="none" w="med" len="med"/>
+                      <a:tailEnd type="none" w="med" len="med"/>
+                    </a:lnL>
+                    <a:lnR w="6350" cap="flat" cmpd="sng" algn="ctr">
+                      <a:solidFill>
+                        <a:srgbClr val="D1D5DB"/>
+                      </a:solidFill>
+                      <a:prstDash val="solid"/>
+                      <a:round/>
+                      <a:headEnd type="none" w="med" len="med"/>
+                      <a:tailEnd type="none" w="med" len="med"/>
+                    </a:lnR>
+                    <a:lnT w="6350" cap="flat" cmpd="sng" algn="ctr">
+                      <a:solidFill>
+                        <a:srgbClr val="D1D5DB"/>
+                      </a:solidFill>
+                      <a:prstDash val="solid"/>
+                      <a:round/>
+                      <a:headEnd type="none" w="med" len="med"/>
+                      <a:tailEnd type="none" w="med" len="med"/>
+                    </a:lnT>
+                    <a:lnB w="6350" cap="flat" cmpd="sng" algn="ctr">
+                      <a:solidFill>
+                        <a:srgbClr val="D1D5DB"/>
+                      </a:solidFill>
+                      <a:prstDash val="solid"/>
+                      <a:round/>
+                      <a:headEnd type="none" w="med" len="med"/>
+                      <a:tailEnd type="none" w="med" len="med"/>
+                    </a:lnB>
+                    <a:solidFill>
+                      <a:srgbClr val="F3F4F6"/>
+                    </a:solidFill>
+                  </a:tcPr>
+                </a:tc>
+                <a:tc>
+                  <a:txBody>
+                    <a:bodyPr/>
+                    <a:lstStyle/>
+                    <a:p>
+                      <a:pPr algn="l" indent="0" marL="0">
+                        <a:buNone/>
+                      </a:pPr>
+                      <a:r>
+                        <a:rPr lang="en-US" sz="1400" dirty="0">
+                          <a:solidFill>
+                            <a:srgbClr val="000000"/>
+                          </a:solidFill>
+                          <a:latin typeface="Calibri" pitchFamily="34" charset="0"/>
+                          <a:ea typeface="Calibri" pitchFamily="34" charset="-122"/>
+                          <a:cs typeface="Calibri" pitchFamily="34" charset="-120"/>
+                        </a:rPr>
+                        <a:t>Re-derives it from scratch next time</a:t>
+                      </a:r>
+                      <a:endParaRPr lang="en-US" sz="1400" dirty="0">
+                        <a:latin typeface="Calibri" charset="0"/>
+                        <a:ea typeface="Calibri" charset="0"/>
+                        <a:cs typeface="Calibri" charset="0"/>
+                      </a:endParaRPr>
+                    </a:p>
+                  </a:txBody>
+                  <a:tcPr marL="91440" marR="91440" marT="45720" marB="45720">
+                    <a:lnL w="6350" cap="flat" cmpd="sng" algn="ctr">
+                      <a:solidFill>
+                        <a:srgbClr val="D1D5DB"/>
+                      </a:solidFill>
+                      <a:prstDash val="solid"/>
+                      <a:round/>
+                      <a:headEnd type="none" w="med" len="med"/>
+                      <a:tailEnd type="none" w="med" len="med"/>
+                    </a:lnL>
+                    <a:lnR w="6350" cap="flat" cmpd="sng" algn="ctr">
+                      <a:solidFill>
+                        <a:srgbClr val="D1D5DB"/>
+                      </a:solidFill>
+                      <a:prstDash val="solid"/>
+                      <a:round/>
+                      <a:headEnd type="none" w="med" len="med"/>
+                      <a:tailEnd type="none" w="med" len="med"/>
+                    </a:lnR>
+                    <a:lnT w="6350" cap="flat" cmpd="sng" algn="ctr">
+                      <a:solidFill>
+                        <a:srgbClr val="D1D5DB"/>
+                      </a:solidFill>
+                      <a:prstDash val="solid"/>
+                      <a:round/>
+                      <a:headEnd type="none" w="med" len="med"/>
+                      <a:tailEnd type="none" w="med" len="med"/>
+                    </a:lnT>
+                    <a:lnB w="6350" cap="flat" cmpd="sng" algn="ctr">
+                      <a:solidFill>
+                        <a:srgbClr val="D1D5DB"/>
+                      </a:solidFill>
+                      <a:prstDash val="solid"/>
+                      <a:round/>
+                      <a:headEnd type="none" w="med" len="med"/>
+                      <a:tailEnd type="none" w="med" len="med"/>
+                    </a:lnB>
+                    <a:solidFill>
+                      <a:srgbClr val="F3F4F6"/>
+                    </a:solidFill>
+                  </a:tcPr>
+                </a:tc>
+                <a:tc>
+                  <a:txBody>
+                    <a:bodyPr/>
+                    <a:lstStyle/>
+                    <a:p>
+                      <a:pPr algn="l" indent="0" marL="0">
+                        <a:buNone/>
+                      </a:pPr>
+                      <a:r>
+                        <a:rPr lang="en-US" sz="1400" dirty="0">
+                          <a:solidFill>
+                            <a:srgbClr val="000000"/>
+                          </a:solidFill>
+                          <a:latin typeface="Calibri" pitchFamily="34" charset="0"/>
+                          <a:ea typeface="Calibri" pitchFamily="34" charset="-122"/>
+                          <a:cs typeface="Calibri" pitchFamily="34" charset="-120"/>
+                        </a:rPr>
+                        <a:t>save_skill / recall_skill bring it back on demand</a:t>
+                      </a:r>
+                      <a:endParaRPr lang="en-US" sz="1400" dirty="0">
+                        <a:latin typeface="Calibri" charset="0"/>
+                        <a:ea typeface="Calibri" charset="0"/>
+                        <a:cs typeface="Calibri" charset="0"/>
+                      </a:endParaRPr>
+                    </a:p>
+                  </a:txBody>
+                  <a:tcPr marL="91440" marR="91440" marT="45720" marB="45720">
+                    <a:lnL w="6350" cap="flat" cmpd="sng" algn="ctr">
+                      <a:solidFill>
+                        <a:srgbClr val="D1D5DB"/>
+                      </a:solidFill>
+                      <a:prstDash val="solid"/>
+                      <a:round/>
+                      <a:headEnd type="none" w="med" len="med"/>
+                      <a:tailEnd type="none" w="med" len="med"/>
+                    </a:lnL>
+                    <a:lnR w="6350" cap="flat" cmpd="sng" algn="ctr">
+                      <a:solidFill>
+                        <a:srgbClr val="D1D5DB"/>
+                      </a:solidFill>
+                      <a:prstDash val="solid"/>
+                      <a:round/>
+                      <a:headEnd type="none" w="med" len="med"/>
+                      <a:tailEnd type="none" w="med" len="med"/>
+                    </a:lnR>
+                    <a:lnT w="6350" cap="flat" cmpd="sng" algn="ctr">
+                      <a:solidFill>
+                        <a:srgbClr val="D1D5DB"/>
+                      </a:solidFill>
+                      <a:prstDash val="solid"/>
+                      <a:round/>
+                      <a:headEnd type="none" w="med" len="med"/>
+                      <a:tailEnd type="none" w="med" len="med"/>
+                    </a:lnT>
+                    <a:lnB w="6350" cap="flat" cmpd="sng" algn="ctr">
+                      <a:solidFill>
+                        <a:srgbClr val="D1D5DB"/>
+                      </a:solidFill>
+                      <a:prstDash val="solid"/>
+                      <a:round/>
+                      <a:headEnd type="none" w="med" len="med"/>
+                      <a:tailEnd type="none" w="med" len="med"/>
+                    </a:lnB>
+                    <a:solidFill>
+                      <a:srgbClr val="F3F4F6"/>
+                    </a:solidFill>
+                  </a:tcPr>
+                </a:tc>
+              </a:tr>
+              <a:tr h="0">
+                <a:tc>
+                  <a:txBody>
+                    <a:bodyPr/>
+                    <a:lstStyle/>
+                    <a:p>
+                      <a:pPr algn="l" indent="0" marL="0">
+                        <a:buNone/>
+                      </a:pPr>
+                      <a:r>
+                        <a:rPr lang="en-US" sz="1400" dirty="0">
+                          <a:solidFill>
+                            <a:srgbClr val="000000"/>
+                          </a:solidFill>
+                          <a:latin typeface="Calibri" pitchFamily="34" charset="0"/>
+                          <a:ea typeface="Calibri" pitchFamily="34" charset="-122"/>
+                          <a:cs typeface="Calibri" pitchFamily="34" charset="-120"/>
+                        </a:rPr>
+                        <a:t>When it takes effect</a:t>
+                      </a:r>
+                      <a:endParaRPr lang="en-US" sz="1400" dirty="0">
+                        <a:latin typeface="Calibri" charset="0"/>
+                        <a:ea typeface="Calibri" charset="0"/>
+                        <a:cs typeface="Calibri" charset="0"/>
+                      </a:endParaRPr>
+                    </a:p>
+                  </a:txBody>
+                  <a:tcPr marL="91440" marR="91440" marT="45720" marB="45720">
+                    <a:lnL w="6350" cap="flat" cmpd="sng" algn="ctr">
+                      <a:solidFill>
+                        <a:srgbClr val="D1D5DB"/>
+                      </a:solidFill>
+                      <a:prstDash val="solid"/>
+                      <a:round/>
+                      <a:headEnd type="none" w="med" len="med"/>
+                      <a:tailEnd type="none" w="med" len="med"/>
+                    </a:lnL>
+                    <a:lnR w="6350" cap="flat" cmpd="sng" algn="ctr">
+                      <a:solidFill>
+                        <a:srgbClr val="D1D5DB"/>
+                      </a:solidFill>
+                      <a:prstDash val="solid"/>
+                      <a:round/>
+                      <a:headEnd type="none" w="med" len="med"/>
+                      <a:tailEnd type="none" w="med" len="med"/>
+                    </a:lnR>
+                    <a:lnT w="6350" cap="flat" cmpd="sng" algn="ctr">
+                      <a:solidFill>
+                        <a:srgbClr val="D1D5DB"/>
+                      </a:solidFill>
+                      <a:prstDash val="solid"/>
+                      <a:round/>
+                      <a:headEnd type="none" w="med" len="med"/>
+                      <a:tailEnd type="none" w="med" len="med"/>
+                    </a:lnT>
+                    <a:lnB w="6350" cap="flat" cmpd="sng" algn="ctr">
+                      <a:solidFill>
+                        <a:srgbClr val="D1D5DB"/>
+                      </a:solidFill>
+                      <a:prstDash val="solid"/>
+                      <a:round/>
+                      <a:headEnd type="none" w="med" len="med"/>
+                      <a:tailEnd type="none" w="med" len="med"/>
+                    </a:lnB>
+                  </a:tcPr>
+                </a:tc>
+                <a:tc>
+                  <a:txBody>
+                    <a:bodyPr/>
+                    <a:lstStyle/>
+                    <a:p>
+                      <a:pPr algn="l" indent="0" marL="0">
+                        <a:buNone/>
+                      </a:pPr>
+                      <a:r>
+                        <a:rPr lang="en-US" sz="1400" dirty="0">
+                          <a:solidFill>
+                            <a:srgbClr val="000000"/>
+                          </a:solidFill>
+                          <a:latin typeface="Calibri" pitchFamily="34" charset="0"/>
+                          <a:ea typeface="Calibri" pitchFamily="34" charset="-122"/>
+                          <a:cs typeface="Calibri" pitchFamily="34" charset="-120"/>
+                        </a:rPr>
+                        <a:t>Next session, if at all</a:t>
+                      </a:r>
+                      <a:endParaRPr lang="en-US" sz="1400" dirty="0">
+                        <a:latin typeface="Calibri" charset="0"/>
+                        <a:ea typeface="Calibri" charset="0"/>
+                        <a:cs typeface="Calibri" charset="0"/>
+                      </a:endParaRPr>
+                    </a:p>
+                  </a:txBody>
+                  <a:tcPr marL="91440" marR="91440" marT="45720" marB="45720">
+                    <a:lnL w="6350" cap="flat" cmpd="sng" algn="ctr">
+                      <a:solidFill>
+                        <a:srgbClr val="D1D5DB"/>
+                      </a:solidFill>
+                      <a:prstDash val="solid"/>
+                      <a:round/>
+                      <a:headEnd type="none" w="med" len="med"/>
+                      <a:tailEnd type="none" w="med" len="med"/>
+                    </a:lnL>
+                    <a:lnR w="6350" cap="flat" cmpd="sng" algn="ctr">
+                      <a:solidFill>
+                        <a:srgbClr val="D1D5DB"/>
+                      </a:solidFill>
+                      <a:prstDash val="solid"/>
+                      <a:round/>
+                      <a:headEnd type="none" w="med" len="med"/>
+                      <a:tailEnd type="none" w="med" len="med"/>
+                    </a:lnR>
+                    <a:lnT w="6350" cap="flat" cmpd="sng" algn="ctr">
+                      <a:solidFill>
+                        <a:srgbClr val="D1D5DB"/>
+                      </a:solidFill>
+                      <a:prstDash val="solid"/>
+                      <a:round/>
+                      <a:headEnd type="none" w="med" len="med"/>
+                      <a:tailEnd type="none" w="med" len="med"/>
+                    </a:lnT>
+                    <a:lnB w="6350" cap="flat" cmpd="sng" algn="ctr">
+                      <a:solidFill>
+                        <a:srgbClr val="D1D5DB"/>
+                      </a:solidFill>
+                      <a:prstDash val="solid"/>
+                      <a:round/>
+                      <a:headEnd type="none" w="med" len="med"/>
+                      <a:tailEnd type="none" w="med" len="med"/>
+                    </a:lnB>
+                  </a:tcPr>
+                </a:tc>
+                <a:tc>
+                  <a:txBody>
+                    <a:bodyPr/>
+                    <a:lstStyle/>
+                    <a:p>
+                      <a:pPr algn="l" indent="0" marL="0">
+                        <a:buNone/>
+                      </a:pPr>
+                      <a:r>
+                        <a:rPr lang="en-US" sz="1400" dirty="0">
+                          <a:solidFill>
+                            <a:srgbClr val="000000"/>
+                          </a:solidFill>
+                          <a:latin typeface="Calibri" pitchFamily="34" charset="0"/>
+                          <a:ea typeface="Calibri" pitchFamily="34" charset="-122"/>
+                          <a:cs typeface="Calibri" pitchFamily="34" charset="-120"/>
+                        </a:rPr>
+                        <a:t>Immediately — mid-session</a:t>
+                      </a:r>
+                      <a:endParaRPr lang="en-US" sz="1400" dirty="0">
+                        <a:latin typeface="Calibri" charset="0"/>
+                        <a:ea typeface="Calibri" charset="0"/>
+                        <a:cs typeface="Calibri" charset="0"/>
+                      </a:endParaRPr>
+                    </a:p>
+                  </a:txBody>
+                  <a:tcPr marL="91440" marR="91440" marT="45720" marB="45720">
+                    <a:lnL w="6350" cap="flat" cmpd="sng" algn="ctr">
+                      <a:solidFill>
+                        <a:srgbClr val="D1D5DB"/>
+                      </a:solidFill>
+                      <a:prstDash val="solid"/>
+                      <a:round/>
+                      <a:headEnd type="none" w="med" len="med"/>
+                      <a:tailEnd type="none" w="med" len="med"/>
+                    </a:lnL>
+                    <a:lnR w="6350" cap="flat" cmpd="sng" algn="ctr">
+                      <a:solidFill>
+                        <a:srgbClr val="D1D5DB"/>
+                      </a:solidFill>
+                      <a:prstDash val="solid"/>
+                      <a:round/>
+                      <a:headEnd type="none" w="med" len="med"/>
+                      <a:tailEnd type="none" w="med" len="med"/>
+                    </a:lnR>
+                    <a:lnT w="6350" cap="flat" cmpd="sng" algn="ctr">
+                      <a:solidFill>
+                        <a:srgbClr val="D1D5DB"/>
+                      </a:solidFill>
+                      <a:prstDash val="solid"/>
+                      <a:round/>
+                      <a:headEnd type="none" w="med" len="med"/>
+                      <a:tailEnd type="none" w="med" len="med"/>
+                    </a:lnT>
+                    <a:lnB w="6350" cap="flat" cmpd="sng" algn="ctr">
+                      <a:solidFill>
+                        <a:srgbClr val="D1D5DB"/>
+                      </a:solidFill>
+                      <a:prstDash val="solid"/>
+                      <a:round/>
+                      <a:headEnd type="none" w="med" len="med"/>
+                      <a:tailEnd type="none" w="med" len="med"/>
+                    </a:lnB>
+                  </a:tcPr>
+                </a:tc>
+              </a:tr>
+            </a:tbl>
+          </a:graphicData>
+        </a:graphic>
+      </p:graphicFrame>
+    </p:spTree>
+  </p:cSld>
+  <p:clrMapOvr>
+    <a:masterClrMapping/>
+  </p:clrMapOvr>
+</p:sld>
+</file>
+
 <file path=ppt/slides/slide2.xml><?xml version="1.0" encoding="utf-8"?>
 <p:sld xmlns:a="http://schemas.openxmlformats.org/drawingml/2006/main" xmlns:r="http://schemas.openxmlformats.org/officeDocument/2006/relationships" xmlns:p="http://schemas.openxmlformats.org/presentationml/2006/main">
   <p:cSld name="Slide 2">
@@ -8273,6 +9171,268 @@
                           <a:ea typeface="Calibri" pitchFamily="34" charset="-122"/>
                           <a:cs typeface="Calibri" pitchFamily="34" charset="-120"/>
                         </a:rPr>
+                        <a:t>Learns your preferences</a:t>
+                      </a:r>
+                      <a:endParaRPr lang="en-US" sz="1400" dirty="0">
+                        <a:latin typeface="Calibri" charset="0"/>
+                        <a:ea typeface="Calibri" charset="0"/>
+                        <a:cs typeface="Calibri" charset="0"/>
+                      </a:endParaRPr>
+                    </a:p>
+                  </a:txBody>
+                  <a:tcPr marL="91440" marR="91440" marT="45720" marB="45720">
+                    <a:lnL w="6350" cap="flat" cmpd="sng" algn="ctr">
+                      <a:solidFill>
+                        <a:srgbClr val="D1D5DB"/>
+                      </a:solidFill>
+                      <a:prstDash val="solid"/>
+                      <a:round/>
+                      <a:headEnd type="none" w="med" len="med"/>
+                      <a:tailEnd type="none" w="med" len="med"/>
+                    </a:lnL>
+                    <a:lnR w="6350" cap="flat" cmpd="sng" algn="ctr">
+                      <a:solidFill>
+                        <a:srgbClr val="D1D5DB"/>
+                      </a:solidFill>
+                      <a:prstDash val="solid"/>
+                      <a:round/>
+                      <a:headEnd type="none" w="med" len="med"/>
+                      <a:tailEnd type="none" w="med" len="med"/>
+                    </a:lnR>
+                    <a:lnT w="6350" cap="flat" cmpd="sng" algn="ctr">
+                      <a:solidFill>
+                        <a:srgbClr val="D1D5DB"/>
+                      </a:solidFill>
+                      <a:prstDash val="solid"/>
+                      <a:round/>
+                      <a:headEnd type="none" w="med" len="med"/>
+                      <a:tailEnd type="none" w="med" len="med"/>
+                    </a:lnT>
+                    <a:lnB w="6350" cap="flat" cmpd="sng" algn="ctr">
+                      <a:solidFill>
+                        <a:srgbClr val="D1D5DB"/>
+                      </a:solidFill>
+                      <a:prstDash val="solid"/>
+                      <a:round/>
+                      <a:headEnd type="none" w="med" len="med"/>
+                      <a:tailEnd type="none" w="med" len="med"/>
+                    </a:lnB>
+                  </a:tcPr>
+                </a:tc>
+                <a:tc>
+                  <a:txBody>
+                    <a:bodyPr/>
+                    <a:lstStyle/>
+                    <a:p>
+                      <a:pPr algn="l" indent="0" marL="0">
+                        <a:buNone/>
+                      </a:pPr>
+                      <a:r>
+                        <a:rPr lang="en-US" sz="1400" dirty="0">
+                          <a:solidFill>
+                            <a:srgbClr val="000000"/>
+                          </a:solidFill>
+                          <a:latin typeface="Calibri" pitchFamily="34" charset="0"/>
+                          <a:ea typeface="Calibri" pitchFamily="34" charset="-122"/>
+                          <a:cs typeface="Calibri" pitchFamily="34" charset="-120"/>
+                        </a:rPr>
+                        <a:t>No — resets every session</a:t>
+                      </a:r>
+                      <a:endParaRPr lang="en-US" sz="1400" dirty="0">
+                        <a:latin typeface="Calibri" charset="0"/>
+                        <a:ea typeface="Calibri" charset="0"/>
+                        <a:cs typeface="Calibri" charset="0"/>
+                      </a:endParaRPr>
+                    </a:p>
+                  </a:txBody>
+                  <a:tcPr marL="91440" marR="91440" marT="45720" marB="45720">
+                    <a:lnL w="6350" cap="flat" cmpd="sng" algn="ctr">
+                      <a:solidFill>
+                        <a:srgbClr val="D1D5DB"/>
+                      </a:solidFill>
+                      <a:prstDash val="solid"/>
+                      <a:round/>
+                      <a:headEnd type="none" w="med" len="med"/>
+                      <a:tailEnd type="none" w="med" len="med"/>
+                    </a:lnL>
+                    <a:lnR w="6350" cap="flat" cmpd="sng" algn="ctr">
+                      <a:solidFill>
+                        <a:srgbClr val="D1D5DB"/>
+                      </a:solidFill>
+                      <a:prstDash val="solid"/>
+                      <a:round/>
+                      <a:headEnd type="none" w="med" len="med"/>
+                      <a:tailEnd type="none" w="med" len="med"/>
+                    </a:lnR>
+                    <a:lnT w="6350" cap="flat" cmpd="sng" algn="ctr">
+                      <a:solidFill>
+                        <a:srgbClr val="D1D5DB"/>
+                      </a:solidFill>
+                      <a:prstDash val="solid"/>
+                      <a:round/>
+                      <a:headEnd type="none" w="med" len="med"/>
+                      <a:tailEnd type="none" w="med" len="med"/>
+                    </a:lnT>
+                    <a:lnB w="6350" cap="flat" cmpd="sng" algn="ctr">
+                      <a:solidFill>
+                        <a:srgbClr val="D1D5DB"/>
+                      </a:solidFill>
+                      <a:prstDash val="solid"/>
+                      <a:round/>
+                      <a:headEnd type="none" w="med" len="med"/>
+                      <a:tailEnd type="none" w="med" len="med"/>
+                    </a:lnB>
+                  </a:tcPr>
+                </a:tc>
+                <a:tc>
+                  <a:txBody>
+                    <a:bodyPr/>
+                    <a:lstStyle/>
+                    <a:p>
+                      <a:pPr algn="l" indent="0" marL="0">
+                        <a:buNone/>
+                      </a:pPr>
+                      <a:r>
+                        <a:rPr lang="en-US" sz="1400" dirty="0">
+                          <a:solidFill>
+                            <a:srgbClr val="000000"/>
+                          </a:solidFill>
+                          <a:latin typeface="Calibri" pitchFamily="34" charset="0"/>
+                          <a:ea typeface="Calibri" pitchFamily="34" charset="-122"/>
+                          <a:cs typeface="Calibri" pitchFamily="34" charset="-120"/>
+                        </a:rPr>
+                        <a:t>No</a:t>
+                      </a:r>
+                      <a:endParaRPr lang="en-US" sz="1400" dirty="0">
+                        <a:latin typeface="Calibri" charset="0"/>
+                        <a:ea typeface="Calibri" charset="0"/>
+                        <a:cs typeface="Calibri" charset="0"/>
+                      </a:endParaRPr>
+                    </a:p>
+                  </a:txBody>
+                  <a:tcPr marL="91440" marR="91440" marT="45720" marB="45720">
+                    <a:lnL w="6350" cap="flat" cmpd="sng" algn="ctr">
+                      <a:solidFill>
+                        <a:srgbClr val="D1D5DB"/>
+                      </a:solidFill>
+                      <a:prstDash val="solid"/>
+                      <a:round/>
+                      <a:headEnd type="none" w="med" len="med"/>
+                      <a:tailEnd type="none" w="med" len="med"/>
+                    </a:lnL>
+                    <a:lnR w="6350" cap="flat" cmpd="sng" algn="ctr">
+                      <a:solidFill>
+                        <a:srgbClr val="D1D5DB"/>
+                      </a:solidFill>
+                      <a:prstDash val="solid"/>
+                      <a:round/>
+                      <a:headEnd type="none" w="med" len="med"/>
+                      <a:tailEnd type="none" w="med" len="med"/>
+                    </a:lnR>
+                    <a:lnT w="6350" cap="flat" cmpd="sng" algn="ctr">
+                      <a:solidFill>
+                        <a:srgbClr val="D1D5DB"/>
+                      </a:solidFill>
+                      <a:prstDash val="solid"/>
+                      <a:round/>
+                      <a:headEnd type="none" w="med" len="med"/>
+                      <a:tailEnd type="none" w="med" len="med"/>
+                    </a:lnT>
+                    <a:lnB w="6350" cap="flat" cmpd="sng" algn="ctr">
+                      <a:solidFill>
+                        <a:srgbClr val="D1D5DB"/>
+                      </a:solidFill>
+                      <a:prstDash val="solid"/>
+                      <a:round/>
+                      <a:headEnd type="none" w="med" len="med"/>
+                      <a:tailEnd type="none" w="med" len="med"/>
+                    </a:lnB>
+                  </a:tcPr>
+                </a:tc>
+                <a:tc>
+                  <a:txBody>
+                    <a:bodyPr/>
+                    <a:lstStyle/>
+                    <a:p>
+                      <a:pPr algn="l" indent="0" marL="0">
+                        <a:buNone/>
+                      </a:pPr>
+                      <a:r>
+                        <a:rPr lang="en-US" sz="1400" dirty="0">
+                          <a:solidFill>
+                            <a:srgbClr val="000000"/>
+                          </a:solidFill>
+                          <a:latin typeface="Calibri" pitchFamily="34" charset="0"/>
+                          <a:ea typeface="Calibri" pitchFamily="34" charset="-122"/>
+                          <a:cs typeface="Calibri" pitchFamily="34" charset="-120"/>
+                        </a:rPr>
+                        <a:t>Remembers preferences &amp; past mistakes</a:t>
+                      </a:r>
+                      <a:endParaRPr lang="en-US" sz="1400" dirty="0">
+                        <a:latin typeface="Calibri" charset="0"/>
+                        <a:ea typeface="Calibri" charset="0"/>
+                        <a:cs typeface="Calibri" charset="0"/>
+                      </a:endParaRPr>
+                    </a:p>
+                  </a:txBody>
+                  <a:tcPr marL="91440" marR="91440" marT="45720" marB="45720">
+                    <a:lnL w="6350" cap="flat" cmpd="sng" algn="ctr">
+                      <a:solidFill>
+                        <a:srgbClr val="D1D5DB"/>
+                      </a:solidFill>
+                      <a:prstDash val="solid"/>
+                      <a:round/>
+                      <a:headEnd type="none" w="med" len="med"/>
+                      <a:tailEnd type="none" w="med" len="med"/>
+                    </a:lnL>
+                    <a:lnR w="6350" cap="flat" cmpd="sng" algn="ctr">
+                      <a:solidFill>
+                        <a:srgbClr val="D1D5DB"/>
+                      </a:solidFill>
+                      <a:prstDash val="solid"/>
+                      <a:round/>
+                      <a:headEnd type="none" w="med" len="med"/>
+                      <a:tailEnd type="none" w="med" len="med"/>
+                    </a:lnR>
+                    <a:lnT w="6350" cap="flat" cmpd="sng" algn="ctr">
+                      <a:solidFill>
+                        <a:srgbClr val="D1D5DB"/>
+                      </a:solidFill>
+                      <a:prstDash val="solid"/>
+                      <a:round/>
+                      <a:headEnd type="none" w="med" len="med"/>
+                      <a:tailEnd type="none" w="med" len="med"/>
+                    </a:lnT>
+                    <a:lnB w="6350" cap="flat" cmpd="sng" algn="ctr">
+                      <a:solidFill>
+                        <a:srgbClr val="D1D5DB"/>
+                      </a:solidFill>
+                      <a:prstDash val="solid"/>
+                      <a:round/>
+                      <a:headEnd type="none" w="med" len="med"/>
+                      <a:tailEnd type="none" w="med" len="med"/>
+                    </a:lnB>
+                  </a:tcPr>
+                </a:tc>
+              </a:tr>
+              <a:tr h="0">
+                <a:tc>
+                  <a:txBody>
+                    <a:bodyPr/>
+                    <a:lstStyle/>
+                    <a:p>
+                      <a:pPr algn="l" indent="0" marL="0">
+                        <a:buNone/>
+                      </a:pPr>
+                      <a:r>
+                        <a:rPr lang="en-US" sz="1400" dirty="0">
+                          <a:solidFill>
+                            <a:srgbClr val="000000"/>
+                          </a:solidFill>
+                          <a:latin typeface="Calibri" pitchFamily="34" charset="0"/>
+                          <a:ea typeface="Calibri" pitchFamily="34" charset="-122"/>
+                          <a:cs typeface="Calibri" pitchFamily="34" charset="-120"/>
+                        </a:rPr>
                         <a:t>Cost to run</a:t>
                       </a:r>
                       <a:endParaRPr lang="en-US" sz="1400" dirty="0">
@@ -8319,6 +9479,9 @@
                       <a:headEnd type="none" w="med" len="med"/>
                       <a:tailEnd type="none" w="med" len="med"/>
                     </a:lnB>
+                    <a:solidFill>
+                      <a:srgbClr val="F3F4F6"/>
+                    </a:solidFill>
                   </a:tcPr>
                 </a:tc>
                 <a:tc>
@@ -8384,6 +9547,9 @@
                       <a:headEnd type="none" w="med" len="med"/>
                       <a:tailEnd type="none" w="med" len="med"/>
                     </a:lnB>
+                    <a:solidFill>
+                      <a:srgbClr val="F3F4F6"/>
+                    </a:solidFill>
                   </a:tcPr>
                 </a:tc>
                 <a:tc>
@@ -8449,6 +9615,9 @@
                       <a:headEnd type="none" w="med" len="med"/>
                       <a:tailEnd type="none" w="med" len="med"/>
                     </a:lnB>
+                    <a:solidFill>
+                      <a:srgbClr val="F3F4F6"/>
+                    </a:solidFill>
                   </a:tcPr>
                 </a:tc>
                 <a:tc>
@@ -8514,6 +9683,9 @@
                       <a:headEnd type="none" w="med" len="med"/>
                       <a:tailEnd type="none" w="med" len="med"/>
                     </a:lnB>
+                    <a:solidFill>
+                      <a:srgbClr val="F3F4F6"/>
+                    </a:solidFill>
                   </a:tcPr>
                 </a:tc>
               </a:tr>

--- a/docs/assets/Wrexlyn-Pitch-Deck.pptx
+++ b/docs/assets/Wrexlyn-Pitch-Deck.pptx
@@ -12,6 +12,7 @@
     <p:sldId id="260" r:id="rId6"/>
     <p:sldId id="261" r:id="rId7"/>
     <p:sldId id="262" r:id="rId8"/>
+    <p:sldId id="271" r:id="rId22"/>
     <p:sldId id="263" r:id="rId9"/>
     <p:sldId id="264" r:id="rId10"/>
     <p:sldId id="270" r:id="rId21"/>
@@ -6646,6 +6647,304 @@
 </p:sld>
 </file>
 
+<file path=ppt/slides/slide16.xml><?xml version="1.0" encoding="utf-8"?>
+<p:sld xmlns:a="http://schemas.openxmlformats.org/drawingml/2006/main" xmlns:r="http://schemas.openxmlformats.org/officeDocument/2006/relationships" xmlns:p="http://schemas.openxmlformats.org/presentationml/2006/main">
+  <p:cSld name="Slide NCP">
+    <p:bg>
+      <p:bgPr>
+        <a:solidFill>
+          <a:srgbClr val="FFFFFF"/>
+        </a:solidFill>
+      </p:bgPr>
+    </p:bg>
+    <p:spTree>
+      <p:nvGrpSpPr>
+        <p:cNvPr id="1" name=""/>
+        <p:cNvGrpSpPr/>
+        <p:nvPr/>
+      </p:nvGrpSpPr>
+      <p:grpSpPr>
+        <a:xfrm>
+          <a:off x="0" y="0"/>
+          <a:ext cx="0" cy="0"/>
+          <a:chOff x="0" y="0"/>
+          <a:chExt cx="0" cy="0"/>
+        </a:xfrm>
+      </p:grpSpPr>
+      <p:sp>
+        <p:nvSpPr>
+          <p:cNvPr id="2" name="Text 0"/>
+          <p:cNvSpPr/>
+          <p:nvPr/>
+        </p:nvSpPr>
+        <p:spPr>
+          <a:xfrm>
+            <a:off x="457200" y="320040"/>
+            <a:ext cx="8229600" cy="822960"/>
+          </a:xfrm>
+          <a:prstGeom prst="rect">
+            <a:avLst/>
+          </a:prstGeom>
+          <a:noFill/>
+          <a:ln/>
+        </p:spPr>
+        <p:txBody>
+          <a:bodyPr wrap="square" rtlCol="0" anchor="ctr"/>
+          <a:lstStyle/>
+          <a:p>
+            <a:pPr indent="0" marL="0">
+              <a:buNone/>
+            </a:pPr>
+            <a:r>
+              <a:rPr lang="en-US" sz="3600" b="1" dirty="0">
+                <a:solidFill>
+                  <a:srgbClr val="1F2937"/>
+                </a:solidFill>
+                <a:latin typeface="Calibri" pitchFamily="34" charset="0"/>
+                <a:ea typeface="Calibri" pitchFamily="34" charset="-122"/>
+                <a:cs typeface="Calibri" pitchFamily="34" charset="-120"/>
+              </a:rPr>
+              <a:t>The Nishant Convergence Protocol</a:t>
+            </a:r>
+            <a:endParaRPr lang="en-US" sz="3600" dirty="0"/>
+          </a:p>
+        </p:txBody>
+      </p:sp>
+      <p:sp>
+        <p:nvSpPr>
+          <p:cNvPr id="0" name="Text col"/>
+          <p:cNvSpPr/>
+          <p:nvPr/>
+        </p:nvSpPr>
+        <p:spPr>
+          <a:xfrm>
+            <a:off x="457200" y="1417320"/>
+            <a:ext cx="3931920" cy="3200000"/>
+          </a:xfrm>
+          <a:prstGeom prst="rect">
+            <a:avLst/>
+          </a:prstGeom>
+          <a:noFill/>
+          <a:ln/>
+        </p:spPr>
+        <p:txBody>
+          <a:bodyPr wrap="square" rtlCol="0" anchor="t"/>
+          <a:lstStyle/>
+          <a:p>
+            <a:pPr marL="342900" indent="-342900">
+              <a:buSzPct val="100000"/>
+              <a:buChar char="•"/>
+            </a:pPr>
+            <a:r>
+              <a:rPr lang="en-US" sz="1600" b="1" dirty="0">
+                <a:solidFill>
+                  <a:srgbClr val="374151"/>
+                </a:solidFill>
+                <a:latin typeface="Calibri" pitchFamily="34" charset="0"/>
+                <a:ea typeface="Calibri" pitchFamily="34" charset="-122"/>
+                <a:cs typeface="Calibri" pitchFamily="34" charset="-120"/>
+              </a:rPr>
+              <a:t>1. Divergent diagnosis</a:t>
+            </a:r>
+            <a:endParaRPr lang="en-US" sz="1600" dirty="0"/>
+          </a:p>
+          <a:p>
+            <a:pPr marL="342900" indent="-342900">
+              <a:buSzPct val="100000"/>
+              <a:buChar char="•"/>
+            </a:pPr>
+            <a:r>
+              <a:rPr lang="en-US" sz="1600" dirty="0">
+                <a:solidFill>
+                  <a:srgbClr val="374151"/>
+                </a:solidFill>
+                <a:latin typeface="Calibri" pitchFamily="34" charset="0"/>
+                <a:ea typeface="Calibri" pitchFamily="34" charset="-122"/>
+                <a:cs typeface="Calibri" pitchFamily="34" charset="-120"/>
+              </a:rPr>
+              <a:t> — once a plain repair attempt has failed, two independently-framed root-cause diagnoses run in parallel</a:t>
+            </a:r>
+            <a:endParaRPr lang="en-US" sz="1600" dirty="0"/>
+          </a:p>
+          <a:p>
+            <a:pPr marL="342900" indent="-342900">
+              <a:buSzPct val="100000"/>
+              <a:buChar char="•"/>
+            </a:pPr>
+            <a:r>
+              <a:rPr lang="en-US" sz="1600" b="1" dirty="0">
+                <a:solidFill>
+                  <a:srgbClr val="374151"/>
+                </a:solidFill>
+                <a:latin typeface="Calibri" pitchFamily="34" charset="0"/>
+                <a:ea typeface="Calibri" pitchFamily="34" charset="-122"/>
+                <a:cs typeface="Calibri" pitchFamily="34" charset="-120"/>
+              </a:rPr>
+              <a:t>2. Pairwise adjudication</a:t>
+            </a:r>
+            <a:endParaRPr lang="en-US" sz="1600" dirty="0"/>
+          </a:p>
+          <a:p>
+            <a:pPr marL="342900" indent="-342900">
+              <a:buSzPct val="100000"/>
+              <a:buChar char="•"/>
+            </a:pPr>
+            <a:r>
+              <a:rPr lang="en-US" sz="1600" dirty="0">
+                <a:solidFill>
+                  <a:srgbClr val="374151"/>
+                </a:solidFill>
+                <a:latin typeface="Calibri" pitchFamily="34" charset="0"/>
+                <a:ea typeface="Calibri" pitchFamily="34" charset="-122"/>
+                <a:cs typeface="Calibri" pitchFamily="34" charset="-120"/>
+              </a:rPr>
+              <a:t> — a dedicated call judges the two against each other, not in isolation — more reliable than either self-scoring</a:t>
+            </a:r>
+            <a:endParaRPr lang="en-US" sz="1600" dirty="0"/>
+          </a:p>
+        </p:txBody>
+      </p:sp>
+      <p:sp>
+        <p:nvSpPr>
+          <p:cNvPr id="0" name="Text col"/>
+          <p:cNvSpPr/>
+          <p:nvPr/>
+        </p:nvSpPr>
+        <p:spPr>
+          <a:xfrm>
+            <a:off x="4754880" y="1417320"/>
+            <a:ext cx="3931920" cy="3200000"/>
+          </a:xfrm>
+          <a:prstGeom prst="rect">
+            <a:avLst/>
+          </a:prstGeom>
+          <a:noFill/>
+          <a:ln/>
+        </p:spPr>
+        <p:txBody>
+          <a:bodyPr wrap="square" rtlCol="0" anchor="t"/>
+          <a:lstStyle/>
+          <a:p>
+            <a:pPr marL="342900" indent="-342900">
+              <a:buSzPct val="100000"/>
+              <a:buChar char="•"/>
+            </a:pPr>
+            <a:r>
+              <a:rPr lang="en-US" sz="1600" b="1" dirty="0">
+                <a:solidFill>
+                  <a:srgbClr val="374151"/>
+                </a:solidFill>
+                <a:latin typeface="Calibri" pitchFamily="34" charset="0"/>
+                <a:ea typeface="Calibri" pitchFamily="34" charset="-122"/>
+                <a:cs typeface="Calibri" pitchFamily="34" charset="-120"/>
+              </a:rPr>
+              <a:t>3. Lesson-steered</a:t>
+            </a:r>
+            <a:endParaRPr lang="en-US" sz="1600" dirty="0"/>
+          </a:p>
+          <a:p>
+            <a:pPr marL="342900" indent="-342900">
+              <a:buSzPct val="100000"/>
+              <a:buChar char="•"/>
+            </a:pPr>
+            <a:r>
+              <a:rPr lang="en-US" sz="1600" dirty="0">
+                <a:solidFill>
+                  <a:srgbClr val="374151"/>
+                </a:solidFill>
+                <a:latin typeface="Calibri" pitchFamily="34" charset="0"/>
+                <a:ea typeface="Calibri" pitchFamily="34" charset="-122"/>
+                <a:cs typeface="Calibri" pitchFamily="34" charset="-120"/>
+              </a:rPr>
+              <a:t> — the project's learned lessons are ranked by relevance and foregrounded in both diagnoses</a:t>
+            </a:r>
+            <a:endParaRPr lang="en-US" sz="1600" dirty="0"/>
+          </a:p>
+          <a:p>
+            <a:pPr marL="342900" indent="-342900">
+              <a:buSzPct val="100000"/>
+              <a:buChar char="•"/>
+            </a:pPr>
+            <a:r>
+              <a:rPr lang="en-US" sz="1600" b="1" dirty="0">
+                <a:solidFill>
+                  <a:srgbClr val="374151"/>
+                </a:solidFill>
+                <a:latin typeface="Calibri" pitchFamily="34" charset="0"/>
+                <a:ea typeface="Calibri" pitchFamily="34" charset="-122"/>
+                <a:cs typeface="Calibri" pitchFamily="34" charset="-120"/>
+              </a:rPr>
+              <a:t>4. Formalized score</a:t>
+            </a:r>
+            <a:endParaRPr lang="en-US" sz="1600" dirty="0"/>
+          </a:p>
+          <a:p>
+            <a:pPr marL="342900" indent="-342900">
+              <a:buSzPct val="100000"/>
+              <a:buChar char="•"/>
+            </a:pPr>
+            <a:r>
+              <a:rPr lang="en-US" sz="1600" dirty="0">
+                <a:solidFill>
+                  <a:srgbClr val="374151"/>
+                </a:solidFill>
+                <a:latin typeface="Calibri" pitchFamily="34" charset="0"/>
+                <a:ea typeface="Calibri" pitchFamily="34" charset="-122"/>
+                <a:cs typeface="Calibri" pitchFamily="34" charset="-120"/>
+              </a:rPr>
+              <a:t> — repair rounds, adjudication margin, and lesson recurrence combine into one reproducible confidence number</a:t>
+            </a:r>
+            <a:endParaRPr lang="en-US" sz="1600" dirty="0"/>
+          </a:p>
+        </p:txBody>
+      </p:sp>
+      <p:sp>
+        <p:nvSpPr>
+          <p:cNvPr id="5" name="Text 3"/>
+          <p:cNvSpPr/>
+          <p:nvPr/>
+        </p:nvSpPr>
+        <p:spPr>
+          <a:xfrm>
+            <a:off x="457200" y="4754880"/>
+            <a:ext cx="8229600" cy="365760"/>
+          </a:xfrm>
+          <a:prstGeom prst="rect">
+            <a:avLst/>
+          </a:prstGeom>
+          <a:noFill/>
+          <a:ln/>
+        </p:spPr>
+        <p:txBody>
+          <a:bodyPr wrap="square" rtlCol="0" anchor="ctr"/>
+          <a:lstStyle/>
+          <a:p>
+            <a:pPr algn="ctr" indent="0" marL="0">
+              <a:buNone/>
+            </a:pPr>
+            <a:r>
+              <a:rPr lang="en-US" sz="1300" i="1" dirty="0">
+                <a:solidFill>
+                  <a:srgbClr val="6B7280"/>
+                </a:solidFill>
+                <a:latin typeface="Calibri" pitchFamily="34" charset="0"/>
+                <a:ea typeface="Calibri" pitchFamily="34" charset="-122"/>
+                <a:cs typeface="Calibri" pitchFamily="34" charset="-120"/>
+              </a:rPr>
+              <a:t>Honest scope: closes the reliability gap on checkable tasks — not a raw-capability claim.</a:t>
+            </a:r>
+            <a:endParaRPr lang="en-US" sz="1300" dirty="0"/>
+          </a:p>
+        </p:txBody>
+      </p:sp>
+    </p:spTree>
+  </p:cSld>
+  <p:clrMapOvr>
+    <a:masterClrMapping/>
+  </p:clrMapOvr>
+</p:sld>
+</file>
+
 <file path=ppt/slides/slide2.xml><?xml version="1.0" encoding="utf-8"?>
 <p:sld xmlns:a="http://schemas.openxmlformats.org/drawingml/2006/main" xmlns:r="http://schemas.openxmlformats.org/officeDocument/2006/relationships" xmlns:p="http://schemas.openxmlformats.org/presentationml/2006/main">
   <p:cSld name="Slide 2">
@@ -9433,6 +9732,280 @@
                           <a:ea typeface="Calibri" pitchFamily="34" charset="-122"/>
                           <a:cs typeface="Calibri" pitchFamily="34" charset="-120"/>
                         </a:rPr>
+                        <a:t>When a fix fails once</a:t>
+                      </a:r>
+                      <a:endParaRPr lang="en-US" sz="1400" dirty="0">
+                        <a:latin typeface="Calibri" charset="0"/>
+                        <a:ea typeface="Calibri" charset="0"/>
+                        <a:cs typeface="Calibri" charset="0"/>
+                      </a:endParaRPr>
+                    </a:p>
+                  </a:txBody>
+                  <a:tcPr marL="91440" marR="91440" marT="45720" marB="45720">
+                    <a:lnL w="6350" cap="flat" cmpd="sng" algn="ctr">
+                      <a:solidFill>
+                        <a:srgbClr val="D1D5DB"/>
+                      </a:solidFill>
+                      <a:prstDash val="solid"/>
+                      <a:round/>
+                      <a:headEnd type="none" w="med" len="med"/>
+                      <a:tailEnd type="none" w="med" len="med"/>
+                    </a:lnL>
+                    <a:lnR w="6350" cap="flat" cmpd="sng" algn="ctr">
+                      <a:solidFill>
+                        <a:srgbClr val="D1D5DB"/>
+                      </a:solidFill>
+                      <a:prstDash val="solid"/>
+                      <a:round/>
+                      <a:headEnd type="none" w="med" len="med"/>
+                      <a:tailEnd type="none" w="med" len="med"/>
+                    </a:lnR>
+                    <a:lnT w="6350" cap="flat" cmpd="sng" algn="ctr">
+                      <a:solidFill>
+                        <a:srgbClr val="D1D5DB"/>
+                      </a:solidFill>
+                      <a:prstDash val="solid"/>
+                      <a:round/>
+                      <a:headEnd type="none" w="med" len="med"/>
+                      <a:tailEnd type="none" w="med" len="med"/>
+                    </a:lnT>
+                    <a:lnB w="6350" cap="flat" cmpd="sng" algn="ctr">
+                      <a:solidFill>
+                        <a:srgbClr val="D1D5DB"/>
+                      </a:solidFill>
+                      <a:prstDash val="solid"/>
+                      <a:round/>
+                      <a:headEnd type="none" w="med" len="med"/>
+                      <a:tailEnd type="none" w="med" len="med"/>
+                    </a:lnB>
+                    <a:solidFill>
+                      <a:srgbClr val="F3F4F6"/>
+                    </a:solidFill>
+                  </a:tcPr>
+                </a:tc>
+                <a:tc>
+                  <a:txBody>
+                    <a:bodyPr/>
+                    <a:lstStyle/>
+                    <a:p>
+                      <a:pPr algn="l" indent="0" marL="0">
+                        <a:buNone/>
+                      </a:pPr>
+                      <a:r>
+                        <a:rPr lang="en-US" sz="1400" dirty="0">
+                          <a:solidFill>
+                            <a:srgbClr val="000000"/>
+                          </a:solidFill>
+                          <a:latin typeface="Calibri" pitchFamily="34" charset="0"/>
+                          <a:ea typeface="Calibri" pitchFamily="34" charset="-122"/>
+                          <a:cs typeface="Calibri" pitchFamily="34" charset="-120"/>
+                        </a:rPr>
+                        <a:t>Blind retry</a:t>
+                      </a:r>
+                      <a:endParaRPr lang="en-US" sz="1400" dirty="0">
+                        <a:latin typeface="Calibri" charset="0"/>
+                        <a:ea typeface="Calibri" charset="0"/>
+                        <a:cs typeface="Calibri" charset="0"/>
+                      </a:endParaRPr>
+                    </a:p>
+                  </a:txBody>
+                  <a:tcPr marL="91440" marR="91440" marT="45720" marB="45720">
+                    <a:lnL w="6350" cap="flat" cmpd="sng" algn="ctr">
+                      <a:solidFill>
+                        <a:srgbClr val="D1D5DB"/>
+                      </a:solidFill>
+                      <a:prstDash val="solid"/>
+                      <a:round/>
+                      <a:headEnd type="none" w="med" len="med"/>
+                      <a:tailEnd type="none" w="med" len="med"/>
+                    </a:lnL>
+                    <a:lnR w="6350" cap="flat" cmpd="sng" algn="ctr">
+                      <a:solidFill>
+                        <a:srgbClr val="D1D5DB"/>
+                      </a:solidFill>
+                      <a:prstDash val="solid"/>
+                      <a:round/>
+                      <a:headEnd type="none" w="med" len="med"/>
+                      <a:tailEnd type="none" w="med" len="med"/>
+                    </a:lnR>
+                    <a:lnT w="6350" cap="flat" cmpd="sng" algn="ctr">
+                      <a:solidFill>
+                        <a:srgbClr val="D1D5DB"/>
+                      </a:solidFill>
+                      <a:prstDash val="solid"/>
+                      <a:round/>
+                      <a:headEnd type="none" w="med" len="med"/>
+                      <a:tailEnd type="none" w="med" len="med"/>
+                    </a:lnT>
+                    <a:lnB w="6350" cap="flat" cmpd="sng" algn="ctr">
+                      <a:solidFill>
+                        <a:srgbClr val="D1D5DB"/>
+                      </a:solidFill>
+                      <a:prstDash val="solid"/>
+                      <a:round/>
+                      <a:headEnd type="none" w="med" len="med"/>
+                      <a:tailEnd type="none" w="med" len="med"/>
+                    </a:lnB>
+                    <a:solidFill>
+                      <a:srgbClr val="F3F4F6"/>
+                    </a:solidFill>
+                  </a:tcPr>
+                </a:tc>
+                <a:tc>
+                  <a:txBody>
+                    <a:bodyPr/>
+                    <a:lstStyle/>
+                    <a:p>
+                      <a:pPr algn="l" indent="0" marL="0">
+                        <a:buNone/>
+                      </a:pPr>
+                      <a:r>
+                        <a:rPr lang="en-US" sz="1400" dirty="0">
+                          <a:solidFill>
+                            <a:srgbClr val="000000"/>
+                          </a:solidFill>
+                          <a:latin typeface="Calibri" pitchFamily="34" charset="0"/>
+                          <a:ea typeface="Calibri" pitchFamily="34" charset="-122"/>
+                          <a:cs typeface="Calibri" pitchFamily="34" charset="-120"/>
+                        </a:rPr>
+                        <a:t>Blind retry</a:t>
+                      </a:r>
+                      <a:endParaRPr lang="en-US" sz="1400" dirty="0">
+                        <a:latin typeface="Calibri" charset="0"/>
+                        <a:ea typeface="Calibri" charset="0"/>
+                        <a:cs typeface="Calibri" charset="0"/>
+                      </a:endParaRPr>
+                    </a:p>
+                  </a:txBody>
+                  <a:tcPr marL="91440" marR="91440" marT="45720" marB="45720">
+                    <a:lnL w="6350" cap="flat" cmpd="sng" algn="ctr">
+                      <a:solidFill>
+                        <a:srgbClr val="D1D5DB"/>
+                      </a:solidFill>
+                      <a:prstDash val="solid"/>
+                      <a:round/>
+                      <a:headEnd type="none" w="med" len="med"/>
+                      <a:tailEnd type="none" w="med" len="med"/>
+                    </a:lnL>
+                    <a:lnR w="6350" cap="flat" cmpd="sng" algn="ctr">
+                      <a:solidFill>
+                        <a:srgbClr val="D1D5DB"/>
+                      </a:solidFill>
+                      <a:prstDash val="solid"/>
+                      <a:round/>
+                      <a:headEnd type="none" w="med" len="med"/>
+                      <a:tailEnd type="none" w="med" len="med"/>
+                    </a:lnR>
+                    <a:lnT w="6350" cap="flat" cmpd="sng" algn="ctr">
+                      <a:solidFill>
+                        <a:srgbClr val="D1D5DB"/>
+                      </a:solidFill>
+                      <a:prstDash val="solid"/>
+                      <a:round/>
+                      <a:headEnd type="none" w="med" len="med"/>
+                      <a:tailEnd type="none" w="med" len="med"/>
+                    </a:lnT>
+                    <a:lnB w="6350" cap="flat" cmpd="sng" algn="ctr">
+                      <a:solidFill>
+                        <a:srgbClr val="D1D5DB"/>
+                      </a:solidFill>
+                      <a:prstDash val="solid"/>
+                      <a:round/>
+                      <a:headEnd type="none" w="med" len="med"/>
+                      <a:tailEnd type="none" w="med" len="med"/>
+                    </a:lnB>
+                    <a:solidFill>
+                      <a:srgbClr val="F3F4F6"/>
+                    </a:solidFill>
+                  </a:tcPr>
+                </a:tc>
+                <a:tc>
+                  <a:txBody>
+                    <a:bodyPr/>
+                    <a:lstStyle/>
+                    <a:p>
+                      <a:pPr algn="l" indent="0" marL="0">
+                        <a:buNone/>
+                      </a:pPr>
+                      <a:r>
+                        <a:rPr lang="en-US" sz="1400" dirty="0">
+                          <a:solidFill>
+                            <a:srgbClr val="000000"/>
+                          </a:solidFill>
+                          <a:latin typeface="Calibri" pitchFamily="34" charset="0"/>
+                          <a:ea typeface="Calibri" pitchFamily="34" charset="-122"/>
+                          <a:cs typeface="Calibri" pitchFamily="34" charset="-120"/>
+                        </a:rPr>
+                        <a:t>Adjudicated dual diagnosis (NCP)</a:t>
+                      </a:r>
+                      <a:endParaRPr lang="en-US" sz="1400" dirty="0">
+                        <a:latin typeface="Calibri" charset="0"/>
+                        <a:ea typeface="Calibri" charset="0"/>
+                        <a:cs typeface="Calibri" charset="0"/>
+                      </a:endParaRPr>
+                    </a:p>
+                  </a:txBody>
+                  <a:tcPr marL="91440" marR="91440" marT="45720" marB="45720">
+                    <a:lnL w="6350" cap="flat" cmpd="sng" algn="ctr">
+                      <a:solidFill>
+                        <a:srgbClr val="D1D5DB"/>
+                      </a:solidFill>
+                      <a:prstDash val="solid"/>
+                      <a:round/>
+                      <a:headEnd type="none" w="med" len="med"/>
+                      <a:tailEnd type="none" w="med" len="med"/>
+                    </a:lnL>
+                    <a:lnR w="6350" cap="flat" cmpd="sng" algn="ctr">
+                      <a:solidFill>
+                        <a:srgbClr val="D1D5DB"/>
+                      </a:solidFill>
+                      <a:prstDash val="solid"/>
+                      <a:round/>
+                      <a:headEnd type="none" w="med" len="med"/>
+                      <a:tailEnd type="none" w="med" len="med"/>
+                    </a:lnR>
+                    <a:lnT w="6350" cap="flat" cmpd="sng" algn="ctr">
+                      <a:solidFill>
+                        <a:srgbClr val="D1D5DB"/>
+                      </a:solidFill>
+                      <a:prstDash val="solid"/>
+                      <a:round/>
+                      <a:headEnd type="none" w="med" len="med"/>
+                      <a:tailEnd type="none" w="med" len="med"/>
+                    </a:lnT>
+                    <a:lnB w="6350" cap="flat" cmpd="sng" algn="ctr">
+                      <a:solidFill>
+                        <a:srgbClr val="D1D5DB"/>
+                      </a:solidFill>
+                      <a:prstDash val="solid"/>
+                      <a:round/>
+                      <a:headEnd type="none" w="med" len="med"/>
+                      <a:tailEnd type="none" w="med" len="med"/>
+                    </a:lnB>
+                    <a:solidFill>
+                      <a:srgbClr val="F3F4F6"/>
+                    </a:solidFill>
+                  </a:tcPr>
+                </a:tc>
+              </a:tr>
+              <a:tr h="0">
+                <a:tc>
+                  <a:txBody>
+                    <a:bodyPr/>
+                    <a:lstStyle/>
+                    <a:p>
+                      <a:pPr algn="l" indent="0" marL="0">
+                        <a:buNone/>
+                      </a:pPr>
+                      <a:r>
+                        <a:rPr lang="en-US" sz="1400" dirty="0">
+                          <a:solidFill>
+                            <a:srgbClr val="000000"/>
+                          </a:solidFill>
+                          <a:latin typeface="Calibri" pitchFamily="34" charset="0"/>
+                          <a:ea typeface="Calibri" pitchFamily="34" charset="-122"/>
+                          <a:cs typeface="Calibri" pitchFamily="34" charset="-120"/>
+                        </a:rPr>
                         <a:t>Cost to run</a:t>
                       </a:r>
                       <a:endParaRPr lang="en-US" sz="1400" dirty="0">
@@ -9479,9 +10052,6 @@
                       <a:headEnd type="none" w="med" len="med"/>
                       <a:tailEnd type="none" w="med" len="med"/>
                     </a:lnB>
-                    <a:solidFill>
-                      <a:srgbClr val="F3F4F6"/>
-                    </a:solidFill>
                   </a:tcPr>
                 </a:tc>
                 <a:tc>
@@ -9547,9 +10117,6 @@
                       <a:headEnd type="none" w="med" len="med"/>
                       <a:tailEnd type="none" w="med" len="med"/>
                     </a:lnB>
-                    <a:solidFill>
-                      <a:srgbClr val="F3F4F6"/>
-                    </a:solidFill>
                   </a:tcPr>
                 </a:tc>
                 <a:tc>
@@ -9615,9 +10182,6 @@
                       <a:headEnd type="none" w="med" len="med"/>
                       <a:tailEnd type="none" w="med" len="med"/>
                     </a:lnB>
-                    <a:solidFill>
-                      <a:srgbClr val="F3F4F6"/>
-                    </a:solidFill>
                   </a:tcPr>
                 </a:tc>
                 <a:tc>
@@ -9683,9 +10247,6 @@
                       <a:headEnd type="none" w="med" len="med"/>
                       <a:tailEnd type="none" w="med" len="med"/>
                     </a:lnB>
-                    <a:solidFill>
-                      <a:srgbClr val="F3F4F6"/>
-                    </a:solidFill>
                   </a:tcPr>
                 </a:tc>
               </a:tr>

--- a/docs/assets/Wrexlyn-Pitch-Deck.pptx
+++ b/docs/assets/Wrexlyn-Pitch-Deck.pptx
@@ -8,6 +8,7 @@
     <p:sldId id="256" r:id="rId2"/>
     <p:sldId id="257" r:id="rId3"/>
     <p:sldId id="258" r:id="rId4"/>
+    <p:sldId id="272" r:id="rId23"/>
     <p:sldId id="259" r:id="rId5"/>
     <p:sldId id="260" r:id="rId6"/>
     <p:sldId id="261" r:id="rId7"/>
@@ -6945,6 +6946,1488 @@
 </p:sld>
 </file>
 
+<file path=ppt/slides/slide17.xml><?xml version="1.0" encoding="utf-8"?>
+<p:sld xmlns:a="http://schemas.openxmlformats.org/drawingml/2006/main" xmlns:r="http://schemas.openxmlformats.org/officeDocument/2006/relationships" xmlns:p="http://schemas.openxmlformats.org/presentationml/2006/main">
+  <p:cSld name="Slide Landscape">
+    <p:bg>
+      <p:bgPr>
+        <a:solidFill>
+          <a:srgbClr val="FFFFFF"/>
+        </a:solidFill>
+      </p:bgPr>
+    </p:bg>
+    <p:spTree>
+      <p:nvGrpSpPr>
+        <p:cNvPr id="1" name=""/>
+        <p:cNvGrpSpPr/>
+        <p:nvPr/>
+      </p:nvGrpSpPr>
+      <p:grpSpPr>
+        <a:xfrm>
+          <a:off x="0" y="0"/>
+          <a:ext cx="0" cy="0"/>
+          <a:chOff x="0" y="0"/>
+          <a:chExt cx="0" cy="0"/>
+        </a:xfrm>
+      </p:grpSpPr>
+      <p:sp>
+        <p:nvSpPr>
+          <p:cNvPr id="2" name="Text 0"/>
+          <p:cNvSpPr/>
+          <p:nvPr/>
+        </p:nvSpPr>
+        <p:spPr>
+          <a:xfrm>
+            <a:off x="457200" y="320040"/>
+            <a:ext cx="8229600" cy="822960"/>
+          </a:xfrm>
+          <a:prstGeom prst="rect">
+            <a:avLst/>
+          </a:prstGeom>
+          <a:noFill/>
+          <a:ln/>
+        </p:spPr>
+        <p:txBody>
+          <a:bodyPr wrap="square" rtlCol="0" anchor="ctr"/>
+          <a:lstStyle/>
+          <a:p>
+            <a:pPr indent="0" marL="0">
+              <a:buNone/>
+            </a:pPr>
+            <a:r>
+              <a:rPr lang="en-US" sz="3200" b="1" dirty="0">
+                <a:solidFill>
+                  <a:srgbClr val="1F2937"/>
+                </a:solidFill>
+                <a:latin typeface="Calibri" pitchFamily="34" charset="0"/>
+                <a:ea typeface="Calibri" pitchFamily="34" charset="-122"/>
+                <a:cs typeface="Calibri" pitchFamily="34" charset="-120"/>
+              </a:rPr>
+              <a:t>Four categories answer "write my code" — one trade-off differs</a:t>
+            </a:r>
+            <a:endParaRPr lang="en-US" sz="3200" dirty="0"/>
+          </a:p>
+        </p:txBody>
+      </p:sp>
+      <p:graphicFrame>
+        <p:nvGraphicFramePr>
+          <p:cNvPr id="3" name="Table 0"/>
+          <p:cNvGraphicFramePr>
+            <a:graphicFrameLocks noGrp="1"/>
+          </p:cNvGraphicFramePr>
+          <p:nvPr/>
+        </p:nvGraphicFramePr>
+        <p:xfrm>
+          <a:off x="457200" y="1417320"/>
+          <a:ext cx="8229600" cy="914400"/>
+        </p:xfrm>
+        <a:graphic>
+          <a:graphicData uri="http://schemas.openxmlformats.org/drawingml/2006/table">
+            <a:tbl>
+              <a:tblPr/>
+              <a:tblGrid>
+                <a:gridCol w="1920000"/>
+                <a:gridCol w="2103200"/>
+                <a:gridCol w="2103200"/>
+                <a:gridCol w="2103200"/>
+              </a:tblGrid>
+              <a:tr h="0">
+                <a:tc>
+                  <a:txBody>
+                    <a:bodyPr/>
+                    <a:lstStyle/>
+                    <a:p>
+                      <a:pPr algn="l" indent="0" marL="0">
+                        <a:buNone/>
+                      </a:pPr>
+                      <a:r>
+                        <a:rPr lang="en-US" sz="1200" b="1" dirty="0">
+                          <a:solidFill>
+                            <a:srgbClr val="FFFFFF"/>
+                          </a:solidFill>
+                          <a:latin typeface="Calibri" pitchFamily="34" charset="0"/>
+                          <a:ea typeface="Calibri" pitchFamily="34" charset="-122"/>
+                          <a:cs typeface="Calibri" pitchFamily="34" charset="-120"/>
+                        </a:rPr>
+                        <a:t>Category</a:t>
+                      </a:r>
+                      <a:endParaRPr lang="en-US" sz="1200" dirty="0">
+                        <a:latin typeface="Calibri" charset="0"/>
+                        <a:ea typeface="Calibri" charset="0"/>
+                        <a:cs typeface="Calibri" charset="0"/>
+                      </a:endParaRPr>
+                    </a:p>
+                  </a:txBody>
+                  <a:tcPr marL="91440" marR="91440" marT="45720" marB="45720">
+                    <a:lnL w="6350" cap="flat" cmpd="sng" algn="ctr">
+                      <a:solidFill>
+                        <a:srgbClr val="D1D5DB"/>
+                      </a:solidFill>
+                      <a:prstDash val="solid"/>
+                      <a:round/>
+                      <a:headEnd type="none" w="med" len="med"/>
+                      <a:tailEnd type="none" w="med" len="med"/>
+                    </a:lnL>
+                    <a:lnR w="6350" cap="flat" cmpd="sng" algn="ctr">
+                      <a:solidFill>
+                        <a:srgbClr val="D1D5DB"/>
+                      </a:solidFill>
+                      <a:prstDash val="solid"/>
+                      <a:round/>
+                      <a:headEnd type="none" w="med" len="med"/>
+                      <a:tailEnd type="none" w="med" len="med"/>
+                    </a:lnR>
+                    <a:lnT w="6350" cap="flat" cmpd="sng" algn="ctr">
+                      <a:solidFill>
+                        <a:srgbClr val="D1D5DB"/>
+                      </a:solidFill>
+                      <a:prstDash val="solid"/>
+                      <a:round/>
+                      <a:headEnd type="none" w="med" len="med"/>
+                      <a:tailEnd type="none" w="med" len="med"/>
+                    </a:lnT>
+                    <a:lnB w="6350" cap="flat" cmpd="sng" algn="ctr">
+                      <a:solidFill>
+                        <a:srgbClr val="D1D5DB"/>
+                      </a:solidFill>
+                      <a:prstDash val="solid"/>
+                      <a:round/>
+                      <a:headEnd type="none" w="med" len="med"/>
+                      <a:tailEnd type="none" w="med" len="med"/>
+                    </a:lnB>
+                    <a:solidFill>
+                      <a:srgbClr val="33E0A8"/>
+                    </a:solidFill>
+                  </a:tcPr>
+                </a:tc>
+                <a:tc>
+                  <a:txBody>
+                    <a:bodyPr/>
+                    <a:lstStyle/>
+                    <a:p>
+                      <a:pPr algn="l" indent="0" marL="0">
+                        <a:buNone/>
+                      </a:pPr>
+                      <a:r>
+                        <a:rPr lang="en-US" sz="1200" b="1" dirty="0">
+                          <a:solidFill>
+                            <a:srgbClr val="FFFFFF"/>
+                          </a:solidFill>
+                          <a:latin typeface="Calibri" pitchFamily="34" charset="0"/>
+                          <a:ea typeface="Calibri" pitchFamily="34" charset="-122"/>
+                          <a:cs typeface="Calibri" pitchFamily="34" charset="-120"/>
+                        </a:rPr>
+                        <a:t>Optimizes for</a:t>
+                      </a:r>
+                      <a:endParaRPr lang="en-US" sz="1200" dirty="0">
+                        <a:latin typeface="Calibri" charset="0"/>
+                        <a:ea typeface="Calibri" charset="0"/>
+                        <a:cs typeface="Calibri" charset="0"/>
+                      </a:endParaRPr>
+                    </a:p>
+                  </a:txBody>
+                  <a:tcPr marL="91440" marR="91440" marT="45720" marB="45720">
+                    <a:lnL w="6350" cap="flat" cmpd="sng" algn="ctr">
+                      <a:solidFill>
+                        <a:srgbClr val="D1D5DB"/>
+                      </a:solidFill>
+                      <a:prstDash val="solid"/>
+                      <a:round/>
+                      <a:headEnd type="none" w="med" len="med"/>
+                      <a:tailEnd type="none" w="med" len="med"/>
+                    </a:lnL>
+                    <a:lnR w="6350" cap="flat" cmpd="sng" algn="ctr">
+                      <a:solidFill>
+                        <a:srgbClr val="D1D5DB"/>
+                      </a:solidFill>
+                      <a:prstDash val="solid"/>
+                      <a:round/>
+                      <a:headEnd type="none" w="med" len="med"/>
+                      <a:tailEnd type="none" w="med" len="med"/>
+                    </a:lnR>
+                    <a:lnT w="6350" cap="flat" cmpd="sng" algn="ctr">
+                      <a:solidFill>
+                        <a:srgbClr val="D1D5DB"/>
+                      </a:solidFill>
+                      <a:prstDash val="solid"/>
+                      <a:round/>
+                      <a:headEnd type="none" w="med" len="med"/>
+                      <a:tailEnd type="none" w="med" len="med"/>
+                    </a:lnT>
+                    <a:lnB w="6350" cap="flat" cmpd="sng" algn="ctr">
+                      <a:solidFill>
+                        <a:srgbClr val="D1D5DB"/>
+                      </a:solidFill>
+                      <a:prstDash val="solid"/>
+                      <a:round/>
+                      <a:headEnd type="none" w="med" len="med"/>
+                      <a:tailEnd type="none" w="med" len="med"/>
+                    </a:lnB>
+                    <a:solidFill>
+                      <a:srgbClr val="33E0A8"/>
+                    </a:solidFill>
+                  </a:tcPr>
+                </a:tc>
+                <a:tc>
+                  <a:txBody>
+                    <a:bodyPr/>
+                    <a:lstStyle/>
+                    <a:p>
+                      <a:pPr algn="l" indent="0" marL="0">
+                        <a:buNone/>
+                      </a:pPr>
+                      <a:r>
+                        <a:rPr lang="en-US" sz="1200" b="1" dirty="0">
+                          <a:solidFill>
+                            <a:srgbClr val="FFFFFF"/>
+                          </a:solidFill>
+                          <a:latin typeface="Calibri" pitchFamily="34" charset="0"/>
+                          <a:ea typeface="Calibri" pitchFamily="34" charset="-122"/>
+                          <a:cs typeface="Calibri" pitchFamily="34" charset="-120"/>
+                        </a:rPr>
+                        <a:t>Gives up</a:t>
+                      </a:r>
+                      <a:endParaRPr lang="en-US" sz="1200" dirty="0">
+                        <a:latin typeface="Calibri" charset="0"/>
+                        <a:ea typeface="Calibri" charset="0"/>
+                        <a:cs typeface="Calibri" charset="0"/>
+                      </a:endParaRPr>
+                    </a:p>
+                  </a:txBody>
+                  <a:tcPr marL="91440" marR="91440" marT="45720" marB="45720">
+                    <a:lnL w="6350" cap="flat" cmpd="sng" algn="ctr">
+                      <a:solidFill>
+                        <a:srgbClr val="D1D5DB"/>
+                      </a:solidFill>
+                      <a:prstDash val="solid"/>
+                      <a:round/>
+                      <a:headEnd type="none" w="med" len="med"/>
+                      <a:tailEnd type="none" w="med" len="med"/>
+                    </a:lnL>
+                    <a:lnR w="6350" cap="flat" cmpd="sng" algn="ctr">
+                      <a:solidFill>
+                        <a:srgbClr val="D1D5DB"/>
+                      </a:solidFill>
+                      <a:prstDash val="solid"/>
+                      <a:round/>
+                      <a:headEnd type="none" w="med" len="med"/>
+                      <a:tailEnd type="none" w="med" len="med"/>
+                    </a:lnR>
+                    <a:lnT w="6350" cap="flat" cmpd="sng" algn="ctr">
+                      <a:solidFill>
+                        <a:srgbClr val="D1D5DB"/>
+                      </a:solidFill>
+                      <a:prstDash val="solid"/>
+                      <a:round/>
+                      <a:headEnd type="none" w="med" len="med"/>
+                      <a:tailEnd type="none" w="med" len="med"/>
+                    </a:lnT>
+                    <a:lnB w="6350" cap="flat" cmpd="sng" algn="ctr">
+                      <a:solidFill>
+                        <a:srgbClr val="D1D5DB"/>
+                      </a:solidFill>
+                      <a:prstDash val="solid"/>
+                      <a:round/>
+                      <a:headEnd type="none" w="med" len="med"/>
+                      <a:tailEnd type="none" w="med" len="med"/>
+                    </a:lnB>
+                    <a:solidFill>
+                      <a:srgbClr val="33E0A8"/>
+                    </a:solidFill>
+                  </a:tcPr>
+                </a:tc>
+                <a:tc>
+                  <a:txBody>
+                    <a:bodyPr/>
+                    <a:lstStyle/>
+                    <a:p>
+                      <a:pPr algn="l" indent="0" marL="0">
+                        <a:buNone/>
+                      </a:pPr>
+                      <a:r>
+                        <a:rPr lang="en-US" sz="1200" b="1" dirty="0">
+                          <a:solidFill>
+                            <a:srgbClr val="FFFFFF"/>
+                          </a:solidFill>
+                          <a:latin typeface="Calibri" pitchFamily="34" charset="0"/>
+                          <a:ea typeface="Calibri" pitchFamily="34" charset="-122"/>
+                          <a:cs typeface="Calibri" pitchFamily="34" charset="-120"/>
+                        </a:rPr>
+                        <a:t>Where Wrexlyn sits</a:t>
+                      </a:r>
+                      <a:endParaRPr lang="en-US" sz="1200" dirty="0">
+                        <a:latin typeface="Calibri" charset="0"/>
+                        <a:ea typeface="Calibri" charset="0"/>
+                        <a:cs typeface="Calibri" charset="0"/>
+                      </a:endParaRPr>
+                    </a:p>
+                  </a:txBody>
+                  <a:tcPr marL="91440" marR="91440" marT="45720" marB="45720">
+                    <a:lnL w="6350" cap="flat" cmpd="sng" algn="ctr">
+                      <a:solidFill>
+                        <a:srgbClr val="D1D5DB"/>
+                      </a:solidFill>
+                      <a:prstDash val="solid"/>
+                      <a:round/>
+                      <a:headEnd type="none" w="med" len="med"/>
+                      <a:tailEnd type="none" w="med" len="med"/>
+                    </a:lnL>
+                    <a:lnR w="6350" cap="flat" cmpd="sng" algn="ctr">
+                      <a:solidFill>
+                        <a:srgbClr val="D1D5DB"/>
+                      </a:solidFill>
+                      <a:prstDash val="solid"/>
+                      <a:round/>
+                      <a:headEnd type="none" w="med" len="med"/>
+                      <a:tailEnd type="none" w="med" len="med"/>
+                    </a:lnR>
+                    <a:lnT w="6350" cap="flat" cmpd="sng" algn="ctr">
+                      <a:solidFill>
+                        <a:srgbClr val="D1D5DB"/>
+                      </a:solidFill>
+                      <a:prstDash val="solid"/>
+                      <a:round/>
+                      <a:headEnd type="none" w="med" len="med"/>
+                      <a:tailEnd type="none" w="med" len="med"/>
+                    </a:lnT>
+                    <a:lnB w="6350" cap="flat" cmpd="sng" algn="ctr">
+                      <a:solidFill>
+                        <a:srgbClr val="D1D5DB"/>
+                      </a:solidFill>
+                      <a:prstDash val="solid"/>
+                      <a:round/>
+                      <a:headEnd type="none" w="med" len="med"/>
+                      <a:tailEnd type="none" w="med" len="med"/>
+                    </a:lnB>
+                    <a:solidFill>
+                      <a:srgbClr val="33E0A8"/>
+                    </a:solidFill>
+                  </a:tcPr>
+                </a:tc>
+              </a:tr>
+              <a:tr h="0">
+                <a:tc>
+                  <a:txBody>
+                    <a:bodyPr/>
+                    <a:lstStyle/>
+                    <a:p>
+                      <a:pPr algn="l" indent="0" marL="0">
+                        <a:buNone/>
+                      </a:pPr>
+                      <a:r>
+                        <a:rPr lang="en-US" sz="1200" dirty="0">
+                          <a:solidFill>
+                            <a:srgbClr val="000000"/>
+                          </a:solidFill>
+                          <a:latin typeface="Calibri" pitchFamily="34" charset="0"/>
+                          <a:ea typeface="Calibri" pitchFamily="34" charset="-122"/>
+                          <a:cs typeface="Calibri" pitchFamily="34" charset="-120"/>
+                        </a:rPr>
+                        <a:t>Inline autocomplete</a:t>
+                      </a:r>
+                      <a:endParaRPr lang="en-US" sz="1200" dirty="0">
+                        <a:latin typeface="Calibri" charset="0"/>
+                        <a:ea typeface="Calibri" charset="0"/>
+                        <a:cs typeface="Calibri" charset="0"/>
+                      </a:endParaRPr>
+                    </a:p>
+                  </a:txBody>
+                  <a:tcPr marL="91440" marR="91440" marT="45720" marB="45720">
+                    <a:lnL w="6350" cap="flat" cmpd="sng" algn="ctr">
+                      <a:solidFill>
+                        <a:srgbClr val="D1D5DB"/>
+                      </a:solidFill>
+                      <a:prstDash val="solid"/>
+                      <a:round/>
+                      <a:headEnd type="none" w="med" len="med"/>
+                      <a:tailEnd type="none" w="med" len="med"/>
+                    </a:lnL>
+                    <a:lnR w="6350" cap="flat" cmpd="sng" algn="ctr">
+                      <a:solidFill>
+                        <a:srgbClr val="D1D5DB"/>
+                      </a:solidFill>
+                      <a:prstDash val="solid"/>
+                      <a:round/>
+                      <a:headEnd type="none" w="med" len="med"/>
+                      <a:tailEnd type="none" w="med" len="med"/>
+                    </a:lnR>
+                    <a:lnT w="6350" cap="flat" cmpd="sng" algn="ctr">
+                      <a:solidFill>
+                        <a:srgbClr val="D1D5DB"/>
+                      </a:solidFill>
+                      <a:prstDash val="solid"/>
+                      <a:round/>
+                      <a:headEnd type="none" w="med" len="med"/>
+                      <a:tailEnd type="none" w="med" len="med"/>
+                    </a:lnT>
+                    <a:lnB w="6350" cap="flat" cmpd="sng" algn="ctr">
+                      <a:solidFill>
+                        <a:srgbClr val="D1D5DB"/>
+                      </a:solidFill>
+                      <a:prstDash val="solid"/>
+                      <a:round/>
+                      <a:headEnd type="none" w="med" len="med"/>
+                      <a:tailEnd type="none" w="med" len="med"/>
+                    </a:lnB>
+                  </a:tcPr>
+                </a:tc>
+                <a:tc>
+                  <a:txBody>
+                    <a:bodyPr/>
+                    <a:lstStyle/>
+                    <a:p>
+                      <a:pPr algn="l" indent="0" marL="0">
+                        <a:buNone/>
+                      </a:pPr>
+                      <a:r>
+                        <a:rPr lang="en-US" sz="1200" dirty="0">
+                          <a:solidFill>
+                            <a:srgbClr val="000000"/>
+                          </a:solidFill>
+                          <a:latin typeface="Calibri" pitchFamily="34" charset="0"/>
+                          <a:ea typeface="Calibri" pitchFamily="34" charset="-122"/>
+                          <a:cs typeface="Calibri" pitchFamily="34" charset="-120"/>
+                        </a:rPr>
+                        <a:t>Speed of one suggestion, in-editor</a:t>
+                      </a:r>
+                      <a:endParaRPr lang="en-US" sz="1200" dirty="0">
+                        <a:latin typeface="Calibri" charset="0"/>
+                        <a:ea typeface="Calibri" charset="0"/>
+                        <a:cs typeface="Calibri" charset="0"/>
+                      </a:endParaRPr>
+                    </a:p>
+                  </a:txBody>
+                  <a:tcPr marL="91440" marR="91440" marT="45720" marB="45720">
+                    <a:lnL w="6350" cap="flat" cmpd="sng" algn="ctr">
+                      <a:solidFill>
+                        <a:srgbClr val="D1D5DB"/>
+                      </a:solidFill>
+                      <a:prstDash val="solid"/>
+                      <a:round/>
+                      <a:headEnd type="none" w="med" len="med"/>
+                      <a:tailEnd type="none" w="med" len="med"/>
+                    </a:lnL>
+                    <a:lnR w="6350" cap="flat" cmpd="sng" algn="ctr">
+                      <a:solidFill>
+                        <a:srgbClr val="D1D5DB"/>
+                      </a:solidFill>
+                      <a:prstDash val="solid"/>
+                      <a:round/>
+                      <a:headEnd type="none" w="med" len="med"/>
+                      <a:tailEnd type="none" w="med" len="med"/>
+                    </a:lnR>
+                    <a:lnT w="6350" cap="flat" cmpd="sng" algn="ctr">
+                      <a:solidFill>
+                        <a:srgbClr val="D1D5DB"/>
+                      </a:solidFill>
+                      <a:prstDash val="solid"/>
+                      <a:round/>
+                      <a:headEnd type="none" w="med" len="med"/>
+                      <a:tailEnd type="none" w="med" len="med"/>
+                    </a:lnT>
+                    <a:lnB w="6350" cap="flat" cmpd="sng" algn="ctr">
+                      <a:solidFill>
+                        <a:srgbClr val="D1D5DB"/>
+                      </a:solidFill>
+                      <a:prstDash val="solid"/>
+                      <a:round/>
+                      <a:headEnd type="none" w="med" len="med"/>
+                      <a:tailEnd type="none" w="med" len="med"/>
+                    </a:lnB>
+                  </a:tcPr>
+                </a:tc>
+                <a:tc>
+                  <a:txBody>
+                    <a:bodyPr/>
+                    <a:lstStyle/>
+                    <a:p>
+                      <a:pPr algn="l" indent="0" marL="0">
+                        <a:buNone/>
+                      </a:pPr>
+                      <a:r>
+                        <a:rPr lang="en-US" sz="1200" dirty="0">
+                          <a:solidFill>
+                            <a:srgbClr val="000000"/>
+                          </a:solidFill>
+                          <a:latin typeface="Calibri" pitchFamily="34" charset="0"/>
+                          <a:ea typeface="Calibri" pitchFamily="34" charset="-122"/>
+                          <a:cs typeface="Calibri" pitchFamily="34" charset="-120"/>
+                        </a:rPr>
+                        <a:t>No multi-file planning, no verification loop</a:t>
+                      </a:r>
+                      <a:endParaRPr lang="en-US" sz="1200" dirty="0">
+                        <a:latin typeface="Calibri" charset="0"/>
+                        <a:ea typeface="Calibri" charset="0"/>
+                        <a:cs typeface="Calibri" charset="0"/>
+                      </a:endParaRPr>
+                    </a:p>
+                  </a:txBody>
+                  <a:tcPr marL="91440" marR="91440" marT="45720" marB="45720">
+                    <a:lnL w="6350" cap="flat" cmpd="sng" algn="ctr">
+                      <a:solidFill>
+                        <a:srgbClr val="D1D5DB"/>
+                      </a:solidFill>
+                      <a:prstDash val="solid"/>
+                      <a:round/>
+                      <a:headEnd type="none" w="med" len="med"/>
+                      <a:tailEnd type="none" w="med" len="med"/>
+                    </a:lnL>
+                    <a:lnR w="6350" cap="flat" cmpd="sng" algn="ctr">
+                      <a:solidFill>
+                        <a:srgbClr val="D1D5DB"/>
+                      </a:solidFill>
+                      <a:prstDash val="solid"/>
+                      <a:round/>
+                      <a:headEnd type="none" w="med" len="med"/>
+                      <a:tailEnd type="none" w="med" len="med"/>
+                    </a:lnR>
+                    <a:lnT w="6350" cap="flat" cmpd="sng" algn="ctr">
+                      <a:solidFill>
+                        <a:srgbClr val="D1D5DB"/>
+                      </a:solidFill>
+                      <a:prstDash val="solid"/>
+                      <a:round/>
+                      <a:headEnd type="none" w="med" len="med"/>
+                      <a:tailEnd type="none" w="med" len="med"/>
+                    </a:lnT>
+                    <a:lnB w="6350" cap="flat" cmpd="sng" algn="ctr">
+                      <a:solidFill>
+                        <a:srgbClr val="D1D5DB"/>
+                      </a:solidFill>
+                      <a:prstDash val="solid"/>
+                      <a:round/>
+                      <a:headEnd type="none" w="med" len="med"/>
+                      <a:tailEnd type="none" w="med" len="med"/>
+                    </a:lnB>
+                  </a:tcPr>
+                </a:tc>
+                <a:tc>
+                  <a:txBody>
+                    <a:bodyPr/>
+                    <a:lstStyle/>
+                    <a:p>
+                      <a:pPr algn="l" indent="0" marL="0">
+                        <a:buNone/>
+                      </a:pPr>
+                      <a:r>
+                        <a:rPr lang="en-US" sz="1200" dirty="0">
+                          <a:solidFill>
+                            <a:srgbClr val="000000"/>
+                          </a:solidFill>
+                          <a:latin typeface="Calibri" pitchFamily="34" charset="0"/>
+                          <a:ea typeface="Calibri" pitchFamily="34" charset="-122"/>
+                          <a:cs typeface="Calibri" pitchFamily="34" charset="-120"/>
+                        </a:rPr>
+                        <a:t>A full agent loop — a different tier of task</a:t>
+                      </a:r>
+                      <a:endParaRPr lang="en-US" sz="1200" dirty="0">
+                        <a:latin typeface="Calibri" charset="0"/>
+                        <a:ea typeface="Calibri" charset="0"/>
+                        <a:cs typeface="Calibri" charset="0"/>
+                      </a:endParaRPr>
+                    </a:p>
+                  </a:txBody>
+                  <a:tcPr marL="91440" marR="91440" marT="45720" marB="45720">
+                    <a:lnL w="6350" cap="flat" cmpd="sng" algn="ctr">
+                      <a:solidFill>
+                        <a:srgbClr val="D1D5DB"/>
+                      </a:solidFill>
+                      <a:prstDash val="solid"/>
+                      <a:round/>
+                      <a:headEnd type="none" w="med" len="med"/>
+                      <a:tailEnd type="none" w="med" len="med"/>
+                    </a:lnL>
+                    <a:lnR w="6350" cap="flat" cmpd="sng" algn="ctr">
+                      <a:solidFill>
+                        <a:srgbClr val="D1D5DB"/>
+                      </a:solidFill>
+                      <a:prstDash val="solid"/>
+                      <a:round/>
+                      <a:headEnd type="none" w="med" len="med"/>
+                      <a:tailEnd type="none" w="med" len="med"/>
+                    </a:lnR>
+                    <a:lnT w="6350" cap="flat" cmpd="sng" algn="ctr">
+                      <a:solidFill>
+                        <a:srgbClr val="D1D5DB"/>
+                      </a:solidFill>
+                      <a:prstDash val="solid"/>
+                      <a:round/>
+                      <a:headEnd type="none" w="med" len="med"/>
+                      <a:tailEnd type="none" w="med" len="med"/>
+                    </a:lnT>
+                    <a:lnB w="6350" cap="flat" cmpd="sng" algn="ctr">
+                      <a:solidFill>
+                        <a:srgbClr val="D1D5DB"/>
+                      </a:solidFill>
+                      <a:prstDash val="solid"/>
+                      <a:round/>
+                      <a:headEnd type="none" w="med" len="med"/>
+                      <a:tailEnd type="none" w="med" len="med"/>
+                    </a:lnB>
+                  </a:tcPr>
+                </a:tc>
+              </a:tr>
+              <a:tr h="0">
+                <a:tc>
+                  <a:txBody>
+                    <a:bodyPr/>
+                    <a:lstStyle/>
+                    <a:p>
+                      <a:pPr algn="l" indent="0" marL="0">
+                        <a:buNone/>
+                      </a:pPr>
+                      <a:r>
+                        <a:rPr lang="en-US" sz="1200" dirty="0">
+                          <a:solidFill>
+                            <a:srgbClr val="000000"/>
+                          </a:solidFill>
+                          <a:latin typeface="Calibri" pitchFamily="34" charset="0"/>
+                          <a:ea typeface="Calibri" pitchFamily="34" charset="-122"/>
+                          <a:cs typeface="Calibri" pitchFamily="34" charset="-120"/>
+                        </a:rPr>
+                        <a:t>IDE-embedded agents</a:t>
+                      </a:r>
+                      <a:endParaRPr lang="en-US" sz="1200" dirty="0">
+                        <a:latin typeface="Calibri" charset="0"/>
+                        <a:ea typeface="Calibri" charset="0"/>
+                        <a:cs typeface="Calibri" charset="0"/>
+                      </a:endParaRPr>
+                    </a:p>
+                  </a:txBody>
+                  <a:tcPr marL="91440" marR="91440" marT="45720" marB="45720">
+                    <a:lnL w="6350" cap="flat" cmpd="sng" algn="ctr">
+                      <a:solidFill>
+                        <a:srgbClr val="D1D5DB"/>
+                      </a:solidFill>
+                      <a:prstDash val="solid"/>
+                      <a:round/>
+                      <a:headEnd type="none" w="med" len="med"/>
+                      <a:tailEnd type="none" w="med" len="med"/>
+                    </a:lnL>
+                    <a:lnR w="6350" cap="flat" cmpd="sng" algn="ctr">
+                      <a:solidFill>
+                        <a:srgbClr val="D1D5DB"/>
+                      </a:solidFill>
+                      <a:prstDash val="solid"/>
+                      <a:round/>
+                      <a:headEnd type="none" w="med" len="med"/>
+                      <a:tailEnd type="none" w="med" len="med"/>
+                    </a:lnR>
+                    <a:lnT w="6350" cap="flat" cmpd="sng" algn="ctr">
+                      <a:solidFill>
+                        <a:srgbClr val="D1D5DB"/>
+                      </a:solidFill>
+                      <a:prstDash val="solid"/>
+                      <a:round/>
+                      <a:headEnd type="none" w="med" len="med"/>
+                      <a:tailEnd type="none" w="med" len="med"/>
+                    </a:lnT>
+                    <a:lnB w="6350" cap="flat" cmpd="sng" algn="ctr">
+                      <a:solidFill>
+                        <a:srgbClr val="D1D5DB"/>
+                      </a:solidFill>
+                      <a:prstDash val="solid"/>
+                      <a:round/>
+                      <a:headEnd type="none" w="med" len="med"/>
+                      <a:tailEnd type="none" w="med" len="med"/>
+                    </a:lnB>
+                    <a:solidFill>
+                      <a:srgbClr val="F3F4F6"/>
+                    </a:solidFill>
+                  </a:tcPr>
+                </a:tc>
+                <a:tc>
+                  <a:txBody>
+                    <a:bodyPr/>
+                    <a:lstStyle/>
+                    <a:p>
+                      <a:pPr algn="l" indent="0" marL="0">
+                        <a:buNone/>
+                      </a:pPr>
+                      <a:r>
+                        <a:rPr lang="en-US" sz="1200" dirty="0">
+                          <a:solidFill>
+                            <a:srgbClr val="000000"/>
+                          </a:solidFill>
+                          <a:latin typeface="Calibri" pitchFamily="34" charset="0"/>
+                          <a:ea typeface="Calibri" pitchFamily="34" charset="-122"/>
+                          <a:cs typeface="Calibri" pitchFamily="34" charset="-120"/>
+                        </a:rPr>
+                        <a:t>Convenience — one tool, one editor</a:t>
+                      </a:r>
+                      <a:endParaRPr lang="en-US" sz="1200" dirty="0">
+                        <a:latin typeface="Calibri" charset="0"/>
+                        <a:ea typeface="Calibri" charset="0"/>
+                        <a:cs typeface="Calibri" charset="0"/>
+                      </a:endParaRPr>
+                    </a:p>
+                  </a:txBody>
+                  <a:tcPr marL="91440" marR="91440" marT="45720" marB="45720">
+                    <a:lnL w="6350" cap="flat" cmpd="sng" algn="ctr">
+                      <a:solidFill>
+                        <a:srgbClr val="D1D5DB"/>
+                      </a:solidFill>
+                      <a:prstDash val="solid"/>
+                      <a:round/>
+                      <a:headEnd type="none" w="med" len="med"/>
+                      <a:tailEnd type="none" w="med" len="med"/>
+                    </a:lnL>
+                    <a:lnR w="6350" cap="flat" cmpd="sng" algn="ctr">
+                      <a:solidFill>
+                        <a:srgbClr val="D1D5DB"/>
+                      </a:solidFill>
+                      <a:prstDash val="solid"/>
+                      <a:round/>
+                      <a:headEnd type="none" w="med" len="med"/>
+                      <a:tailEnd type="none" w="med" len="med"/>
+                    </a:lnR>
+                    <a:lnT w="6350" cap="flat" cmpd="sng" algn="ctr">
+                      <a:solidFill>
+                        <a:srgbClr val="D1D5DB"/>
+                      </a:solidFill>
+                      <a:prstDash val="solid"/>
+                      <a:round/>
+                      <a:headEnd type="none" w="med" len="med"/>
+                      <a:tailEnd type="none" w="med" len="med"/>
+                    </a:lnT>
+                    <a:lnB w="6350" cap="flat" cmpd="sng" algn="ctr">
+                      <a:solidFill>
+                        <a:srgbClr val="D1D5DB"/>
+                      </a:solidFill>
+                      <a:prstDash val="solid"/>
+                      <a:round/>
+                      <a:headEnd type="none" w="med" len="med"/>
+                      <a:tailEnd type="none" w="med" len="med"/>
+                    </a:lnB>
+                    <a:solidFill>
+                      <a:srgbClr val="F3F4F6"/>
+                    </a:solidFill>
+                  </a:tcPr>
+                </a:tc>
+                <a:tc>
+                  <a:txBody>
+                    <a:bodyPr/>
+                    <a:lstStyle/>
+                    <a:p>
+                      <a:pPr algn="l" indent="0" marL="0">
+                        <a:buNone/>
+                      </a:pPr>
+                      <a:r>
+                        <a:rPr lang="en-US" sz="1200" dirty="0">
+                          <a:solidFill>
+                            <a:srgbClr val="000000"/>
+                          </a:solidFill>
+                          <a:latin typeface="Calibri" pitchFamily="34" charset="0"/>
+                          <a:ea typeface="Calibri" pitchFamily="34" charset="-122"/>
+                          <a:cs typeface="Calibri" pitchFamily="34" charset="-120"/>
+                        </a:rPr>
+                        <a:t>Usually a fixed model, subscription regardless of free tiers upstream</a:t>
+                      </a:r>
+                      <a:endParaRPr lang="en-US" sz="1200" dirty="0">
+                        <a:latin typeface="Calibri" charset="0"/>
+                        <a:ea typeface="Calibri" charset="0"/>
+                        <a:cs typeface="Calibri" charset="0"/>
+                      </a:endParaRPr>
+                    </a:p>
+                  </a:txBody>
+                  <a:tcPr marL="91440" marR="91440" marT="45720" marB="45720">
+                    <a:lnL w="6350" cap="flat" cmpd="sng" algn="ctr">
+                      <a:solidFill>
+                        <a:srgbClr val="D1D5DB"/>
+                      </a:solidFill>
+                      <a:prstDash val="solid"/>
+                      <a:round/>
+                      <a:headEnd type="none" w="med" len="med"/>
+                      <a:tailEnd type="none" w="med" len="med"/>
+                    </a:lnL>
+                    <a:lnR w="6350" cap="flat" cmpd="sng" algn="ctr">
+                      <a:solidFill>
+                        <a:srgbClr val="D1D5DB"/>
+                      </a:solidFill>
+                      <a:prstDash val="solid"/>
+                      <a:round/>
+                      <a:headEnd type="none" w="med" len="med"/>
+                      <a:tailEnd type="none" w="med" len="med"/>
+                    </a:lnR>
+                    <a:lnT w="6350" cap="flat" cmpd="sng" algn="ctr">
+                      <a:solidFill>
+                        <a:srgbClr val="D1D5DB"/>
+                      </a:solidFill>
+                      <a:prstDash val="solid"/>
+                      <a:round/>
+                      <a:headEnd type="none" w="med" len="med"/>
+                      <a:tailEnd type="none" w="med" len="med"/>
+                    </a:lnT>
+                    <a:lnB w="6350" cap="flat" cmpd="sng" algn="ctr">
+                      <a:solidFill>
+                        <a:srgbClr val="D1D5DB"/>
+                      </a:solidFill>
+                      <a:prstDash val="solid"/>
+                      <a:round/>
+                      <a:headEnd type="none" w="med" len="med"/>
+                      <a:tailEnd type="none" w="med" len="med"/>
+                    </a:lnB>
+                    <a:solidFill>
+                      <a:srgbClr val="F3F4F6"/>
+                    </a:solidFill>
+                  </a:tcPr>
+                </a:tc>
+                <a:tc>
+                  <a:txBody>
+                    <a:bodyPr/>
+                    <a:lstStyle/>
+                    <a:p>
+                      <a:pPr algn="l" indent="0" marL="0">
+                        <a:buNone/>
+                      </a:pPr>
+                      <a:r>
+                        <a:rPr lang="en-US" sz="1200" dirty="0">
+                          <a:solidFill>
+                            <a:srgbClr val="000000"/>
+                          </a:solidFill>
+                          <a:latin typeface="Calibri" pitchFamily="34" charset="0"/>
+                          <a:ea typeface="Calibri" pitchFamily="34" charset="-122"/>
+                          <a:cs typeface="Calibri" pitchFamily="34" charset="-120"/>
+                        </a:rPr>
+                        <a:t>Editor-agnostic, 6 swappable providers, free-tier eligible</a:t>
+                      </a:r>
+                      <a:endParaRPr lang="en-US" sz="1200" dirty="0">
+                        <a:latin typeface="Calibri" charset="0"/>
+                        <a:ea typeface="Calibri" charset="0"/>
+                        <a:cs typeface="Calibri" charset="0"/>
+                      </a:endParaRPr>
+                    </a:p>
+                  </a:txBody>
+                  <a:tcPr marL="91440" marR="91440" marT="45720" marB="45720">
+                    <a:lnL w="6350" cap="flat" cmpd="sng" algn="ctr">
+                      <a:solidFill>
+                        <a:srgbClr val="D1D5DB"/>
+                      </a:solidFill>
+                      <a:prstDash val="solid"/>
+                      <a:round/>
+                      <a:headEnd type="none" w="med" len="med"/>
+                      <a:tailEnd type="none" w="med" len="med"/>
+                    </a:lnL>
+                    <a:lnR w="6350" cap="flat" cmpd="sng" algn="ctr">
+                      <a:solidFill>
+                        <a:srgbClr val="D1D5DB"/>
+                      </a:solidFill>
+                      <a:prstDash val="solid"/>
+                      <a:round/>
+                      <a:headEnd type="none" w="med" len="med"/>
+                      <a:tailEnd type="none" w="med" len="med"/>
+                    </a:lnR>
+                    <a:lnT w="6350" cap="flat" cmpd="sng" algn="ctr">
+                      <a:solidFill>
+                        <a:srgbClr val="D1D5DB"/>
+                      </a:solidFill>
+                      <a:prstDash val="solid"/>
+                      <a:round/>
+                      <a:headEnd type="none" w="med" len="med"/>
+                      <a:tailEnd type="none" w="med" len="med"/>
+                    </a:lnT>
+                    <a:lnB w="6350" cap="flat" cmpd="sng" algn="ctr">
+                      <a:solidFill>
+                        <a:srgbClr val="D1D5DB"/>
+                      </a:solidFill>
+                      <a:prstDash val="solid"/>
+                      <a:round/>
+                      <a:headEnd type="none" w="med" len="med"/>
+                      <a:tailEnd type="none" w="med" len="med"/>
+                    </a:lnB>
+                    <a:solidFill>
+                      <a:srgbClr val="F3F4F6"/>
+                    </a:solidFill>
+                  </a:tcPr>
+                </a:tc>
+              </a:tr>
+              <a:tr h="0">
+                <a:tc>
+                  <a:txBody>
+                    <a:bodyPr/>
+                    <a:lstStyle/>
+                    <a:p>
+                      <a:pPr algn="l" indent="0" marL="0">
+                        <a:buNone/>
+                      </a:pPr>
+                      <a:r>
+                        <a:rPr lang="en-US" sz="1200" dirty="0">
+                          <a:solidFill>
+                            <a:srgbClr val="000000"/>
+                          </a:solidFill>
+                          <a:latin typeface="Calibri" pitchFamily="34" charset="0"/>
+                          <a:ea typeface="Calibri" pitchFamily="34" charset="-122"/>
+                          <a:cs typeface="Calibri" pitchFamily="34" charset="-120"/>
+                        </a:rPr>
+                        <a:t>Hosted autonomous SaaS agents</a:t>
+                      </a:r>
+                      <a:endParaRPr lang="en-US" sz="1200" dirty="0">
+                        <a:latin typeface="Calibri" charset="0"/>
+                        <a:ea typeface="Calibri" charset="0"/>
+                        <a:cs typeface="Calibri" charset="0"/>
+                      </a:endParaRPr>
+                    </a:p>
+                  </a:txBody>
+                  <a:tcPr marL="91440" marR="91440" marT="45720" marB="45720">
+                    <a:lnL w="6350" cap="flat" cmpd="sng" algn="ctr">
+                      <a:solidFill>
+                        <a:srgbClr val="D1D5DB"/>
+                      </a:solidFill>
+                      <a:prstDash val="solid"/>
+                      <a:round/>
+                      <a:headEnd type="none" w="med" len="med"/>
+                      <a:tailEnd type="none" w="med" len="med"/>
+                    </a:lnL>
+                    <a:lnR w="6350" cap="flat" cmpd="sng" algn="ctr">
+                      <a:solidFill>
+                        <a:srgbClr val="D1D5DB"/>
+                      </a:solidFill>
+                      <a:prstDash val="solid"/>
+                      <a:round/>
+                      <a:headEnd type="none" w="med" len="med"/>
+                      <a:tailEnd type="none" w="med" len="med"/>
+                    </a:lnR>
+                    <a:lnT w="6350" cap="flat" cmpd="sng" algn="ctr">
+                      <a:solidFill>
+                        <a:srgbClr val="D1D5DB"/>
+                      </a:solidFill>
+                      <a:prstDash val="solid"/>
+                      <a:round/>
+                      <a:headEnd type="none" w="med" len="med"/>
+                      <a:tailEnd type="none" w="med" len="med"/>
+                    </a:lnT>
+                    <a:lnB w="6350" cap="flat" cmpd="sng" algn="ctr">
+                      <a:solidFill>
+                        <a:srgbClr val="D1D5DB"/>
+                      </a:solidFill>
+                      <a:prstDash val="solid"/>
+                      <a:round/>
+                      <a:headEnd type="none" w="med" len="med"/>
+                      <a:tailEnd type="none" w="med" len="med"/>
+                    </a:lnB>
+                  </a:tcPr>
+                </a:tc>
+                <a:tc>
+                  <a:txBody>
+                    <a:bodyPr/>
+                    <a:lstStyle/>
+                    <a:p>
+                      <a:pPr algn="l" indent="0" marL="0">
+                        <a:buNone/>
+                      </a:pPr>
+                      <a:r>
+                        <a:rPr lang="en-US" sz="1200" dirty="0">
+                          <a:solidFill>
+                            <a:srgbClr val="000000"/>
+                          </a:solidFill>
+                          <a:latin typeface="Calibri" pitchFamily="34" charset="0"/>
+                          <a:ea typeface="Calibri" pitchFamily="34" charset="-122"/>
+                          <a:cs typeface="Calibri" pitchFamily="34" charset="-120"/>
+                        </a:rPr>
+                        <a:t>Fire-and-forget delegation</a:t>
+                      </a:r>
+                      <a:endParaRPr lang="en-US" sz="1200" dirty="0">
+                        <a:latin typeface="Calibri" charset="0"/>
+                        <a:ea typeface="Calibri" charset="0"/>
+                        <a:cs typeface="Calibri" charset="0"/>
+                      </a:endParaRPr>
+                    </a:p>
+                  </a:txBody>
+                  <a:tcPr marL="91440" marR="91440" marT="45720" marB="45720">
+                    <a:lnL w="6350" cap="flat" cmpd="sng" algn="ctr">
+                      <a:solidFill>
+                        <a:srgbClr val="D1D5DB"/>
+                      </a:solidFill>
+                      <a:prstDash val="solid"/>
+                      <a:round/>
+                      <a:headEnd type="none" w="med" len="med"/>
+                      <a:tailEnd type="none" w="med" len="med"/>
+                    </a:lnL>
+                    <a:lnR w="6350" cap="flat" cmpd="sng" algn="ctr">
+                      <a:solidFill>
+                        <a:srgbClr val="D1D5DB"/>
+                      </a:solidFill>
+                      <a:prstDash val="solid"/>
+                      <a:round/>
+                      <a:headEnd type="none" w="med" len="med"/>
+                      <a:tailEnd type="none" w="med" len="med"/>
+                    </a:lnR>
+                    <a:lnT w="6350" cap="flat" cmpd="sng" algn="ctr">
+                      <a:solidFill>
+                        <a:srgbClr val="D1D5DB"/>
+                      </a:solidFill>
+                      <a:prstDash val="solid"/>
+                      <a:round/>
+                      <a:headEnd type="none" w="med" len="med"/>
+                      <a:tailEnd type="none" w="med" len="med"/>
+                    </a:lnT>
+                    <a:lnB w="6350" cap="flat" cmpd="sng" algn="ctr">
+                      <a:solidFill>
+                        <a:srgbClr val="D1D5DB"/>
+                      </a:solidFill>
+                      <a:prstDash val="solid"/>
+                      <a:round/>
+                      <a:headEnd type="none" w="med" len="med"/>
+                      <a:tailEnd type="none" w="med" len="med"/>
+                    </a:lnB>
+                  </a:tcPr>
+                </a:tc>
+                <a:tc>
+                  <a:txBody>
+                    <a:bodyPr/>
+                    <a:lstStyle/>
+                    <a:p>
+                      <a:pPr algn="l" indent="0" marL="0">
+                        <a:buNone/>
+                      </a:pPr>
+                      <a:r>
+                        <a:rPr lang="en-US" sz="1200" dirty="0">
+                          <a:solidFill>
+                            <a:srgbClr val="000000"/>
+                          </a:solidFill>
+                          <a:latin typeface="Calibri" pitchFamily="34" charset="0"/>
+                          <a:ea typeface="Calibri" pitchFamily="34" charset="-122"/>
+                          <a:cs typeface="Calibri" pitchFamily="34" charset="-120"/>
+                        </a:rPr>
+                        <a:t>Code and prompts leave your machine; verification you can't inspect</a:t>
+                      </a:r>
+                      <a:endParaRPr lang="en-US" sz="1200" dirty="0">
+                        <a:latin typeface="Calibri" charset="0"/>
+                        <a:ea typeface="Calibri" charset="0"/>
+                        <a:cs typeface="Calibri" charset="0"/>
+                      </a:endParaRPr>
+                    </a:p>
+                  </a:txBody>
+                  <a:tcPr marL="91440" marR="91440" marT="45720" marB="45720">
+                    <a:lnL w="6350" cap="flat" cmpd="sng" algn="ctr">
+                      <a:solidFill>
+                        <a:srgbClr val="D1D5DB"/>
+                      </a:solidFill>
+                      <a:prstDash val="solid"/>
+                      <a:round/>
+                      <a:headEnd type="none" w="med" len="med"/>
+                      <a:tailEnd type="none" w="med" len="med"/>
+                    </a:lnL>
+                    <a:lnR w="6350" cap="flat" cmpd="sng" algn="ctr">
+                      <a:solidFill>
+                        <a:srgbClr val="D1D5DB"/>
+                      </a:solidFill>
+                      <a:prstDash val="solid"/>
+                      <a:round/>
+                      <a:headEnd type="none" w="med" len="med"/>
+                      <a:tailEnd type="none" w="med" len="med"/>
+                    </a:lnR>
+                    <a:lnT w="6350" cap="flat" cmpd="sng" algn="ctr">
+                      <a:solidFill>
+                        <a:srgbClr val="D1D5DB"/>
+                      </a:solidFill>
+                      <a:prstDash val="solid"/>
+                      <a:round/>
+                      <a:headEnd type="none" w="med" len="med"/>
+                      <a:tailEnd type="none" w="med" len="med"/>
+                    </a:lnT>
+                    <a:lnB w="6350" cap="flat" cmpd="sng" algn="ctr">
+                      <a:solidFill>
+                        <a:srgbClr val="D1D5DB"/>
+                      </a:solidFill>
+                      <a:prstDash val="solid"/>
+                      <a:round/>
+                      <a:headEnd type="none" w="med" len="med"/>
+                      <a:tailEnd type="none" w="med" len="med"/>
+                    </a:lnB>
+                  </a:tcPr>
+                </a:tc>
+                <a:tc>
+                  <a:txBody>
+                    <a:bodyPr/>
+                    <a:lstStyle/>
+                    <a:p>
+                      <a:pPr algn="l" indent="0" marL="0">
+                        <a:buNone/>
+                      </a:pPr>
+                      <a:r>
+                        <a:rPr lang="en-US" sz="1200" dirty="0">
+                          <a:solidFill>
+                            <a:srgbClr val="000000"/>
+                          </a:solidFill>
+                          <a:latin typeface="Calibri" pitchFamily="34" charset="0"/>
+                          <a:ea typeface="Calibri" pitchFamily="34" charset="-122"/>
+                          <a:cs typeface="Calibri" pitchFamily="34" charset="-120"/>
+                        </a:rPr>
+                        <a:t>One local process — every check runs on your machine, in open-source code</a:t>
+                      </a:r>
+                      <a:endParaRPr lang="en-US" sz="1200" dirty="0">
+                        <a:latin typeface="Calibri" charset="0"/>
+                        <a:ea typeface="Calibri" charset="0"/>
+                        <a:cs typeface="Calibri" charset="0"/>
+                      </a:endParaRPr>
+                    </a:p>
+                  </a:txBody>
+                  <a:tcPr marL="91440" marR="91440" marT="45720" marB="45720">
+                    <a:lnL w="6350" cap="flat" cmpd="sng" algn="ctr">
+                      <a:solidFill>
+                        <a:srgbClr val="D1D5DB"/>
+                      </a:solidFill>
+                      <a:prstDash val="solid"/>
+                      <a:round/>
+                      <a:headEnd type="none" w="med" len="med"/>
+                      <a:tailEnd type="none" w="med" len="med"/>
+                    </a:lnL>
+                    <a:lnR w="6350" cap="flat" cmpd="sng" algn="ctr">
+                      <a:solidFill>
+                        <a:srgbClr val="D1D5DB"/>
+                      </a:solidFill>
+                      <a:prstDash val="solid"/>
+                      <a:round/>
+                      <a:headEnd type="none" w="med" len="med"/>
+                      <a:tailEnd type="none" w="med" len="med"/>
+                    </a:lnR>
+                    <a:lnT w="6350" cap="flat" cmpd="sng" algn="ctr">
+                      <a:solidFill>
+                        <a:srgbClr val="D1D5DB"/>
+                      </a:solidFill>
+                      <a:prstDash val="solid"/>
+                      <a:round/>
+                      <a:headEnd type="none" w="med" len="med"/>
+                      <a:tailEnd type="none" w="med" len="med"/>
+                    </a:lnT>
+                    <a:lnB w="6350" cap="flat" cmpd="sng" algn="ctr">
+                      <a:solidFill>
+                        <a:srgbClr val="D1D5DB"/>
+                      </a:solidFill>
+                      <a:prstDash val="solid"/>
+                      <a:round/>
+                      <a:headEnd type="none" w="med" len="med"/>
+                      <a:tailEnd type="none" w="med" len="med"/>
+                    </a:lnB>
+                  </a:tcPr>
+                </a:tc>
+              </a:tr>
+              <a:tr h="0">
+                <a:tc>
+                  <a:txBody>
+                    <a:bodyPr/>
+                    <a:lstStyle/>
+                    <a:p>
+                      <a:pPr algn="l" indent="0" marL="0">
+                        <a:buNone/>
+                      </a:pPr>
+                      <a:r>
+                        <a:rPr lang="en-US" sz="1200" dirty="0">
+                          <a:solidFill>
+                            <a:srgbClr val="000000"/>
+                          </a:solidFill>
+                          <a:latin typeface="Calibri" pitchFamily="34" charset="0"/>
+                          <a:ea typeface="Calibri" pitchFamily="34" charset="-122"/>
+                          <a:cs typeface="Calibri" pitchFamily="34" charset="-120"/>
+                        </a:rPr>
+                        <a:t>Other local/terminal agents</a:t>
+                      </a:r>
+                      <a:endParaRPr lang="en-US" sz="1200" dirty="0">
+                        <a:latin typeface="Calibri" charset="0"/>
+                        <a:ea typeface="Calibri" charset="0"/>
+                        <a:cs typeface="Calibri" charset="0"/>
+                      </a:endParaRPr>
+                    </a:p>
+                  </a:txBody>
+                  <a:tcPr marL="91440" marR="91440" marT="45720" marB="45720">
+                    <a:lnL w="6350" cap="flat" cmpd="sng" algn="ctr">
+                      <a:solidFill>
+                        <a:srgbClr val="D1D5DB"/>
+                      </a:solidFill>
+                      <a:prstDash val="solid"/>
+                      <a:round/>
+                      <a:headEnd type="none" w="med" len="med"/>
+                      <a:tailEnd type="none" w="med" len="med"/>
+                    </a:lnL>
+                    <a:lnR w="6350" cap="flat" cmpd="sng" algn="ctr">
+                      <a:solidFill>
+                        <a:srgbClr val="D1D5DB"/>
+                      </a:solidFill>
+                      <a:prstDash val="solid"/>
+                      <a:round/>
+                      <a:headEnd type="none" w="med" len="med"/>
+                      <a:tailEnd type="none" w="med" len="med"/>
+                    </a:lnR>
+                    <a:lnT w="6350" cap="flat" cmpd="sng" algn="ctr">
+                      <a:solidFill>
+                        <a:srgbClr val="D1D5DB"/>
+                      </a:solidFill>
+                      <a:prstDash val="solid"/>
+                      <a:round/>
+                      <a:headEnd type="none" w="med" len="med"/>
+                      <a:tailEnd type="none" w="med" len="med"/>
+                    </a:lnT>
+                    <a:lnB w="6350" cap="flat" cmpd="sng" algn="ctr">
+                      <a:solidFill>
+                        <a:srgbClr val="D1D5DB"/>
+                      </a:solidFill>
+                      <a:prstDash val="solid"/>
+                      <a:round/>
+                      <a:headEnd type="none" w="med" len="med"/>
+                      <a:tailEnd type="none" w="med" len="med"/>
+                    </a:lnB>
+                    <a:solidFill>
+                      <a:srgbClr val="F3F4F6"/>
+                    </a:solidFill>
+                  </a:tcPr>
+                </a:tc>
+                <a:tc>
+                  <a:txBody>
+                    <a:bodyPr/>
+                    <a:lstStyle/>
+                    <a:p>
+                      <a:pPr algn="l" indent="0" marL="0">
+                        <a:buNone/>
+                      </a:pPr>
+                      <a:r>
+                        <a:rPr lang="en-US" sz="1200" dirty="0">
+                          <a:solidFill>
+                            <a:srgbClr val="000000"/>
+                          </a:solidFill>
+                          <a:latin typeface="Calibri" pitchFamily="34" charset="0"/>
+                          <a:ea typeface="Calibri" pitchFamily="34" charset="-122"/>
+                          <a:cs typeface="Calibri" pitchFamily="34" charset="-120"/>
+                        </a:rPr>
+                        <a:t>Also local, also model-agnostic — the real comparison</a:t>
+                      </a:r>
+                      <a:endParaRPr lang="en-US" sz="1200" dirty="0">
+                        <a:latin typeface="Calibri" charset="0"/>
+                        <a:ea typeface="Calibri" charset="0"/>
+                        <a:cs typeface="Calibri" charset="0"/>
+                      </a:endParaRPr>
+                    </a:p>
+                  </a:txBody>
+                  <a:tcPr marL="91440" marR="91440" marT="45720" marB="45720">
+                    <a:lnL w="6350" cap="flat" cmpd="sng" algn="ctr">
+                      <a:solidFill>
+                        <a:srgbClr val="D1D5DB"/>
+                      </a:solidFill>
+                      <a:prstDash val="solid"/>
+                      <a:round/>
+                      <a:headEnd type="none" w="med" len="med"/>
+                      <a:tailEnd type="none" w="med" len="med"/>
+                    </a:lnL>
+                    <a:lnR w="6350" cap="flat" cmpd="sng" algn="ctr">
+                      <a:solidFill>
+                        <a:srgbClr val="D1D5DB"/>
+                      </a:solidFill>
+                      <a:prstDash val="solid"/>
+                      <a:round/>
+                      <a:headEnd type="none" w="med" len="med"/>
+                      <a:tailEnd type="none" w="med" len="med"/>
+                    </a:lnR>
+                    <a:lnT w="6350" cap="flat" cmpd="sng" algn="ctr">
+                      <a:solidFill>
+                        <a:srgbClr val="D1D5DB"/>
+                      </a:solidFill>
+                      <a:prstDash val="solid"/>
+                      <a:round/>
+                      <a:headEnd type="none" w="med" len="med"/>
+                      <a:tailEnd type="none" w="med" len="med"/>
+                    </a:lnT>
+                    <a:lnB w="6350" cap="flat" cmpd="sng" algn="ctr">
+                      <a:solidFill>
+                        <a:srgbClr val="D1D5DB"/>
+                      </a:solidFill>
+                      <a:prstDash val="solid"/>
+                      <a:round/>
+                      <a:headEnd type="none" w="med" len="med"/>
+                      <a:tailEnd type="none" w="med" len="med"/>
+                    </a:lnB>
+                    <a:solidFill>
+                      <a:srgbClr val="F3F4F6"/>
+                    </a:solidFill>
+                  </a:tcPr>
+                </a:tc>
+                <a:tc>
+                  <a:txBody>
+                    <a:bodyPr/>
+                    <a:lstStyle/>
+                    <a:p>
+                      <a:pPr algn="l" indent="0" marL="0">
+                        <a:buNone/>
+                      </a:pPr>
+                      <a:r>
+                        <a:rPr lang="en-US" sz="1200" dirty="0">
+                          <a:solidFill>
+                            <a:srgbClr val="000000"/>
+                          </a:solidFill>
+                          <a:latin typeface="Calibri" pitchFamily="34" charset="0"/>
+                          <a:ea typeface="Calibri" pitchFamily="34" charset="-122"/>
+                          <a:cs typeface="Calibri" pitchFamily="34" charset="-120"/>
+                        </a:rPr>
+                        <a:t>Typically no independent critique, no formalized confidence score</a:t>
+                      </a:r>
+                      <a:endParaRPr lang="en-US" sz="1200" dirty="0">
+                        <a:latin typeface="Calibri" charset="0"/>
+                        <a:ea typeface="Calibri" charset="0"/>
+                        <a:cs typeface="Calibri" charset="0"/>
+                      </a:endParaRPr>
+                    </a:p>
+                  </a:txBody>
+                  <a:tcPr marL="91440" marR="91440" marT="45720" marB="45720">
+                    <a:lnL w="6350" cap="flat" cmpd="sng" algn="ctr">
+                      <a:solidFill>
+                        <a:srgbClr val="D1D5DB"/>
+                      </a:solidFill>
+                      <a:prstDash val="solid"/>
+                      <a:round/>
+                      <a:headEnd type="none" w="med" len="med"/>
+                      <a:tailEnd type="none" w="med" len="med"/>
+                    </a:lnL>
+                    <a:lnR w="6350" cap="flat" cmpd="sng" algn="ctr">
+                      <a:solidFill>
+                        <a:srgbClr val="D1D5DB"/>
+                      </a:solidFill>
+                      <a:prstDash val="solid"/>
+                      <a:round/>
+                      <a:headEnd type="none" w="med" len="med"/>
+                      <a:tailEnd type="none" w="med" len="med"/>
+                    </a:lnR>
+                    <a:lnT w="6350" cap="flat" cmpd="sng" algn="ctr">
+                      <a:solidFill>
+                        <a:srgbClr val="D1D5DB"/>
+                      </a:solidFill>
+                      <a:prstDash val="solid"/>
+                      <a:round/>
+                      <a:headEnd type="none" w="med" len="med"/>
+                      <a:tailEnd type="none" w="med" len="med"/>
+                    </a:lnT>
+                    <a:lnB w="6350" cap="flat" cmpd="sng" algn="ctr">
+                      <a:solidFill>
+                        <a:srgbClr val="D1D5DB"/>
+                      </a:solidFill>
+                      <a:prstDash val="solid"/>
+                      <a:round/>
+                      <a:headEnd type="none" w="med" len="med"/>
+                      <a:tailEnd type="none" w="med" len="med"/>
+                    </a:lnB>
+                    <a:solidFill>
+                      <a:srgbClr val="F3F4F6"/>
+                    </a:solidFill>
+                  </a:tcPr>
+                </a:tc>
+                <a:tc>
+                  <a:txBody>
+                    <a:bodyPr/>
+                    <a:lstStyle/>
+                    <a:p>
+                      <a:pPr algn="l" indent="0" marL="0">
+                        <a:buNone/>
+                      </a:pPr>
+                      <a:r>
+                        <a:rPr lang="en-US" sz="1200" dirty="0">
+                          <a:solidFill>
+                            <a:srgbClr val="000000"/>
+                          </a:solidFill>
+                          <a:latin typeface="Calibri" pitchFamily="34" charset="0"/>
+                          <a:ea typeface="Calibri" pitchFamily="34" charset="-122"/>
+                          <a:cs typeface="Calibri" pitchFamily="34" charset="-120"/>
+                        </a:rPr>
+                        <a:t>Independent critic, quality gate, and the Nishant Convergence Protocol</a:t>
+                      </a:r>
+                      <a:endParaRPr lang="en-US" sz="1200" dirty="0">
+                        <a:latin typeface="Calibri" charset="0"/>
+                        <a:ea typeface="Calibri" charset="0"/>
+                        <a:cs typeface="Calibri" charset="0"/>
+                      </a:endParaRPr>
+                    </a:p>
+                  </a:txBody>
+                  <a:tcPr marL="91440" marR="91440" marT="45720" marB="45720">
+                    <a:lnL w="6350" cap="flat" cmpd="sng" algn="ctr">
+                      <a:solidFill>
+                        <a:srgbClr val="D1D5DB"/>
+                      </a:solidFill>
+                      <a:prstDash val="solid"/>
+                      <a:round/>
+                      <a:headEnd type="none" w="med" len="med"/>
+                      <a:tailEnd type="none" w="med" len="med"/>
+                    </a:lnL>
+                    <a:lnR w="6350" cap="flat" cmpd="sng" algn="ctr">
+                      <a:solidFill>
+                        <a:srgbClr val="D1D5DB"/>
+                      </a:solidFill>
+                      <a:prstDash val="solid"/>
+                      <a:round/>
+                      <a:headEnd type="none" w="med" len="med"/>
+                      <a:tailEnd type="none" w="med" len="med"/>
+                    </a:lnR>
+                    <a:lnT w="6350" cap="flat" cmpd="sng" algn="ctr">
+                      <a:solidFill>
+                        <a:srgbClr val="D1D5DB"/>
+                      </a:solidFill>
+                      <a:prstDash val="solid"/>
+                      <a:round/>
+                      <a:headEnd type="none" w="med" len="med"/>
+                      <a:tailEnd type="none" w="med" len="med"/>
+                    </a:lnT>
+                    <a:lnB w="6350" cap="flat" cmpd="sng" algn="ctr">
+                      <a:solidFill>
+                        <a:srgbClr val="D1D5DB"/>
+                      </a:solidFill>
+                      <a:prstDash val="solid"/>
+                      <a:round/>
+                      <a:headEnd type="none" w="med" len="med"/>
+                      <a:tailEnd type="none" w="med" len="med"/>
+                    </a:lnB>
+                    <a:solidFill>
+                      <a:srgbClr val="F3F4F6"/>
+                    </a:solidFill>
+                  </a:tcPr>
+                </a:tc>
+              </a:tr>
+            </a:tbl>
+          </a:graphicData>
+        </a:graphic>
+      </p:graphicFrame>
+      <p:sp>
+        <p:nvSpPr>
+          <p:cNvPr id="4" name="Text 1"/>
+          <p:cNvSpPr/>
+          <p:nvPr/>
+        </p:nvSpPr>
+        <p:spPr>
+          <a:xfrm>
+            <a:off x="457200" y="4754880"/>
+            <a:ext cx="8229600" cy="365760"/>
+          </a:xfrm>
+          <a:prstGeom prst="rect">
+            <a:avLst/>
+          </a:prstGeom>
+          <a:noFill/>
+          <a:ln/>
+        </p:spPr>
+        <p:txBody>
+          <a:bodyPr wrap="square" rtlCol="0" anchor="ctr"/>
+          <a:lstStyle/>
+          <a:p>
+            <a:pPr algn="l" indent="0" marL="0">
+              <a:buNone/>
+            </a:pPr>
+            <a:r>
+              <a:rPr lang="en-US" sz="1300" i="1" dirty="0">
+                <a:solidFill>
+                  <a:srgbClr val="6B7280"/>
+                </a:solidFill>
+                <a:latin typeface="Calibri" pitchFamily="34" charset="0"/>
+                <a:ea typeface="Calibri" pitchFamily="34" charset="-122"/>
+                <a:cs typeface="Calibri" pitchFamily="34" charset="-120"/>
+              </a:rPr>
+              <a:t>The honest pitch is narrower than "better at everything": verified reliability compounds where raw generation speed doesn't.</a:t>
+            </a:r>
+            <a:endParaRPr lang="en-US" sz="1300" dirty="0"/>
+          </a:p>
+        </p:txBody>
+      </p:sp>
+    </p:spTree>
+  </p:cSld>
+  <p:clrMapOvr>
+    <a:masterClrMapping/>
+  </p:clrMapOvr>
+</p:sld>
+</file>
+
 <file path=ppt/slides/slide2.xml><?xml version="1.0" encoding="utf-8"?>
 <p:sld xmlns:a="http://schemas.openxmlformats.org/drawingml/2006/main" xmlns:r="http://schemas.openxmlformats.org/officeDocument/2006/relationships" xmlns:p="http://schemas.openxmlformats.org/presentationml/2006/main">
   <p:cSld name="Slide 2">
